--- a/frontend/public/presentation-templates/grid-notebook-v2.pptx
+++ b/frontend/public/presentation-templates/grid-notebook-v2.pptx
@@ -2,30 +2,30 @@
 <file path=ppt/presentation.xml><?xml version="1.0" encoding="utf-8"?>
 <p:presentation xmlns:p="http://schemas.openxmlformats.org/presentationml/2006/main">
   <p:sldMasterIdLst>
-    <p:sldMasterId xmlns:r="http://schemas.openxmlformats.org/officeDocument/2006/relationships" id="2147483648" r:id="Rdaaf5173f28e4c9b"/>
+    <p:sldMasterId xmlns:r="http://schemas.openxmlformats.org/officeDocument/2006/relationships" id="2147483648" r:id="R742f7d8e554741ab"/>
   </p:sldMasterIdLst>
   <p:notesMasterIdLst>
-    <p:notesMasterId xmlns:r="http://schemas.openxmlformats.org/officeDocument/2006/relationships" r:id="R7ee46aa285e943fa"/>
+    <p:notesMasterId xmlns:r="http://schemas.openxmlformats.org/officeDocument/2006/relationships" r:id="R1e45135607d246ac"/>
   </p:notesMasterIdLst>
   <p:sldIdLst>
-    <p:sldId xmlns:r="http://schemas.openxmlformats.org/officeDocument/2006/relationships" id="256" r:id="Rfc0322b1b01840e5"/>
-    <p:sldId xmlns:r="http://schemas.openxmlformats.org/officeDocument/2006/relationships" id="257" r:id="R3d3e513ce07f48d8"/>
-    <p:sldId xmlns:r="http://schemas.openxmlformats.org/officeDocument/2006/relationships" id="258" r:id="R652df1d546df4910"/>
-    <p:sldId xmlns:r="http://schemas.openxmlformats.org/officeDocument/2006/relationships" id="259" r:id="Rff8d55d09d70478d"/>
-    <p:sldId xmlns:r="http://schemas.openxmlformats.org/officeDocument/2006/relationships" id="260" r:id="R3334f41ed0564924"/>
-    <p:sldId xmlns:r="http://schemas.openxmlformats.org/officeDocument/2006/relationships" id="261" r:id="R404750a998154e2a"/>
-    <p:sldId xmlns:r="http://schemas.openxmlformats.org/officeDocument/2006/relationships" id="262" r:id="R2205f971be574c6b"/>
-    <p:sldId xmlns:r="http://schemas.openxmlformats.org/officeDocument/2006/relationships" id="263" r:id="Rb04e4ce1992246cd"/>
-    <p:sldId xmlns:r="http://schemas.openxmlformats.org/officeDocument/2006/relationships" id="264" r:id="R6d04002371ee4aa9"/>
-    <p:sldId xmlns:r="http://schemas.openxmlformats.org/officeDocument/2006/relationships" id="265" r:id="R221407a192f84b81"/>
-    <p:sldId xmlns:r="http://schemas.openxmlformats.org/officeDocument/2006/relationships" id="266" r:id="R5466ef0dfe824add"/>
-    <p:sldId xmlns:r="http://schemas.openxmlformats.org/officeDocument/2006/relationships" id="267" r:id="Rbdd8be84ef16460c"/>
-    <p:sldId xmlns:r="http://schemas.openxmlformats.org/officeDocument/2006/relationships" id="268" r:id="Rf0251aa80d3b4978"/>
-    <p:sldId xmlns:r="http://schemas.openxmlformats.org/officeDocument/2006/relationships" id="269" r:id="R0187c396af784ffe"/>
-    <p:sldId xmlns:r="http://schemas.openxmlformats.org/officeDocument/2006/relationships" id="270" r:id="R441f7a94bc5549ee"/>
-    <p:sldId xmlns:r="http://schemas.openxmlformats.org/officeDocument/2006/relationships" id="271" r:id="R79f8d1c2b881495b"/>
-    <p:sldId xmlns:r="http://schemas.openxmlformats.org/officeDocument/2006/relationships" id="272" r:id="Rcc818e6c69e1475c"/>
-    <p:sldId xmlns:r="http://schemas.openxmlformats.org/officeDocument/2006/relationships" id="273" r:id="R6eefd07143f54d6b"/>
+    <p:sldId xmlns:r="http://schemas.openxmlformats.org/officeDocument/2006/relationships" id="256" r:id="R8711a4b8a1154c9e"/>
+    <p:sldId xmlns:r="http://schemas.openxmlformats.org/officeDocument/2006/relationships" id="257" r:id="R3a10a0b33314448e"/>
+    <p:sldId xmlns:r="http://schemas.openxmlformats.org/officeDocument/2006/relationships" id="258" r:id="R1a2dcb26af16490a"/>
+    <p:sldId xmlns:r="http://schemas.openxmlformats.org/officeDocument/2006/relationships" id="259" r:id="Rf5c2b1f3318640f0"/>
+    <p:sldId xmlns:r="http://schemas.openxmlformats.org/officeDocument/2006/relationships" id="260" r:id="R385f95c4e8114941"/>
+    <p:sldId xmlns:r="http://schemas.openxmlformats.org/officeDocument/2006/relationships" id="261" r:id="Rf87eae8731ee44d3"/>
+    <p:sldId xmlns:r="http://schemas.openxmlformats.org/officeDocument/2006/relationships" id="262" r:id="Rf4dee672cd7745cf"/>
+    <p:sldId xmlns:r="http://schemas.openxmlformats.org/officeDocument/2006/relationships" id="263" r:id="Rbc4d30301b554647"/>
+    <p:sldId xmlns:r="http://schemas.openxmlformats.org/officeDocument/2006/relationships" id="264" r:id="Rb797cf0607ac4c21"/>
+    <p:sldId xmlns:r="http://schemas.openxmlformats.org/officeDocument/2006/relationships" id="265" r:id="R6be8beb582b14b86"/>
+    <p:sldId xmlns:r="http://schemas.openxmlformats.org/officeDocument/2006/relationships" id="266" r:id="R069842f4bba145c9"/>
+    <p:sldId xmlns:r="http://schemas.openxmlformats.org/officeDocument/2006/relationships" id="267" r:id="R9ecbb778a4684f27"/>
+    <p:sldId xmlns:r="http://schemas.openxmlformats.org/officeDocument/2006/relationships" id="268" r:id="R86b7400979984211"/>
+    <p:sldId xmlns:r="http://schemas.openxmlformats.org/officeDocument/2006/relationships" id="269" r:id="R3d2052f6846d441b"/>
+    <p:sldId xmlns:r="http://schemas.openxmlformats.org/officeDocument/2006/relationships" id="270" r:id="R04ca81b6e16246e0"/>
+    <p:sldId xmlns:r="http://schemas.openxmlformats.org/officeDocument/2006/relationships" id="271" r:id="Ra566f82e42904752"/>
+    <p:sldId xmlns:r="http://schemas.openxmlformats.org/officeDocument/2006/relationships" id="272" r:id="R2dc8d1fb0346409f"/>
+    <p:sldId xmlns:r="http://schemas.openxmlformats.org/officeDocument/2006/relationships" id="273" r:id="Rbea8950156ff4a2a"/>
   </p:sldIdLst>
   <p:sldSz cx="12192000" cy="6858000"/>
   <p:notesSz cx="6858000" cy="9144000"/>
@@ -1897,7 +1897,7 @@
   </p:cSld>
   <p:clrMap bg1="lt1" tx1="dk1" bg2="lt2" tx2="dk2" accent1="accent1" accent2="accent2" accent3="accent3" accent4="accent4" accent5="accent5" accent6="accent6" hlink="hlink" folHlink="folHlink"/>
   <p:sldLayoutIdLst>
-    <p:sldLayoutId xmlns:r="http://schemas.openxmlformats.org/officeDocument/2006/relationships" id="2147483649" r:id="R7b4310bf96294297"/>
+    <p:sldLayoutId xmlns:r="http://schemas.openxmlformats.org/officeDocument/2006/relationships" id="2147483649" r:id="R3efe8aff9fd44fc3"/>
   </p:sldLayoutIdLst>
   <p:txStyles>
     <p:titleStyle>
@@ -2445,7 +2445,7 @@
           <p:nvPr/>
         </p:nvPicPr>
         <p:blipFill>
-          <a:blip xmlns:r="http://schemas.openxmlformats.org/officeDocument/2006/relationships" xmlns:a="http://schemas.openxmlformats.org/drawingml/2006/main" r:embed="R6add62a0d7f34266"/>
+          <a:blip xmlns:r="http://schemas.openxmlformats.org/officeDocument/2006/relationships" xmlns:a="http://schemas.openxmlformats.org/drawingml/2006/main" r:embed="R08273b0524e849db"/>
           <a:srcRect xmlns:a="http://schemas.openxmlformats.org/drawingml/2006/main" l="0" t="0" r="0" b="0"/>
           <a:stretch xmlns:a="http://schemas.openxmlformats.org/drawingml/2006/main">
             <a:fillRect l="0" t="0" r="0" b="0"/>
@@ -2466,7 +2466,7 @@
           <p:cNvPr id="2" name="">
             <a:extLst xmlns:a="http://schemas.openxmlformats.org/drawingml/2006/main">
               <a:ext uri="{FF2B5EF4-FFF2-40B4-BE49-F238E27FC236}">
-                <a16:creationId xmlns:a16="http://schemas.microsoft.com/office/drawing/2014/main" id="{1599278A-826B-4133-AE1D-0D9DFE6E6608}"/>
+                <a16:creationId xmlns:a16="http://schemas.microsoft.com/office/drawing/2014/main" id="{0C72346F-4B43-4655-BFB1-AC30B5996858}"/>
               </a:ext>
             </a:extLst>
           </p:cNvPr>
@@ -2528,7 +2528,7 @@
           <p:cNvPr id="3" name="">
             <a:extLst xmlns:a="http://schemas.openxmlformats.org/drawingml/2006/main">
               <a:ext uri="{FF2B5EF4-FFF2-40B4-BE49-F238E27FC236}">
-                <a16:creationId xmlns:a16="http://schemas.microsoft.com/office/drawing/2014/main" id="{1AA606AE-0FAA-41D0-A9B0-0FA8C167F3FE}"/>
+                <a16:creationId xmlns:a16="http://schemas.microsoft.com/office/drawing/2014/main" id="{DA0B957D-B919-43EE-AC94-BF9346DA7BEA}"/>
               </a:ext>
             </a:extLst>
           </p:cNvPr>
@@ -2540,7 +2540,7 @@
         <p:spPr>
           <a:xfrm xmlns:a="http://schemas.openxmlformats.org/drawingml/2006/main">
             <a:off x="1714500" y="1885950"/>
-            <a:ext cx="6572250" cy="1524000"/>
+            <a:ext cx="7620000" cy="1524000"/>
           </a:xfrm>
           <a:prstGeom xmlns:a="http://schemas.openxmlformats.org/drawingml/2006/main" prst="rect">
             <a:avLst/>
@@ -2590,7 +2590,7 @@
           <p:cNvPr id="4" name="">
             <a:extLst xmlns:a="http://schemas.openxmlformats.org/drawingml/2006/main">
               <a:ext uri="{FF2B5EF4-FFF2-40B4-BE49-F238E27FC236}">
-                <a16:creationId xmlns:a16="http://schemas.microsoft.com/office/drawing/2014/main" id="{F7FA12AD-0186-4AEA-84D6-D175BDA4F5E4}"/>
+                <a16:creationId xmlns:a16="http://schemas.microsoft.com/office/drawing/2014/main" id="{782EA406-3E9F-43AC-91D6-4E195A45D47F}"/>
               </a:ext>
             </a:extLst>
           </p:cNvPr>
@@ -2652,7 +2652,7 @@
           <p:cNvPr id="5" name="">
             <a:extLst xmlns:a="http://schemas.openxmlformats.org/drawingml/2006/main">
               <a:ext uri="{FF2B5EF4-FFF2-40B4-BE49-F238E27FC236}">
-                <a16:creationId xmlns:a16="http://schemas.microsoft.com/office/drawing/2014/main" id="{89C70DAC-DE98-44AD-BCD8-A0038A757975}"/>
+                <a16:creationId xmlns:a16="http://schemas.microsoft.com/office/drawing/2014/main" id="{AB38C1ED-205B-4F50-8E7A-074D6910DB2A}"/>
               </a:ext>
             </a:extLst>
           </p:cNvPr>
@@ -2714,7 +2714,7 @@
           <p:cNvPr id="6" name="">
             <a:extLst xmlns:a="http://schemas.openxmlformats.org/drawingml/2006/main">
               <a:ext uri="{FF2B5EF4-FFF2-40B4-BE49-F238E27FC236}">
-                <a16:creationId xmlns:a16="http://schemas.microsoft.com/office/drawing/2014/main" id="{27458614-7361-4247-B134-7D780CC2730C}"/>
+                <a16:creationId xmlns:a16="http://schemas.microsoft.com/office/drawing/2014/main" id="{50EA101C-3C74-4618-AE63-4E2D9821BB4E}"/>
               </a:ext>
             </a:extLst>
           </p:cNvPr>
@@ -2774,7 +2774,7 @@
     </p:spTree>
     <p:extLst>
       <p:ext uri="{BB962C8B-B14F-4D97-AF65-F5344CB8AC3E}">
-        <p14:creationId xmlns:p14="http://schemas.microsoft.com/office/powerpoint/2010/main" val="1594223811"/>
+        <p14:creationId xmlns:p14="http://schemas.microsoft.com/office/powerpoint/2010/main" val="1394246067"/>
       </p:ext>
     </p:extLst>
   </p:cSld>
@@ -2802,7 +2802,7 @@
           <p:nvPr/>
         </p:nvPicPr>
         <p:blipFill>
-          <a:blip xmlns:r="http://schemas.openxmlformats.org/officeDocument/2006/relationships" xmlns:a="http://schemas.openxmlformats.org/drawingml/2006/main" r:embed="R2eca860cad484edc"/>
+          <a:blip xmlns:r="http://schemas.openxmlformats.org/officeDocument/2006/relationships" xmlns:a="http://schemas.openxmlformats.org/drawingml/2006/main" r:embed="R12e4fe0b59ae4e82"/>
           <a:srcRect xmlns:a="http://schemas.openxmlformats.org/drawingml/2006/main" l="0" t="0" r="0" b="0"/>
           <a:stretch xmlns:a="http://schemas.openxmlformats.org/drawingml/2006/main">
             <a:fillRect l="0" t="0" r="0" b="0"/>
@@ -2823,7 +2823,7 @@
           <p:cNvPr id="2" name="">
             <a:extLst xmlns:a="http://schemas.openxmlformats.org/drawingml/2006/main">
               <a:ext uri="{FF2B5EF4-FFF2-40B4-BE49-F238E27FC236}">
-                <a16:creationId xmlns:a16="http://schemas.microsoft.com/office/drawing/2014/main" id="{AC45A966-275B-49DC-83CF-78F37A78EDDD}"/>
+                <a16:creationId xmlns:a16="http://schemas.microsoft.com/office/drawing/2014/main" id="{73198323-B045-415B-9E26-FBFFEAE02F32}"/>
               </a:ext>
             </a:extLst>
           </p:cNvPr>
@@ -2885,7 +2885,7 @@
           <p:cNvPr id="3" name="">
             <a:extLst xmlns:a="http://schemas.openxmlformats.org/drawingml/2006/main">
               <a:ext uri="{FF2B5EF4-FFF2-40B4-BE49-F238E27FC236}">
-                <a16:creationId xmlns:a16="http://schemas.microsoft.com/office/drawing/2014/main" id="{CC775F7F-D4DA-4A8B-A3C0-7DFAA81B551A}"/>
+                <a16:creationId xmlns:a16="http://schemas.microsoft.com/office/drawing/2014/main" id="{91B9147C-C110-4268-AA37-201DBB428047}"/>
               </a:ext>
             </a:extLst>
           </p:cNvPr>
@@ -2947,7 +2947,7 @@
           <p:cNvPr id="4" name="">
             <a:extLst xmlns:a="http://schemas.openxmlformats.org/drawingml/2006/main">
               <a:ext uri="{FF2B5EF4-FFF2-40B4-BE49-F238E27FC236}">
-                <a16:creationId xmlns:a16="http://schemas.microsoft.com/office/drawing/2014/main" id="{36C87391-2094-4C38-918F-1A966A74D086}"/>
+                <a16:creationId xmlns:a16="http://schemas.microsoft.com/office/drawing/2014/main" id="{6D73315E-2CBB-42D5-8641-20DF04CC0549}"/>
               </a:ext>
             </a:extLst>
           </p:cNvPr>
@@ -3009,7 +3009,7 @@
           <p:cNvPr id="5" name="">
             <a:extLst xmlns:a="http://schemas.openxmlformats.org/drawingml/2006/main">
               <a:ext uri="{FF2B5EF4-FFF2-40B4-BE49-F238E27FC236}">
-                <a16:creationId xmlns:a16="http://schemas.microsoft.com/office/drawing/2014/main" id="{5CA157FF-4603-4AE1-87D2-B6591662BCCE}"/>
+                <a16:creationId xmlns:a16="http://schemas.microsoft.com/office/drawing/2014/main" id="{3BFB8726-EDE7-4965-A784-2AF6292C90DD}"/>
               </a:ext>
             </a:extLst>
           </p:cNvPr>
@@ -3040,7 +3040,7 @@
           <p:cNvPr id="6" name="">
             <a:extLst xmlns:a="http://schemas.openxmlformats.org/drawingml/2006/main">
               <a:ext uri="{FF2B5EF4-FFF2-40B4-BE49-F238E27FC236}">
-                <a16:creationId xmlns:a16="http://schemas.microsoft.com/office/drawing/2014/main" id="{423E4F25-328D-4053-8860-5D6224AD76B6}"/>
+                <a16:creationId xmlns:a16="http://schemas.microsoft.com/office/drawing/2014/main" id="{2DBA39E0-A0A8-4F7D-9D6C-4DBCDA7A5C2A}"/>
               </a:ext>
             </a:extLst>
           </p:cNvPr>
@@ -3102,7 +3102,7 @@
           <p:cNvPr id="7" name="">
             <a:extLst xmlns:a="http://schemas.openxmlformats.org/drawingml/2006/main">
               <a:ext uri="{FF2B5EF4-FFF2-40B4-BE49-F238E27FC236}">
-                <a16:creationId xmlns:a16="http://schemas.microsoft.com/office/drawing/2014/main" id="{D31CD581-3978-4F49-9FCF-E8B0DDD8E88C}"/>
+                <a16:creationId xmlns:a16="http://schemas.microsoft.com/office/drawing/2014/main" id="{AEB2B7DB-2312-47FA-9EC3-557A7205E467}"/>
               </a:ext>
             </a:extLst>
           </p:cNvPr>
@@ -3135,7 +3135,7 @@
           <p:cNvPr id="8" name="">
             <a:extLst xmlns:a="http://schemas.openxmlformats.org/drawingml/2006/main">
               <a:ext uri="{FF2B5EF4-FFF2-40B4-BE49-F238E27FC236}">
-                <a16:creationId xmlns:a16="http://schemas.microsoft.com/office/drawing/2014/main" id="{6DA15EA7-DA48-45E0-95B1-DB185F77E818}"/>
+                <a16:creationId xmlns:a16="http://schemas.microsoft.com/office/drawing/2014/main" id="{ADAB11E0-88A2-42F9-B9C8-E56F2CB91426}"/>
               </a:ext>
             </a:extLst>
           </p:cNvPr>
@@ -3170,7 +3170,7 @@
           <p:cNvPr id="9" name="">
             <a:extLst xmlns:a="http://schemas.openxmlformats.org/drawingml/2006/main">
               <a:ext uri="{FF2B5EF4-FFF2-40B4-BE49-F238E27FC236}">
-                <a16:creationId xmlns:a16="http://schemas.microsoft.com/office/drawing/2014/main" id="{8C1E741A-45A5-4101-88D9-07A925E32383}"/>
+                <a16:creationId xmlns:a16="http://schemas.microsoft.com/office/drawing/2014/main" id="{A516A24A-C105-44DA-9F5A-54F3D6719FFA}"/>
               </a:ext>
             </a:extLst>
           </p:cNvPr>
@@ -3201,7 +3201,7 @@
           <p:cNvPr id="10" name="">
             <a:extLst xmlns:a="http://schemas.openxmlformats.org/drawingml/2006/main">
               <a:ext uri="{FF2B5EF4-FFF2-40B4-BE49-F238E27FC236}">
-                <a16:creationId xmlns:a16="http://schemas.microsoft.com/office/drawing/2014/main" id="{45E511B2-C9CF-466C-BA41-8152B497E5AA}"/>
+                <a16:creationId xmlns:a16="http://schemas.microsoft.com/office/drawing/2014/main" id="{252BD7E8-8484-4F33-88EF-280E39BA974A}"/>
               </a:ext>
             </a:extLst>
           </p:cNvPr>
@@ -3263,7 +3263,7 @@
           <p:cNvPr id="11" name="">
             <a:extLst xmlns:a="http://schemas.openxmlformats.org/drawingml/2006/main">
               <a:ext uri="{FF2B5EF4-FFF2-40B4-BE49-F238E27FC236}">
-                <a16:creationId xmlns:a16="http://schemas.microsoft.com/office/drawing/2014/main" id="{E69A883D-044E-4A2C-AFB5-3D2BB2F41B6F}"/>
+                <a16:creationId xmlns:a16="http://schemas.microsoft.com/office/drawing/2014/main" id="{6432B258-A8BA-4C13-BBFF-A3D176D47625}"/>
               </a:ext>
             </a:extLst>
           </p:cNvPr>
@@ -3325,7 +3325,7 @@
           <p:cNvPr id="12" name="">
             <a:extLst xmlns:a="http://schemas.openxmlformats.org/drawingml/2006/main">
               <a:ext uri="{FF2B5EF4-FFF2-40B4-BE49-F238E27FC236}">
-                <a16:creationId xmlns:a16="http://schemas.microsoft.com/office/drawing/2014/main" id="{946EF169-CEBC-42D4-AF81-F54D5D591811}"/>
+                <a16:creationId xmlns:a16="http://schemas.microsoft.com/office/drawing/2014/main" id="{4C4AB8C0-05B1-4C7A-81AA-7806F0ABB96B}"/>
               </a:ext>
             </a:extLst>
           </p:cNvPr>
@@ -3358,7 +3358,7 @@
           <p:cNvPr id="13" name="">
             <a:extLst xmlns:a="http://schemas.openxmlformats.org/drawingml/2006/main">
               <a:ext uri="{FF2B5EF4-FFF2-40B4-BE49-F238E27FC236}">
-                <a16:creationId xmlns:a16="http://schemas.microsoft.com/office/drawing/2014/main" id="{72EBAB0E-00FF-4AE2-86B5-91A389372A78}"/>
+                <a16:creationId xmlns:a16="http://schemas.microsoft.com/office/drawing/2014/main" id="{54B5EB83-1D44-459E-A167-53D5DB55B355}"/>
               </a:ext>
             </a:extLst>
           </p:cNvPr>
@@ -3393,7 +3393,7 @@
           <p:cNvPr id="14" name="">
             <a:extLst xmlns:a="http://schemas.openxmlformats.org/drawingml/2006/main">
               <a:ext uri="{FF2B5EF4-FFF2-40B4-BE49-F238E27FC236}">
-                <a16:creationId xmlns:a16="http://schemas.microsoft.com/office/drawing/2014/main" id="{47EFEBDE-1062-4C5C-B404-4D729C782B94}"/>
+                <a16:creationId xmlns:a16="http://schemas.microsoft.com/office/drawing/2014/main" id="{6CFCC1B6-5637-4D13-935C-FA31CA0E40FE}"/>
               </a:ext>
             </a:extLst>
           </p:cNvPr>
@@ -3424,7 +3424,7 @@
           <p:cNvPr id="15" name="">
             <a:extLst xmlns:a="http://schemas.openxmlformats.org/drawingml/2006/main">
               <a:ext uri="{FF2B5EF4-FFF2-40B4-BE49-F238E27FC236}">
-                <a16:creationId xmlns:a16="http://schemas.microsoft.com/office/drawing/2014/main" id="{38EE2B6E-0CC5-4900-8D8C-ED7A44CDB38D}"/>
+                <a16:creationId xmlns:a16="http://schemas.microsoft.com/office/drawing/2014/main" id="{9B77AB3D-54CF-4C63-8019-D3279D33BC60}"/>
               </a:ext>
             </a:extLst>
           </p:cNvPr>
@@ -3486,7 +3486,7 @@
           <p:cNvPr id="16" name="">
             <a:extLst xmlns:a="http://schemas.openxmlformats.org/drawingml/2006/main">
               <a:ext uri="{FF2B5EF4-FFF2-40B4-BE49-F238E27FC236}">
-                <a16:creationId xmlns:a16="http://schemas.microsoft.com/office/drawing/2014/main" id="{5E1B023C-7A24-4684-B861-1849C2EB48CB}"/>
+                <a16:creationId xmlns:a16="http://schemas.microsoft.com/office/drawing/2014/main" id="{E7C543C0-F47F-4DB9-97CE-8165116A40CF}"/>
               </a:ext>
             </a:extLst>
           </p:cNvPr>
@@ -3548,7 +3548,7 @@
           <p:cNvPr id="17" name="">
             <a:extLst xmlns:a="http://schemas.openxmlformats.org/drawingml/2006/main">
               <a:ext uri="{FF2B5EF4-FFF2-40B4-BE49-F238E27FC236}">
-                <a16:creationId xmlns:a16="http://schemas.microsoft.com/office/drawing/2014/main" id="{FBBB4172-B3A9-4812-BAAF-483938AEA395}"/>
+                <a16:creationId xmlns:a16="http://schemas.microsoft.com/office/drawing/2014/main" id="{AF4E78C3-3F67-45FB-8401-A9FD441FA366}"/>
               </a:ext>
             </a:extLst>
           </p:cNvPr>
@@ -3610,7 +3610,7 @@
           <p:cNvPr id="18" name="">
             <a:extLst xmlns:a="http://schemas.openxmlformats.org/drawingml/2006/main">
               <a:ext uri="{FF2B5EF4-FFF2-40B4-BE49-F238E27FC236}">
-                <a16:creationId xmlns:a16="http://schemas.microsoft.com/office/drawing/2014/main" id="{A3DE4F3A-E560-43A7-9F8A-4C02EB4E42E9}"/>
+                <a16:creationId xmlns:a16="http://schemas.microsoft.com/office/drawing/2014/main" id="{275E4460-3A8A-4B3A-A533-5BD3F3C94E40}"/>
               </a:ext>
             </a:extLst>
           </p:cNvPr>
@@ -3670,7 +3670,7 @@
     </p:spTree>
     <p:extLst>
       <p:ext uri="{BB962C8B-B14F-4D97-AF65-F5344CB8AC3E}">
-        <p14:creationId xmlns:p14="http://schemas.microsoft.com/office/powerpoint/2010/main" val="1146209107"/>
+        <p14:creationId xmlns:p14="http://schemas.microsoft.com/office/powerpoint/2010/main" val="1570319260"/>
       </p:ext>
     </p:extLst>
   </p:cSld>
@@ -3698,7 +3698,7 @@
           <p:nvPr/>
         </p:nvPicPr>
         <p:blipFill>
-          <a:blip xmlns:r="http://schemas.openxmlformats.org/officeDocument/2006/relationships" xmlns:a="http://schemas.openxmlformats.org/drawingml/2006/main" r:embed="R8377a1caed4e406f"/>
+          <a:blip xmlns:r="http://schemas.openxmlformats.org/officeDocument/2006/relationships" xmlns:a="http://schemas.openxmlformats.org/drawingml/2006/main" r:embed="Rca4eb2dabb6f427c"/>
           <a:srcRect xmlns:a="http://schemas.openxmlformats.org/drawingml/2006/main" l="0" t="0" r="0" b="0"/>
           <a:stretch xmlns:a="http://schemas.openxmlformats.org/drawingml/2006/main">
             <a:fillRect l="0" t="0" r="0" b="0"/>
@@ -3719,7 +3719,7 @@
           <p:cNvPr id="2" name="">
             <a:extLst xmlns:a="http://schemas.openxmlformats.org/drawingml/2006/main">
               <a:ext uri="{FF2B5EF4-FFF2-40B4-BE49-F238E27FC236}">
-                <a16:creationId xmlns:a16="http://schemas.microsoft.com/office/drawing/2014/main" id="{F42BB58E-B8A7-472C-B050-02F1ECECA103}"/>
+                <a16:creationId xmlns:a16="http://schemas.microsoft.com/office/drawing/2014/main" id="{7FBFA81D-E27B-4ECD-A501-3CB3B9B755F0}"/>
               </a:ext>
             </a:extLst>
           </p:cNvPr>
@@ -3781,7 +3781,7 @@
           <p:cNvPr id="3" name="">
             <a:extLst xmlns:a="http://schemas.openxmlformats.org/drawingml/2006/main">
               <a:ext uri="{FF2B5EF4-FFF2-40B4-BE49-F238E27FC236}">
-                <a16:creationId xmlns:a16="http://schemas.microsoft.com/office/drawing/2014/main" id="{49591DF1-B694-4346-B807-09CC23178709}"/>
+                <a16:creationId xmlns:a16="http://schemas.microsoft.com/office/drawing/2014/main" id="{810D4A4B-CCFD-4C64-BB8B-C60A8321891B}"/>
               </a:ext>
             </a:extLst>
           </p:cNvPr>
@@ -3843,7 +3843,7 @@
           <p:cNvPr id="4" name="">
             <a:extLst xmlns:a="http://schemas.openxmlformats.org/drawingml/2006/main">
               <a:ext uri="{FF2B5EF4-FFF2-40B4-BE49-F238E27FC236}">
-                <a16:creationId xmlns:a16="http://schemas.microsoft.com/office/drawing/2014/main" id="{AD374FD4-E64A-4093-ACE2-8945167D52C8}"/>
+                <a16:creationId xmlns:a16="http://schemas.microsoft.com/office/drawing/2014/main" id="{D14C0112-8841-427F-A3C7-FB05D147C281}"/>
               </a:ext>
             </a:extLst>
           </p:cNvPr>
@@ -3905,7 +3905,7 @@
           <p:cNvPr id="5" name="">
             <a:extLst xmlns:a="http://schemas.openxmlformats.org/drawingml/2006/main">
               <a:ext uri="{FF2B5EF4-FFF2-40B4-BE49-F238E27FC236}">
-                <a16:creationId xmlns:a16="http://schemas.microsoft.com/office/drawing/2014/main" id="{B948E112-BEAC-4038-A4EB-926FF945AE7F}"/>
+                <a16:creationId xmlns:a16="http://schemas.microsoft.com/office/drawing/2014/main" id="{1DF81A97-881F-43EC-B0CB-7A18B1DFBE1B}"/>
               </a:ext>
             </a:extLst>
           </p:cNvPr>
@@ -3936,7 +3936,7 @@
           <p:cNvPr id="6" name="">
             <a:extLst xmlns:a="http://schemas.openxmlformats.org/drawingml/2006/main">
               <a:ext uri="{FF2B5EF4-FFF2-40B4-BE49-F238E27FC236}">
-                <a16:creationId xmlns:a16="http://schemas.microsoft.com/office/drawing/2014/main" id="{E9D57F18-E38B-467E-A1AF-066E8503EE00}"/>
+                <a16:creationId xmlns:a16="http://schemas.microsoft.com/office/drawing/2014/main" id="{BF4BBEA3-1C9D-4448-ABF8-1CE6CF9674DA}"/>
               </a:ext>
             </a:extLst>
           </p:cNvPr>
@@ -3998,7 +3998,7 @@
           <p:cNvPr id="7" name="">
             <a:extLst xmlns:a="http://schemas.openxmlformats.org/drawingml/2006/main">
               <a:ext uri="{FF2B5EF4-FFF2-40B4-BE49-F238E27FC236}">
-                <a16:creationId xmlns:a16="http://schemas.microsoft.com/office/drawing/2014/main" id="{0FD1C311-698E-4C8D-89BC-F9609ED43A42}"/>
+                <a16:creationId xmlns:a16="http://schemas.microsoft.com/office/drawing/2014/main" id="{A74450B1-5B2B-4622-B23F-DFD81BE24BED}"/>
               </a:ext>
             </a:extLst>
           </p:cNvPr>
@@ -4031,7 +4031,7 @@
           <p:cNvPr id="8" name="">
             <a:extLst xmlns:a="http://schemas.openxmlformats.org/drawingml/2006/main">
               <a:ext uri="{FF2B5EF4-FFF2-40B4-BE49-F238E27FC236}">
-                <a16:creationId xmlns:a16="http://schemas.microsoft.com/office/drawing/2014/main" id="{3A013F00-1BD9-446A-92E3-810F6B159EEE}"/>
+                <a16:creationId xmlns:a16="http://schemas.microsoft.com/office/drawing/2014/main" id="{7187547A-AA68-43CD-A249-1DFFCAD87EBE}"/>
               </a:ext>
             </a:extLst>
           </p:cNvPr>
@@ -4066,7 +4066,7 @@
           <p:cNvPr id="9" name="">
             <a:extLst xmlns:a="http://schemas.openxmlformats.org/drawingml/2006/main">
               <a:ext uri="{FF2B5EF4-FFF2-40B4-BE49-F238E27FC236}">
-                <a16:creationId xmlns:a16="http://schemas.microsoft.com/office/drawing/2014/main" id="{368DCE6E-6517-43AB-BA71-E513DD970DB4}"/>
+                <a16:creationId xmlns:a16="http://schemas.microsoft.com/office/drawing/2014/main" id="{FB6A70B6-7ECD-45FA-87EC-BE8DD68232F7}"/>
               </a:ext>
             </a:extLst>
           </p:cNvPr>
@@ -4097,7 +4097,7 @@
           <p:cNvPr id="10" name="">
             <a:extLst xmlns:a="http://schemas.openxmlformats.org/drawingml/2006/main">
               <a:ext uri="{FF2B5EF4-FFF2-40B4-BE49-F238E27FC236}">
-                <a16:creationId xmlns:a16="http://schemas.microsoft.com/office/drawing/2014/main" id="{A477638A-91AD-4DB2-B2A1-B7276DB08D8F}"/>
+                <a16:creationId xmlns:a16="http://schemas.microsoft.com/office/drawing/2014/main" id="{43AA2FA2-F759-456F-8DF9-7E191B6C5B9D}"/>
               </a:ext>
             </a:extLst>
           </p:cNvPr>
@@ -4159,7 +4159,7 @@
           <p:cNvPr id="11" name="">
             <a:extLst xmlns:a="http://schemas.openxmlformats.org/drawingml/2006/main">
               <a:ext uri="{FF2B5EF4-FFF2-40B4-BE49-F238E27FC236}">
-                <a16:creationId xmlns:a16="http://schemas.microsoft.com/office/drawing/2014/main" id="{51DB7CD0-8EFF-4572-9C77-52A8188FEF61}"/>
+                <a16:creationId xmlns:a16="http://schemas.microsoft.com/office/drawing/2014/main" id="{53C80846-10D6-493E-8489-D0441414F0CE}"/>
               </a:ext>
             </a:extLst>
           </p:cNvPr>
@@ -4302,7 +4302,7 @@
           <p:cNvPr id="12" name="">
             <a:extLst xmlns:a="http://schemas.openxmlformats.org/drawingml/2006/main">
               <a:ext uri="{FF2B5EF4-FFF2-40B4-BE49-F238E27FC236}">
-                <a16:creationId xmlns:a16="http://schemas.microsoft.com/office/drawing/2014/main" id="{9AE95962-2355-418B-942F-E0C9563AF43F}"/>
+                <a16:creationId xmlns:a16="http://schemas.microsoft.com/office/drawing/2014/main" id="{0478D477-8380-4B4E-B7DF-A984EFFE47F0}"/>
               </a:ext>
             </a:extLst>
           </p:cNvPr>
@@ -4364,7 +4364,7 @@
           <p:cNvPr id="13" name="">
             <a:extLst xmlns:a="http://schemas.openxmlformats.org/drawingml/2006/main">
               <a:ext uri="{FF2B5EF4-FFF2-40B4-BE49-F238E27FC236}">
-                <a16:creationId xmlns:a16="http://schemas.microsoft.com/office/drawing/2014/main" id="{A88DAD90-F39F-48EC-AC41-71499915E665}"/>
+                <a16:creationId xmlns:a16="http://schemas.microsoft.com/office/drawing/2014/main" id="{4F6AA243-030B-4506-B440-3FF61EB09E50}"/>
               </a:ext>
             </a:extLst>
           </p:cNvPr>
@@ -4424,7 +4424,7 @@
     </p:spTree>
     <p:extLst>
       <p:ext uri="{BB962C8B-B14F-4D97-AF65-F5344CB8AC3E}">
-        <p14:creationId xmlns:p14="http://schemas.microsoft.com/office/powerpoint/2010/main" val="790550402"/>
+        <p14:creationId xmlns:p14="http://schemas.microsoft.com/office/powerpoint/2010/main" val="42247159"/>
       </p:ext>
     </p:extLst>
   </p:cSld>
@@ -4452,7 +4452,7 @@
           <p:nvPr/>
         </p:nvPicPr>
         <p:blipFill>
-          <a:blip xmlns:r="http://schemas.openxmlformats.org/officeDocument/2006/relationships" xmlns:a="http://schemas.openxmlformats.org/drawingml/2006/main" r:embed="R17fd6ab11313496f"/>
+          <a:blip xmlns:r="http://schemas.openxmlformats.org/officeDocument/2006/relationships" xmlns:a="http://schemas.openxmlformats.org/drawingml/2006/main" r:embed="R80e053018f004299"/>
           <a:srcRect xmlns:a="http://schemas.openxmlformats.org/drawingml/2006/main" l="0" t="0" r="0" b="0"/>
           <a:stretch xmlns:a="http://schemas.openxmlformats.org/drawingml/2006/main">
             <a:fillRect l="0" t="0" r="0" b="0"/>
@@ -4473,7 +4473,7 @@
           <p:cNvPr id="2" name="">
             <a:extLst xmlns:a="http://schemas.openxmlformats.org/drawingml/2006/main">
               <a:ext uri="{FF2B5EF4-FFF2-40B4-BE49-F238E27FC236}">
-                <a16:creationId xmlns:a16="http://schemas.microsoft.com/office/drawing/2014/main" id="{4A3D4E75-C165-402E-ABA8-28B5F9652F48}"/>
+                <a16:creationId xmlns:a16="http://schemas.microsoft.com/office/drawing/2014/main" id="{D4A6DA47-5575-4452-AA38-46B1F31E7F8B}"/>
               </a:ext>
             </a:extLst>
           </p:cNvPr>
@@ -4535,7 +4535,7 @@
           <p:cNvPr id="3" name="">
             <a:extLst xmlns:a="http://schemas.openxmlformats.org/drawingml/2006/main">
               <a:ext uri="{FF2B5EF4-FFF2-40B4-BE49-F238E27FC236}">
-                <a16:creationId xmlns:a16="http://schemas.microsoft.com/office/drawing/2014/main" id="{04DA96C6-D1AB-4913-9A06-204046C9E156}"/>
+                <a16:creationId xmlns:a16="http://schemas.microsoft.com/office/drawing/2014/main" id="{D9B8FAC1-5D51-4DC5-A3F4-7E0C680DBE35}"/>
               </a:ext>
             </a:extLst>
           </p:cNvPr>
@@ -4597,7 +4597,7 @@
           <p:cNvPr id="4" name="">
             <a:extLst xmlns:a="http://schemas.openxmlformats.org/drawingml/2006/main">
               <a:ext uri="{FF2B5EF4-FFF2-40B4-BE49-F238E27FC236}">
-                <a16:creationId xmlns:a16="http://schemas.microsoft.com/office/drawing/2014/main" id="{C44BF384-9236-4BE4-B7D4-814D8D64C46E}"/>
+                <a16:creationId xmlns:a16="http://schemas.microsoft.com/office/drawing/2014/main" id="{45F89638-80C6-44F7-8E93-A6F213BC9A8A}"/>
               </a:ext>
             </a:extLst>
           </p:cNvPr>
@@ -4659,7 +4659,7 @@
           <p:cNvPr id="5" name="">
             <a:extLst xmlns:a="http://schemas.openxmlformats.org/drawingml/2006/main">
               <a:ext uri="{FF2B5EF4-FFF2-40B4-BE49-F238E27FC236}">
-                <a16:creationId xmlns:a16="http://schemas.microsoft.com/office/drawing/2014/main" id="{E9F4B1B9-C2DD-41A4-9D71-AAC9A484C547}"/>
+                <a16:creationId xmlns:a16="http://schemas.microsoft.com/office/drawing/2014/main" id="{99C3364F-3F40-4E8D-97BF-237DB9CEC394}"/>
               </a:ext>
             </a:extLst>
           </p:cNvPr>
@@ -4690,7 +4690,7 @@
           <p:cNvPr id="6" name="">
             <a:extLst xmlns:a="http://schemas.openxmlformats.org/drawingml/2006/main">
               <a:ext uri="{FF2B5EF4-FFF2-40B4-BE49-F238E27FC236}">
-                <a16:creationId xmlns:a16="http://schemas.microsoft.com/office/drawing/2014/main" id="{F004F572-D557-4729-A8AF-9B01F11BC8E9}"/>
+                <a16:creationId xmlns:a16="http://schemas.microsoft.com/office/drawing/2014/main" id="{BA2C40E5-3062-4A2B-A9D6-967BCC9DA819}"/>
               </a:ext>
             </a:extLst>
           </p:cNvPr>
@@ -4752,7 +4752,7 @@
           <p:cNvPr id="7" name="">
             <a:extLst xmlns:a="http://schemas.openxmlformats.org/drawingml/2006/main">
               <a:ext uri="{FF2B5EF4-FFF2-40B4-BE49-F238E27FC236}">
-                <a16:creationId xmlns:a16="http://schemas.microsoft.com/office/drawing/2014/main" id="{E793FD5C-E2A0-4FD4-B23F-F63EFF1E3D93}"/>
+                <a16:creationId xmlns:a16="http://schemas.microsoft.com/office/drawing/2014/main" id="{FFAA8045-49AD-4261-950D-C531D0147214}"/>
               </a:ext>
             </a:extLst>
           </p:cNvPr>
@@ -4785,7 +4785,7 @@
           <p:cNvPr id="8" name="">
             <a:extLst xmlns:a="http://schemas.openxmlformats.org/drawingml/2006/main">
               <a:ext uri="{FF2B5EF4-FFF2-40B4-BE49-F238E27FC236}">
-                <a16:creationId xmlns:a16="http://schemas.microsoft.com/office/drawing/2014/main" id="{C8CFD52B-C07F-4A72-8DE4-6EFD7A869655}"/>
+                <a16:creationId xmlns:a16="http://schemas.microsoft.com/office/drawing/2014/main" id="{B6A4ABC5-9C32-43BF-A5D3-EAA1367DB404}"/>
               </a:ext>
             </a:extLst>
           </p:cNvPr>
@@ -4820,7 +4820,7 @@
           <p:cNvPr id="9" name="">
             <a:extLst xmlns:a="http://schemas.openxmlformats.org/drawingml/2006/main">
               <a:ext uri="{FF2B5EF4-FFF2-40B4-BE49-F238E27FC236}">
-                <a16:creationId xmlns:a16="http://schemas.microsoft.com/office/drawing/2014/main" id="{CC8E6743-9C0F-420C-82C4-939712CC2686}"/>
+                <a16:creationId xmlns:a16="http://schemas.microsoft.com/office/drawing/2014/main" id="{50250EEB-5EBE-4656-887B-B163F50B716C}"/>
               </a:ext>
             </a:extLst>
           </p:cNvPr>
@@ -4851,7 +4851,7 @@
           <p:cNvPr id="10" name="">
             <a:extLst xmlns:a="http://schemas.openxmlformats.org/drawingml/2006/main">
               <a:ext uri="{FF2B5EF4-FFF2-40B4-BE49-F238E27FC236}">
-                <a16:creationId xmlns:a16="http://schemas.microsoft.com/office/drawing/2014/main" id="{B78558F3-763D-4918-81B4-96FBF5DDAB55}"/>
+                <a16:creationId xmlns:a16="http://schemas.microsoft.com/office/drawing/2014/main" id="{B88254A5-E203-4894-93E3-FDA2542A9776}"/>
               </a:ext>
             </a:extLst>
           </p:cNvPr>
@@ -4913,7 +4913,7 @@
           <p:cNvPr id="11" name="">
             <a:extLst xmlns:a="http://schemas.openxmlformats.org/drawingml/2006/main">
               <a:ext uri="{FF2B5EF4-FFF2-40B4-BE49-F238E27FC236}">
-                <a16:creationId xmlns:a16="http://schemas.microsoft.com/office/drawing/2014/main" id="{AED1C032-523E-4419-B9FF-07786BE91E7B}"/>
+                <a16:creationId xmlns:a16="http://schemas.microsoft.com/office/drawing/2014/main" id="{50AE8DCC-EC40-4C14-A573-03389B2FAA66}"/>
               </a:ext>
             </a:extLst>
           </p:cNvPr>
@@ -4975,7 +4975,7 @@
           <p:cNvPr id="12" name="">
             <a:extLst xmlns:a="http://schemas.openxmlformats.org/drawingml/2006/main">
               <a:ext uri="{FF2B5EF4-FFF2-40B4-BE49-F238E27FC236}">
-                <a16:creationId xmlns:a16="http://schemas.microsoft.com/office/drawing/2014/main" id="{0B111529-C9FE-49E5-9AAD-49044F2C7647}"/>
+                <a16:creationId xmlns:a16="http://schemas.microsoft.com/office/drawing/2014/main" id="{E20E920C-80F6-4F1B-8944-A6DE331C055B}"/>
               </a:ext>
             </a:extLst>
           </p:cNvPr>
@@ -5008,7 +5008,7 @@
           <p:cNvPr id="13" name="">
             <a:extLst xmlns:a="http://schemas.openxmlformats.org/drawingml/2006/main">
               <a:ext uri="{FF2B5EF4-FFF2-40B4-BE49-F238E27FC236}">
-                <a16:creationId xmlns:a16="http://schemas.microsoft.com/office/drawing/2014/main" id="{1B03FD60-2739-44D7-95DE-74FA79EC08FF}"/>
+                <a16:creationId xmlns:a16="http://schemas.microsoft.com/office/drawing/2014/main" id="{8760E99E-8176-4517-BC9A-E8CA26C0730F}"/>
               </a:ext>
             </a:extLst>
           </p:cNvPr>
@@ -5043,7 +5043,7 @@
           <p:cNvPr id="14" name="">
             <a:extLst xmlns:a="http://schemas.openxmlformats.org/drawingml/2006/main">
               <a:ext uri="{FF2B5EF4-FFF2-40B4-BE49-F238E27FC236}">
-                <a16:creationId xmlns:a16="http://schemas.microsoft.com/office/drawing/2014/main" id="{38E3C2EC-300F-45C3-BF2D-F64D0ED9AF4B}"/>
+                <a16:creationId xmlns:a16="http://schemas.microsoft.com/office/drawing/2014/main" id="{B1C10403-1AFB-4C92-BE33-F8AA912E24B6}"/>
               </a:ext>
             </a:extLst>
           </p:cNvPr>
@@ -5074,7 +5074,7 @@
           <p:cNvPr id="15" name="">
             <a:extLst xmlns:a="http://schemas.openxmlformats.org/drawingml/2006/main">
               <a:ext uri="{FF2B5EF4-FFF2-40B4-BE49-F238E27FC236}">
-                <a16:creationId xmlns:a16="http://schemas.microsoft.com/office/drawing/2014/main" id="{F9222618-BABB-4C2B-AA33-89AEB13F8626}"/>
+                <a16:creationId xmlns:a16="http://schemas.microsoft.com/office/drawing/2014/main" id="{1DC4576F-118C-4139-849C-A5E5B9867962}"/>
               </a:ext>
             </a:extLst>
           </p:cNvPr>
@@ -5136,7 +5136,7 @@
           <p:cNvPr id="16" name="">
             <a:extLst xmlns:a="http://schemas.openxmlformats.org/drawingml/2006/main">
               <a:ext uri="{FF2B5EF4-FFF2-40B4-BE49-F238E27FC236}">
-                <a16:creationId xmlns:a16="http://schemas.microsoft.com/office/drawing/2014/main" id="{4976522B-2172-4E12-B7A6-8DCC8E6F7710}"/>
+                <a16:creationId xmlns:a16="http://schemas.microsoft.com/office/drawing/2014/main" id="{6F8588D8-05E1-48A7-AD10-601BDFAA2A0B}"/>
               </a:ext>
             </a:extLst>
           </p:cNvPr>
@@ -5198,7 +5198,7 @@
           <p:cNvPr id="17" name="">
             <a:extLst xmlns:a="http://schemas.openxmlformats.org/drawingml/2006/main">
               <a:ext uri="{FF2B5EF4-FFF2-40B4-BE49-F238E27FC236}">
-                <a16:creationId xmlns:a16="http://schemas.microsoft.com/office/drawing/2014/main" id="{521851E3-4691-492E-9FC5-A11D9ABBF55B}"/>
+                <a16:creationId xmlns:a16="http://schemas.microsoft.com/office/drawing/2014/main" id="{C693540A-7E89-41BF-8A11-3F8FDA705146}"/>
               </a:ext>
             </a:extLst>
           </p:cNvPr>
@@ -5231,7 +5231,7 @@
           <p:cNvPr id="18" name="">
             <a:extLst xmlns:a="http://schemas.openxmlformats.org/drawingml/2006/main">
               <a:ext uri="{FF2B5EF4-FFF2-40B4-BE49-F238E27FC236}">
-                <a16:creationId xmlns:a16="http://schemas.microsoft.com/office/drawing/2014/main" id="{D0B017E5-910F-45A4-B5A5-8BC78D084F8D}"/>
+                <a16:creationId xmlns:a16="http://schemas.microsoft.com/office/drawing/2014/main" id="{5B4075AF-E3BC-48C3-AB11-EAD0430F29A2}"/>
               </a:ext>
             </a:extLst>
           </p:cNvPr>
@@ -5266,7 +5266,7 @@
           <p:cNvPr id="19" name="">
             <a:extLst xmlns:a="http://schemas.openxmlformats.org/drawingml/2006/main">
               <a:ext uri="{FF2B5EF4-FFF2-40B4-BE49-F238E27FC236}">
-                <a16:creationId xmlns:a16="http://schemas.microsoft.com/office/drawing/2014/main" id="{7DDD1F41-A347-4745-98D1-22AC9040F07B}"/>
+                <a16:creationId xmlns:a16="http://schemas.microsoft.com/office/drawing/2014/main" id="{AFBD74A0-1CCD-4802-B3FD-9F3D2A34A988}"/>
               </a:ext>
             </a:extLst>
           </p:cNvPr>
@@ -5297,7 +5297,7 @@
           <p:cNvPr id="20" name="">
             <a:extLst xmlns:a="http://schemas.openxmlformats.org/drawingml/2006/main">
               <a:ext uri="{FF2B5EF4-FFF2-40B4-BE49-F238E27FC236}">
-                <a16:creationId xmlns:a16="http://schemas.microsoft.com/office/drawing/2014/main" id="{EFFB30B6-2FBA-4CAB-9C04-25C22F9532D6}"/>
+                <a16:creationId xmlns:a16="http://schemas.microsoft.com/office/drawing/2014/main" id="{475ADAB1-CE55-4D98-AA94-9B8F14EC972A}"/>
               </a:ext>
             </a:extLst>
           </p:cNvPr>
@@ -5359,7 +5359,7 @@
           <p:cNvPr id="21" name="">
             <a:extLst xmlns:a="http://schemas.openxmlformats.org/drawingml/2006/main">
               <a:ext uri="{FF2B5EF4-FFF2-40B4-BE49-F238E27FC236}">
-                <a16:creationId xmlns:a16="http://schemas.microsoft.com/office/drawing/2014/main" id="{159BF93D-1F71-4CC7-86AB-88B2656E6857}"/>
+                <a16:creationId xmlns:a16="http://schemas.microsoft.com/office/drawing/2014/main" id="{77B2C617-1807-4623-8485-7D110312AC0D}"/>
               </a:ext>
             </a:extLst>
           </p:cNvPr>
@@ -5421,7 +5421,7 @@
           <p:cNvPr id="22" name="">
             <a:extLst xmlns:a="http://schemas.openxmlformats.org/drawingml/2006/main">
               <a:ext uri="{FF2B5EF4-FFF2-40B4-BE49-F238E27FC236}">
-                <a16:creationId xmlns:a16="http://schemas.microsoft.com/office/drawing/2014/main" id="{D64DA342-C77E-4396-A9A9-382936DE9875}"/>
+                <a16:creationId xmlns:a16="http://schemas.microsoft.com/office/drawing/2014/main" id="{3AA586DB-F310-469D-995E-E4ACB48BF90B}"/>
               </a:ext>
             </a:extLst>
           </p:cNvPr>
@@ -5483,7 +5483,7 @@
           <p:cNvPr id="23" name="">
             <a:extLst xmlns:a="http://schemas.openxmlformats.org/drawingml/2006/main">
               <a:ext uri="{FF2B5EF4-FFF2-40B4-BE49-F238E27FC236}">
-                <a16:creationId xmlns:a16="http://schemas.microsoft.com/office/drawing/2014/main" id="{7A49CBEB-0B9A-4412-82FC-22B37AD656C3}"/>
+                <a16:creationId xmlns:a16="http://schemas.microsoft.com/office/drawing/2014/main" id="{70FA7AB4-9F7B-4887-AF11-508ECA609B04}"/>
               </a:ext>
             </a:extLst>
           </p:cNvPr>
@@ -5543,7 +5543,7 @@
     </p:spTree>
     <p:extLst>
       <p:ext uri="{BB962C8B-B14F-4D97-AF65-F5344CB8AC3E}">
-        <p14:creationId xmlns:p14="http://schemas.microsoft.com/office/powerpoint/2010/main" val="1806842113"/>
+        <p14:creationId xmlns:p14="http://schemas.microsoft.com/office/powerpoint/2010/main" val="1895955803"/>
       </p:ext>
     </p:extLst>
   </p:cSld>
@@ -5571,7 +5571,7 @@
           <p:nvPr/>
         </p:nvPicPr>
         <p:blipFill>
-          <a:blip xmlns:r="http://schemas.openxmlformats.org/officeDocument/2006/relationships" xmlns:a="http://schemas.openxmlformats.org/drawingml/2006/main" r:embed="Ree3a48f1c20f4cf2"/>
+          <a:blip xmlns:r="http://schemas.openxmlformats.org/officeDocument/2006/relationships" xmlns:a="http://schemas.openxmlformats.org/drawingml/2006/main" r:embed="Rbc94965130114b93"/>
           <a:srcRect xmlns:a="http://schemas.openxmlformats.org/drawingml/2006/main" l="0" t="0" r="0" b="0"/>
           <a:stretch xmlns:a="http://schemas.openxmlformats.org/drawingml/2006/main">
             <a:fillRect l="0" t="0" r="0" b="0"/>
@@ -5592,7 +5592,7 @@
           <p:cNvPr id="2" name="">
             <a:extLst xmlns:a="http://schemas.openxmlformats.org/drawingml/2006/main">
               <a:ext uri="{FF2B5EF4-FFF2-40B4-BE49-F238E27FC236}">
-                <a16:creationId xmlns:a16="http://schemas.microsoft.com/office/drawing/2014/main" id="{2032F90D-B983-4C92-B4B6-811F195B3E7F}"/>
+                <a16:creationId xmlns:a16="http://schemas.microsoft.com/office/drawing/2014/main" id="{A31FEE68-ED4E-48C7-B741-829E662459C8}"/>
               </a:ext>
             </a:extLst>
           </p:cNvPr>
@@ -5654,7 +5654,7 @@
           <p:cNvPr id="3" name="">
             <a:extLst xmlns:a="http://schemas.openxmlformats.org/drawingml/2006/main">
               <a:ext uri="{FF2B5EF4-FFF2-40B4-BE49-F238E27FC236}">
-                <a16:creationId xmlns:a16="http://schemas.microsoft.com/office/drawing/2014/main" id="{A43B6094-F0D4-48C0-ADF0-C12A5C443EEC}"/>
+                <a16:creationId xmlns:a16="http://schemas.microsoft.com/office/drawing/2014/main" id="{7F68F266-E3EA-47B4-B2FD-9DF2C3270A33}"/>
               </a:ext>
             </a:extLst>
           </p:cNvPr>
@@ -5716,7 +5716,7 @@
           <p:cNvPr id="4" name="">
             <a:extLst xmlns:a="http://schemas.openxmlformats.org/drawingml/2006/main">
               <a:ext uri="{FF2B5EF4-FFF2-40B4-BE49-F238E27FC236}">
-                <a16:creationId xmlns:a16="http://schemas.microsoft.com/office/drawing/2014/main" id="{FC402A82-EFEC-46D9-B309-F47DFC8D6430}"/>
+                <a16:creationId xmlns:a16="http://schemas.microsoft.com/office/drawing/2014/main" id="{AE3F3815-F704-4DA1-9C12-6D38D4AC27BC}"/>
               </a:ext>
             </a:extLst>
           </p:cNvPr>
@@ -5778,7 +5778,7 @@
           <p:cNvPr id="5" name="">
             <a:extLst xmlns:a="http://schemas.openxmlformats.org/drawingml/2006/main">
               <a:ext uri="{FF2B5EF4-FFF2-40B4-BE49-F238E27FC236}">
-                <a16:creationId xmlns:a16="http://schemas.microsoft.com/office/drawing/2014/main" id="{41FDACFD-06F3-4457-A6C8-6CCE5D79E3ED}"/>
+                <a16:creationId xmlns:a16="http://schemas.microsoft.com/office/drawing/2014/main" id="{468A904F-9C86-40C4-9B88-7BAE46743F3B}"/>
               </a:ext>
             </a:extLst>
           </p:cNvPr>
@@ -5809,7 +5809,7 @@
           <p:cNvPr id="6" name="">
             <a:extLst xmlns:a="http://schemas.openxmlformats.org/drawingml/2006/main">
               <a:ext uri="{FF2B5EF4-FFF2-40B4-BE49-F238E27FC236}">
-                <a16:creationId xmlns:a16="http://schemas.microsoft.com/office/drawing/2014/main" id="{2F36454D-6C68-403D-84AC-FA2CDACA30E7}"/>
+                <a16:creationId xmlns:a16="http://schemas.microsoft.com/office/drawing/2014/main" id="{A1A82578-F84C-4E50-AFCD-F6C3E2A9EBDE}"/>
               </a:ext>
             </a:extLst>
           </p:cNvPr>
@@ -5871,7 +5871,7 @@
           <p:cNvPr id="7" name="">
             <a:extLst xmlns:a="http://schemas.openxmlformats.org/drawingml/2006/main">
               <a:ext uri="{FF2B5EF4-FFF2-40B4-BE49-F238E27FC236}">
-                <a16:creationId xmlns:a16="http://schemas.microsoft.com/office/drawing/2014/main" id="{445183AD-310B-4BF6-9DD3-BDE675D77F14}"/>
+                <a16:creationId xmlns:a16="http://schemas.microsoft.com/office/drawing/2014/main" id="{4233215D-C429-4584-BB13-54A097F4F0A1}"/>
               </a:ext>
             </a:extLst>
           </p:cNvPr>
@@ -5904,7 +5904,7 @@
           <p:cNvPr id="8" name="">
             <a:extLst xmlns:a="http://schemas.openxmlformats.org/drawingml/2006/main">
               <a:ext uri="{FF2B5EF4-FFF2-40B4-BE49-F238E27FC236}">
-                <a16:creationId xmlns:a16="http://schemas.microsoft.com/office/drawing/2014/main" id="{73CE7AB6-7995-4BE6-AB9B-A7052DCDAEE1}"/>
+                <a16:creationId xmlns:a16="http://schemas.microsoft.com/office/drawing/2014/main" id="{0FA2D428-7C96-46F1-AF6E-A9E65FC42EAE}"/>
               </a:ext>
             </a:extLst>
           </p:cNvPr>
@@ -5939,7 +5939,7 @@
           <p:cNvPr id="9" name="">
             <a:extLst xmlns:a="http://schemas.openxmlformats.org/drawingml/2006/main">
               <a:ext uri="{FF2B5EF4-FFF2-40B4-BE49-F238E27FC236}">
-                <a16:creationId xmlns:a16="http://schemas.microsoft.com/office/drawing/2014/main" id="{0F6509EB-4B1B-45EB-B20C-111CC3A0E9AA}"/>
+                <a16:creationId xmlns:a16="http://schemas.microsoft.com/office/drawing/2014/main" id="{102408BA-F051-4131-B80E-F892BD6BCBC9}"/>
               </a:ext>
             </a:extLst>
           </p:cNvPr>
@@ -5970,7 +5970,7 @@
           <p:cNvPr id="10" name="">
             <a:extLst xmlns:a="http://schemas.openxmlformats.org/drawingml/2006/main">
               <a:ext uri="{FF2B5EF4-FFF2-40B4-BE49-F238E27FC236}">
-                <a16:creationId xmlns:a16="http://schemas.microsoft.com/office/drawing/2014/main" id="{B6EB1653-339F-42E1-A9B9-9024EDA82258}"/>
+                <a16:creationId xmlns:a16="http://schemas.microsoft.com/office/drawing/2014/main" id="{57FC353E-25A6-4F96-AC37-1C8D99C835B0}"/>
               </a:ext>
             </a:extLst>
           </p:cNvPr>
@@ -6032,7 +6032,7 @@
           <p:cNvPr id="11" name="">
             <a:extLst xmlns:a="http://schemas.openxmlformats.org/drawingml/2006/main">
               <a:ext uri="{FF2B5EF4-FFF2-40B4-BE49-F238E27FC236}">
-                <a16:creationId xmlns:a16="http://schemas.microsoft.com/office/drawing/2014/main" id="{CD4FDBBC-85A0-4635-AB1B-744E40AB4086}"/>
+                <a16:creationId xmlns:a16="http://schemas.microsoft.com/office/drawing/2014/main" id="{C0CA5462-EF68-4B43-9431-91048E44635E}"/>
               </a:ext>
             </a:extLst>
           </p:cNvPr>
@@ -6094,7 +6094,7 @@
           <p:cNvPr id="12" name="">
             <a:extLst xmlns:a="http://schemas.openxmlformats.org/drawingml/2006/main">
               <a:ext uri="{FF2B5EF4-FFF2-40B4-BE49-F238E27FC236}">
-                <a16:creationId xmlns:a16="http://schemas.microsoft.com/office/drawing/2014/main" id="{BB5E4517-C49C-4EE4-89D8-30A07EEC92F2}"/>
+                <a16:creationId xmlns:a16="http://schemas.microsoft.com/office/drawing/2014/main" id="{928B53D2-AD9E-4C74-8DA1-78C2E336DB46}"/>
               </a:ext>
             </a:extLst>
           </p:cNvPr>
@@ -6156,7 +6156,7 @@
           <p:cNvPr id="13" name="">
             <a:extLst xmlns:a="http://schemas.openxmlformats.org/drawingml/2006/main">
               <a:ext uri="{FF2B5EF4-FFF2-40B4-BE49-F238E27FC236}">
-                <a16:creationId xmlns:a16="http://schemas.microsoft.com/office/drawing/2014/main" id="{95B62814-F5AE-4D07-A618-B368B10E633D}"/>
+                <a16:creationId xmlns:a16="http://schemas.microsoft.com/office/drawing/2014/main" id="{90EC2DAA-50AA-42A4-95E1-7DA5F75A9484}"/>
               </a:ext>
             </a:extLst>
           </p:cNvPr>
@@ -6216,7 +6216,7 @@
     </p:spTree>
     <p:extLst>
       <p:ext uri="{BB962C8B-B14F-4D97-AF65-F5344CB8AC3E}">
-        <p14:creationId xmlns:p14="http://schemas.microsoft.com/office/powerpoint/2010/main" val="1813462608"/>
+        <p14:creationId xmlns:p14="http://schemas.microsoft.com/office/powerpoint/2010/main" val="2046644243"/>
       </p:ext>
     </p:extLst>
   </p:cSld>
@@ -6244,7 +6244,7 @@
           <p:nvPr/>
         </p:nvPicPr>
         <p:blipFill>
-          <a:blip xmlns:r="http://schemas.openxmlformats.org/officeDocument/2006/relationships" xmlns:a="http://schemas.openxmlformats.org/drawingml/2006/main" r:embed="Rebaf8a3dce224058"/>
+          <a:blip xmlns:r="http://schemas.openxmlformats.org/officeDocument/2006/relationships" xmlns:a="http://schemas.openxmlformats.org/drawingml/2006/main" r:embed="R1cbc85d651594619"/>
           <a:srcRect xmlns:a="http://schemas.openxmlformats.org/drawingml/2006/main" l="0" t="0" r="0" b="0"/>
           <a:stretch xmlns:a="http://schemas.openxmlformats.org/drawingml/2006/main">
             <a:fillRect l="0" t="0" r="0" b="0"/>
@@ -6265,7 +6265,7 @@
           <p:cNvPr id="2" name="">
             <a:extLst xmlns:a="http://schemas.openxmlformats.org/drawingml/2006/main">
               <a:ext uri="{FF2B5EF4-FFF2-40B4-BE49-F238E27FC236}">
-                <a16:creationId xmlns:a16="http://schemas.microsoft.com/office/drawing/2014/main" id="{A0BEB98A-B87A-4AEE-B87B-929BF12B2FD9}"/>
+                <a16:creationId xmlns:a16="http://schemas.microsoft.com/office/drawing/2014/main" id="{BA87B9F0-A597-4764-88AC-68A6C4E68FB1}"/>
               </a:ext>
             </a:extLst>
           </p:cNvPr>
@@ -6327,7 +6327,7 @@
           <p:cNvPr id="3" name="">
             <a:extLst xmlns:a="http://schemas.openxmlformats.org/drawingml/2006/main">
               <a:ext uri="{FF2B5EF4-FFF2-40B4-BE49-F238E27FC236}">
-                <a16:creationId xmlns:a16="http://schemas.microsoft.com/office/drawing/2014/main" id="{BBD7F1DB-168A-407A-92EC-84E5A46EA1C6}"/>
+                <a16:creationId xmlns:a16="http://schemas.microsoft.com/office/drawing/2014/main" id="{DAA2DD6D-86ED-4026-B7AA-AC8923CE9705}"/>
               </a:ext>
             </a:extLst>
           </p:cNvPr>
@@ -6389,7 +6389,7 @@
           <p:cNvPr id="4" name="">
             <a:extLst xmlns:a="http://schemas.openxmlformats.org/drawingml/2006/main">
               <a:ext uri="{FF2B5EF4-FFF2-40B4-BE49-F238E27FC236}">
-                <a16:creationId xmlns:a16="http://schemas.microsoft.com/office/drawing/2014/main" id="{EB766277-B683-4D5E-9144-8E5D1D1E87D9}"/>
+                <a16:creationId xmlns:a16="http://schemas.microsoft.com/office/drawing/2014/main" id="{334CFDC9-C67E-4DEA-84C7-F0A928F955D5}"/>
               </a:ext>
             </a:extLst>
           </p:cNvPr>
@@ -6451,7 +6451,7 @@
           <p:cNvPr id="5" name="">
             <a:extLst xmlns:a="http://schemas.openxmlformats.org/drawingml/2006/main">
               <a:ext uri="{FF2B5EF4-FFF2-40B4-BE49-F238E27FC236}">
-                <a16:creationId xmlns:a16="http://schemas.microsoft.com/office/drawing/2014/main" id="{0C59EDC0-5BA4-4510-AAB8-FAA3E1E433C9}"/>
+                <a16:creationId xmlns:a16="http://schemas.microsoft.com/office/drawing/2014/main" id="{DF7A7CC6-9148-408D-A732-00B107C2EB99}"/>
               </a:ext>
             </a:extLst>
           </p:cNvPr>
@@ -6482,7 +6482,7 @@
           <p:cNvPr id="6" name="">
             <a:extLst xmlns:a="http://schemas.openxmlformats.org/drawingml/2006/main">
               <a:ext uri="{FF2B5EF4-FFF2-40B4-BE49-F238E27FC236}">
-                <a16:creationId xmlns:a16="http://schemas.microsoft.com/office/drawing/2014/main" id="{EF70C2A9-D139-42FD-B1CE-FF7AA0A6A397}"/>
+                <a16:creationId xmlns:a16="http://schemas.microsoft.com/office/drawing/2014/main" id="{027E4BF9-79C3-406B-A732-4CBFDB897709}"/>
               </a:ext>
             </a:extLst>
           </p:cNvPr>
@@ -6544,7 +6544,7 @@
           <p:cNvPr id="7" name="">
             <a:extLst xmlns:a="http://schemas.openxmlformats.org/drawingml/2006/main">
               <a:ext uri="{FF2B5EF4-FFF2-40B4-BE49-F238E27FC236}">
-                <a16:creationId xmlns:a16="http://schemas.microsoft.com/office/drawing/2014/main" id="{90CB6DA6-DF7D-4A5C-B12F-21083D50AC1E}"/>
+                <a16:creationId xmlns:a16="http://schemas.microsoft.com/office/drawing/2014/main" id="{D4907F1E-305E-415B-A4F6-A7A2C198C19E}"/>
               </a:ext>
             </a:extLst>
           </p:cNvPr>
@@ -6577,7 +6577,7 @@
           <p:cNvPr id="8" name="">
             <a:extLst xmlns:a="http://schemas.openxmlformats.org/drawingml/2006/main">
               <a:ext uri="{FF2B5EF4-FFF2-40B4-BE49-F238E27FC236}">
-                <a16:creationId xmlns:a16="http://schemas.microsoft.com/office/drawing/2014/main" id="{30254DAC-9BD1-4DFF-BD40-6C70D5C0C1E2}"/>
+                <a16:creationId xmlns:a16="http://schemas.microsoft.com/office/drawing/2014/main" id="{BC709518-A87B-48CE-8072-393433D5D60B}"/>
               </a:ext>
             </a:extLst>
           </p:cNvPr>
@@ -6612,7 +6612,7 @@
           <p:cNvPr id="9" name="">
             <a:extLst xmlns:a="http://schemas.openxmlformats.org/drawingml/2006/main">
               <a:ext uri="{FF2B5EF4-FFF2-40B4-BE49-F238E27FC236}">
-                <a16:creationId xmlns:a16="http://schemas.microsoft.com/office/drawing/2014/main" id="{6C4B394D-FC86-4D91-8A8B-6F9EF6DAABE7}"/>
+                <a16:creationId xmlns:a16="http://schemas.microsoft.com/office/drawing/2014/main" id="{8D2A2F7D-8125-4066-8C92-B17946F64BF7}"/>
               </a:ext>
             </a:extLst>
           </p:cNvPr>
@@ -6643,7 +6643,7 @@
           <p:cNvPr id="10" name="">
             <a:extLst xmlns:a="http://schemas.openxmlformats.org/drawingml/2006/main">
               <a:ext uri="{FF2B5EF4-FFF2-40B4-BE49-F238E27FC236}">
-                <a16:creationId xmlns:a16="http://schemas.microsoft.com/office/drawing/2014/main" id="{1EB2CD6E-849B-4D5E-9808-F13048D58B7F}"/>
+                <a16:creationId xmlns:a16="http://schemas.microsoft.com/office/drawing/2014/main" id="{CF667F69-CAE9-4DCF-A027-EC470ED980BC}"/>
               </a:ext>
             </a:extLst>
           </p:cNvPr>
@@ -6705,7 +6705,7 @@
           <p:cNvPr id="11" name="">
             <a:extLst xmlns:a="http://schemas.openxmlformats.org/drawingml/2006/main">
               <a:ext uri="{FF2B5EF4-FFF2-40B4-BE49-F238E27FC236}">
-                <a16:creationId xmlns:a16="http://schemas.microsoft.com/office/drawing/2014/main" id="{EA6065CB-7BA4-4EB0-B50E-FFA5584A157B}"/>
+                <a16:creationId xmlns:a16="http://schemas.microsoft.com/office/drawing/2014/main" id="{C8656534-EA9F-451E-B1A6-3F3C1AD7169F}"/>
               </a:ext>
             </a:extLst>
           </p:cNvPr>
@@ -6767,7 +6767,7 @@
           <p:cNvPr id="12" name="">
             <a:extLst xmlns:a="http://schemas.openxmlformats.org/drawingml/2006/main">
               <a:ext uri="{FF2B5EF4-FFF2-40B4-BE49-F238E27FC236}">
-                <a16:creationId xmlns:a16="http://schemas.microsoft.com/office/drawing/2014/main" id="{E3F9C67F-0659-41B5-A4BF-576F0BEC4206}"/>
+                <a16:creationId xmlns:a16="http://schemas.microsoft.com/office/drawing/2014/main" id="{82308C6C-E4B2-4595-8972-4C8335FF2DDA}"/>
               </a:ext>
             </a:extLst>
           </p:cNvPr>
@@ -6800,7 +6800,7 @@
           <p:cNvPr id="13" name="">
             <a:extLst xmlns:a="http://schemas.openxmlformats.org/drawingml/2006/main">
               <a:ext uri="{FF2B5EF4-FFF2-40B4-BE49-F238E27FC236}">
-                <a16:creationId xmlns:a16="http://schemas.microsoft.com/office/drawing/2014/main" id="{57AC49D0-37CA-41EF-9811-3B0D91374675}"/>
+                <a16:creationId xmlns:a16="http://schemas.microsoft.com/office/drawing/2014/main" id="{43FFCC5C-A9CF-47AC-A46C-C1DBFCCB7FD1}"/>
               </a:ext>
             </a:extLst>
           </p:cNvPr>
@@ -6835,7 +6835,7 @@
           <p:cNvPr id="14" name="">
             <a:extLst xmlns:a="http://schemas.openxmlformats.org/drawingml/2006/main">
               <a:ext uri="{FF2B5EF4-FFF2-40B4-BE49-F238E27FC236}">
-                <a16:creationId xmlns:a16="http://schemas.microsoft.com/office/drawing/2014/main" id="{A6420933-CBDA-4ADE-B3A2-262C460A7610}"/>
+                <a16:creationId xmlns:a16="http://schemas.microsoft.com/office/drawing/2014/main" id="{F5820952-F70D-464E-B0B5-A4BDC763621F}"/>
               </a:ext>
             </a:extLst>
           </p:cNvPr>
@@ -6866,7 +6866,7 @@
           <p:cNvPr id="15" name="">
             <a:extLst xmlns:a="http://schemas.openxmlformats.org/drawingml/2006/main">
               <a:ext uri="{FF2B5EF4-FFF2-40B4-BE49-F238E27FC236}">
-                <a16:creationId xmlns:a16="http://schemas.microsoft.com/office/drawing/2014/main" id="{7A6E8A8C-AD56-4272-9542-8CD57DBA8502}"/>
+                <a16:creationId xmlns:a16="http://schemas.microsoft.com/office/drawing/2014/main" id="{35984526-14CE-42FD-80AF-59C1185575FF}"/>
               </a:ext>
             </a:extLst>
           </p:cNvPr>
@@ -6928,7 +6928,7 @@
           <p:cNvPr id="16" name="">
             <a:extLst xmlns:a="http://schemas.openxmlformats.org/drawingml/2006/main">
               <a:ext uri="{FF2B5EF4-FFF2-40B4-BE49-F238E27FC236}">
-                <a16:creationId xmlns:a16="http://schemas.microsoft.com/office/drawing/2014/main" id="{0C97CE31-A262-4B1E-8AF9-60529A2D70FE}"/>
+                <a16:creationId xmlns:a16="http://schemas.microsoft.com/office/drawing/2014/main" id="{73D0DA4F-7D14-4FA3-A99A-3F70E2B73257}"/>
               </a:ext>
             </a:extLst>
           </p:cNvPr>
@@ -6990,7 +6990,7 @@
           <p:cNvPr id="17" name="">
             <a:extLst xmlns:a="http://schemas.openxmlformats.org/drawingml/2006/main">
               <a:ext uri="{FF2B5EF4-FFF2-40B4-BE49-F238E27FC236}">
-                <a16:creationId xmlns:a16="http://schemas.microsoft.com/office/drawing/2014/main" id="{95C3B7EE-448C-4D24-B43A-EC73753F4CA4}"/>
+                <a16:creationId xmlns:a16="http://schemas.microsoft.com/office/drawing/2014/main" id="{B64D7134-3EA5-430F-9BE6-25D6A308F2CE}"/>
               </a:ext>
             </a:extLst>
           </p:cNvPr>
@@ -7052,7 +7052,7 @@
           <p:cNvPr id="18" name="">
             <a:extLst xmlns:a="http://schemas.openxmlformats.org/drawingml/2006/main">
               <a:ext uri="{FF2B5EF4-FFF2-40B4-BE49-F238E27FC236}">
-                <a16:creationId xmlns:a16="http://schemas.microsoft.com/office/drawing/2014/main" id="{8D5FA77D-32E5-4BE4-B589-B477F3E8F676}"/>
+                <a16:creationId xmlns:a16="http://schemas.microsoft.com/office/drawing/2014/main" id="{FEC161B1-3AB8-4F1B-825C-BEFA4A9CF90E}"/>
               </a:ext>
             </a:extLst>
           </p:cNvPr>
@@ -7112,7 +7112,7 @@
     </p:spTree>
     <p:extLst>
       <p:ext uri="{BB962C8B-B14F-4D97-AF65-F5344CB8AC3E}">
-        <p14:creationId xmlns:p14="http://schemas.microsoft.com/office/powerpoint/2010/main" val="2105798643"/>
+        <p14:creationId xmlns:p14="http://schemas.microsoft.com/office/powerpoint/2010/main" val="1832453322"/>
       </p:ext>
     </p:extLst>
   </p:cSld>
@@ -7140,7 +7140,7 @@
           <p:nvPr/>
         </p:nvPicPr>
         <p:blipFill>
-          <a:blip xmlns:r="http://schemas.openxmlformats.org/officeDocument/2006/relationships" xmlns:a="http://schemas.openxmlformats.org/drawingml/2006/main" r:embed="R968dd479dfe64b5f"/>
+          <a:blip xmlns:r="http://schemas.openxmlformats.org/officeDocument/2006/relationships" xmlns:a="http://schemas.openxmlformats.org/drawingml/2006/main" r:embed="R13eff22c85ac42b4"/>
           <a:srcRect xmlns:a="http://schemas.openxmlformats.org/drawingml/2006/main" l="0" t="0" r="0" b="0"/>
           <a:stretch xmlns:a="http://schemas.openxmlformats.org/drawingml/2006/main">
             <a:fillRect l="0" t="0" r="0" b="0"/>
@@ -7161,7 +7161,7 @@
           <p:cNvPr id="2" name="">
             <a:extLst xmlns:a="http://schemas.openxmlformats.org/drawingml/2006/main">
               <a:ext uri="{FF2B5EF4-FFF2-40B4-BE49-F238E27FC236}">
-                <a16:creationId xmlns:a16="http://schemas.microsoft.com/office/drawing/2014/main" id="{6EDFC89B-A732-46A9-884E-D1C7B864B5EF}"/>
+                <a16:creationId xmlns:a16="http://schemas.microsoft.com/office/drawing/2014/main" id="{B25A23CB-84C7-4F4E-A7CD-7229D7719446}"/>
               </a:ext>
             </a:extLst>
           </p:cNvPr>
@@ -7223,7 +7223,7 @@
           <p:cNvPr id="3" name="">
             <a:extLst xmlns:a="http://schemas.openxmlformats.org/drawingml/2006/main">
               <a:ext uri="{FF2B5EF4-FFF2-40B4-BE49-F238E27FC236}">
-                <a16:creationId xmlns:a16="http://schemas.microsoft.com/office/drawing/2014/main" id="{4443D4DA-4678-4E02-B1E7-7F47E36EAE76}"/>
+                <a16:creationId xmlns:a16="http://schemas.microsoft.com/office/drawing/2014/main" id="{87C0A055-65DB-414F-A7AC-0BC2C5A91FC3}"/>
               </a:ext>
             </a:extLst>
           </p:cNvPr>
@@ -7285,7 +7285,7 @@
           <p:cNvPr id="4" name="">
             <a:extLst xmlns:a="http://schemas.openxmlformats.org/drawingml/2006/main">
               <a:ext uri="{FF2B5EF4-FFF2-40B4-BE49-F238E27FC236}">
-                <a16:creationId xmlns:a16="http://schemas.microsoft.com/office/drawing/2014/main" id="{45E40D10-27ED-46F9-9192-8BE499D1CE85}"/>
+                <a16:creationId xmlns:a16="http://schemas.microsoft.com/office/drawing/2014/main" id="{A5FF98B2-00AA-46BD-B84E-06A8748A29D5}"/>
               </a:ext>
             </a:extLst>
           </p:cNvPr>
@@ -7347,7 +7347,7 @@
           <p:cNvPr id="5" name="">
             <a:extLst xmlns:a="http://schemas.openxmlformats.org/drawingml/2006/main">
               <a:ext uri="{FF2B5EF4-FFF2-40B4-BE49-F238E27FC236}">
-                <a16:creationId xmlns:a16="http://schemas.microsoft.com/office/drawing/2014/main" id="{7535BD3A-AE44-4FF9-8454-CBD9A0E46AF0}"/>
+                <a16:creationId xmlns:a16="http://schemas.microsoft.com/office/drawing/2014/main" id="{046D9298-0DC4-4113-BC7C-D6DAB619CF07}"/>
               </a:ext>
             </a:extLst>
           </p:cNvPr>
@@ -7378,7 +7378,7 @@
           <p:cNvPr id="6" name="">
             <a:extLst xmlns:a="http://schemas.openxmlformats.org/drawingml/2006/main">
               <a:ext uri="{FF2B5EF4-FFF2-40B4-BE49-F238E27FC236}">
-                <a16:creationId xmlns:a16="http://schemas.microsoft.com/office/drawing/2014/main" id="{531DFFA8-0DAE-46A1-B6F3-B5EE77A32346}"/>
+                <a16:creationId xmlns:a16="http://schemas.microsoft.com/office/drawing/2014/main" id="{4322169A-0D77-4CA3-BD40-3877AB2C02E1}"/>
               </a:ext>
             </a:extLst>
           </p:cNvPr>
@@ -7440,7 +7440,7 @@
           <p:cNvPr id="7" name="">
             <a:extLst xmlns:a="http://schemas.openxmlformats.org/drawingml/2006/main">
               <a:ext uri="{FF2B5EF4-FFF2-40B4-BE49-F238E27FC236}">
-                <a16:creationId xmlns:a16="http://schemas.microsoft.com/office/drawing/2014/main" id="{39BD4F99-9171-434E-88FA-15D025D87435}"/>
+                <a16:creationId xmlns:a16="http://schemas.microsoft.com/office/drawing/2014/main" id="{956A8993-2375-4DC3-B7B6-AB5F279DA93A}"/>
               </a:ext>
             </a:extLst>
           </p:cNvPr>
@@ -7473,7 +7473,7 @@
           <p:cNvPr id="8" name="">
             <a:extLst xmlns:a="http://schemas.openxmlformats.org/drawingml/2006/main">
               <a:ext uri="{FF2B5EF4-FFF2-40B4-BE49-F238E27FC236}">
-                <a16:creationId xmlns:a16="http://schemas.microsoft.com/office/drawing/2014/main" id="{39CBE86A-B852-4E09-BEFF-83BEC8BF26E1}"/>
+                <a16:creationId xmlns:a16="http://schemas.microsoft.com/office/drawing/2014/main" id="{79C92EF2-2515-4B38-9C2A-B1C7DB5C3982}"/>
               </a:ext>
             </a:extLst>
           </p:cNvPr>
@@ -7508,7 +7508,7 @@
           <p:cNvPr id="9" name="">
             <a:extLst xmlns:a="http://schemas.openxmlformats.org/drawingml/2006/main">
               <a:ext uri="{FF2B5EF4-FFF2-40B4-BE49-F238E27FC236}">
-                <a16:creationId xmlns:a16="http://schemas.microsoft.com/office/drawing/2014/main" id="{591A3DCE-7E39-472D-94F0-E2E5649886DC}"/>
+                <a16:creationId xmlns:a16="http://schemas.microsoft.com/office/drawing/2014/main" id="{DBC42D58-9F1B-46BF-A018-FE7C5132892B}"/>
               </a:ext>
             </a:extLst>
           </p:cNvPr>
@@ -7539,7 +7539,7 @@
           <p:cNvPr id="10" name="">
             <a:extLst xmlns:a="http://schemas.openxmlformats.org/drawingml/2006/main">
               <a:ext uri="{FF2B5EF4-FFF2-40B4-BE49-F238E27FC236}">
-                <a16:creationId xmlns:a16="http://schemas.microsoft.com/office/drawing/2014/main" id="{2F6D3CB8-6F92-4433-A226-B04F7C61AD11}"/>
+                <a16:creationId xmlns:a16="http://schemas.microsoft.com/office/drawing/2014/main" id="{571B4563-5A16-410C-90F6-399D85B8F336}"/>
               </a:ext>
             </a:extLst>
           </p:cNvPr>
@@ -7601,7 +7601,7 @@
           <p:cNvPr id="11" name="">
             <a:extLst xmlns:a="http://schemas.openxmlformats.org/drawingml/2006/main">
               <a:ext uri="{FF2B5EF4-FFF2-40B4-BE49-F238E27FC236}">
-                <a16:creationId xmlns:a16="http://schemas.microsoft.com/office/drawing/2014/main" id="{27A2F49A-4214-4FFF-81F0-2892541A0FE9}"/>
+                <a16:creationId xmlns:a16="http://schemas.microsoft.com/office/drawing/2014/main" id="{D63D104E-8324-4700-94F9-91C116E9BDF3}"/>
               </a:ext>
             </a:extLst>
           </p:cNvPr>
@@ -7663,7 +7663,7 @@
           <p:cNvPr id="12" name="">
             <a:extLst xmlns:a="http://schemas.openxmlformats.org/drawingml/2006/main">
               <a:ext uri="{FF2B5EF4-FFF2-40B4-BE49-F238E27FC236}">
-                <a16:creationId xmlns:a16="http://schemas.microsoft.com/office/drawing/2014/main" id="{6114A9A4-E91B-4A38-AC66-7ACC685DABB5}"/>
+                <a16:creationId xmlns:a16="http://schemas.microsoft.com/office/drawing/2014/main" id="{DD334E1C-F00C-4B6B-8A71-70AA7B78E27E}"/>
               </a:ext>
             </a:extLst>
           </p:cNvPr>
@@ -7696,7 +7696,7 @@
           <p:cNvPr id="13" name="">
             <a:extLst xmlns:a="http://schemas.openxmlformats.org/drawingml/2006/main">
               <a:ext uri="{FF2B5EF4-FFF2-40B4-BE49-F238E27FC236}">
-                <a16:creationId xmlns:a16="http://schemas.microsoft.com/office/drawing/2014/main" id="{4F2D18EA-AE2B-497B-9126-21462F8AC30C}"/>
+                <a16:creationId xmlns:a16="http://schemas.microsoft.com/office/drawing/2014/main" id="{C1FFDED2-4042-48B3-AEB0-1F57B7DE94C8}"/>
               </a:ext>
             </a:extLst>
           </p:cNvPr>
@@ -7731,7 +7731,7 @@
           <p:cNvPr id="14" name="">
             <a:extLst xmlns:a="http://schemas.openxmlformats.org/drawingml/2006/main">
               <a:ext uri="{FF2B5EF4-FFF2-40B4-BE49-F238E27FC236}">
-                <a16:creationId xmlns:a16="http://schemas.microsoft.com/office/drawing/2014/main" id="{29103ACE-E792-4DA9-BF34-AB15F8FEF89B}"/>
+                <a16:creationId xmlns:a16="http://schemas.microsoft.com/office/drawing/2014/main" id="{E213DEB2-D606-4089-A5EF-9D1F7A93B27D}"/>
               </a:ext>
             </a:extLst>
           </p:cNvPr>
@@ -7762,7 +7762,7 @@
           <p:cNvPr id="15" name="">
             <a:extLst xmlns:a="http://schemas.openxmlformats.org/drawingml/2006/main">
               <a:ext uri="{FF2B5EF4-FFF2-40B4-BE49-F238E27FC236}">
-                <a16:creationId xmlns:a16="http://schemas.microsoft.com/office/drawing/2014/main" id="{6DD15CF2-B9A8-4A86-915D-67A7EFEE5F34}"/>
+                <a16:creationId xmlns:a16="http://schemas.microsoft.com/office/drawing/2014/main" id="{D165F781-6517-4762-849B-8382FA3BD9C3}"/>
               </a:ext>
             </a:extLst>
           </p:cNvPr>
@@ -7824,7 +7824,7 @@
           <p:cNvPr id="16" name="">
             <a:extLst xmlns:a="http://schemas.openxmlformats.org/drawingml/2006/main">
               <a:ext uri="{FF2B5EF4-FFF2-40B4-BE49-F238E27FC236}">
-                <a16:creationId xmlns:a16="http://schemas.microsoft.com/office/drawing/2014/main" id="{BB6B9DF3-03A0-4DF6-B1A5-D363732CC41C}"/>
+                <a16:creationId xmlns:a16="http://schemas.microsoft.com/office/drawing/2014/main" id="{1096F11A-1215-47A7-9470-3093FAFAB6F0}"/>
               </a:ext>
             </a:extLst>
           </p:cNvPr>
@@ -7886,7 +7886,7 @@
           <p:cNvPr id="17" name="">
             <a:extLst xmlns:a="http://schemas.openxmlformats.org/drawingml/2006/main">
               <a:ext uri="{FF2B5EF4-FFF2-40B4-BE49-F238E27FC236}">
-                <a16:creationId xmlns:a16="http://schemas.microsoft.com/office/drawing/2014/main" id="{3462742B-F165-4491-BE91-CBACE58B43B0}"/>
+                <a16:creationId xmlns:a16="http://schemas.microsoft.com/office/drawing/2014/main" id="{73D1F344-BC87-4DA3-9DFA-2154786C7000}"/>
               </a:ext>
             </a:extLst>
           </p:cNvPr>
@@ -7948,7 +7948,7 @@
           <p:cNvPr id="18" name="">
             <a:extLst xmlns:a="http://schemas.openxmlformats.org/drawingml/2006/main">
               <a:ext uri="{FF2B5EF4-FFF2-40B4-BE49-F238E27FC236}">
-                <a16:creationId xmlns:a16="http://schemas.microsoft.com/office/drawing/2014/main" id="{8DFC7A35-F1BA-43CF-9837-9011B39BC8E4}"/>
+                <a16:creationId xmlns:a16="http://schemas.microsoft.com/office/drawing/2014/main" id="{EDC501AF-AE92-44C6-BD52-822EDAF0CD33}"/>
               </a:ext>
             </a:extLst>
           </p:cNvPr>
@@ -8008,7 +8008,7 @@
     </p:spTree>
     <p:extLst>
       <p:ext uri="{BB962C8B-B14F-4D97-AF65-F5344CB8AC3E}">
-        <p14:creationId xmlns:p14="http://schemas.microsoft.com/office/powerpoint/2010/main" val="700907888"/>
+        <p14:creationId xmlns:p14="http://schemas.microsoft.com/office/powerpoint/2010/main" val="157363515"/>
       </p:ext>
     </p:extLst>
   </p:cSld>
@@ -8036,7 +8036,7 @@
           <p:nvPr/>
         </p:nvPicPr>
         <p:blipFill>
-          <a:blip xmlns:r="http://schemas.openxmlformats.org/officeDocument/2006/relationships" xmlns:a="http://schemas.openxmlformats.org/drawingml/2006/main" r:embed="R80f31874621b48cf"/>
+          <a:blip xmlns:r="http://schemas.openxmlformats.org/officeDocument/2006/relationships" xmlns:a="http://schemas.openxmlformats.org/drawingml/2006/main" r:embed="R750282c400b84c69"/>
           <a:srcRect xmlns:a="http://schemas.openxmlformats.org/drawingml/2006/main" l="0" t="0" r="0" b="0"/>
           <a:stretch xmlns:a="http://schemas.openxmlformats.org/drawingml/2006/main">
             <a:fillRect l="0" t="0" r="0" b="0"/>
@@ -8057,7 +8057,7 @@
           <p:cNvPr id="2" name="">
             <a:extLst xmlns:a="http://schemas.openxmlformats.org/drawingml/2006/main">
               <a:ext uri="{FF2B5EF4-FFF2-40B4-BE49-F238E27FC236}">
-                <a16:creationId xmlns:a16="http://schemas.microsoft.com/office/drawing/2014/main" id="{98C3602D-62F4-42C3-9300-6E5780B4B1A4}"/>
+                <a16:creationId xmlns:a16="http://schemas.microsoft.com/office/drawing/2014/main" id="{31A455E0-FEA8-4EE5-AA6A-9291520256E2}"/>
               </a:ext>
             </a:extLst>
           </p:cNvPr>
@@ -8119,7 +8119,7 @@
           <p:cNvPr id="3" name="">
             <a:extLst xmlns:a="http://schemas.openxmlformats.org/drawingml/2006/main">
               <a:ext uri="{FF2B5EF4-FFF2-40B4-BE49-F238E27FC236}">
-                <a16:creationId xmlns:a16="http://schemas.microsoft.com/office/drawing/2014/main" id="{27DC1395-F842-4D07-B1D3-846165A3D0BC}"/>
+                <a16:creationId xmlns:a16="http://schemas.microsoft.com/office/drawing/2014/main" id="{05473AC6-E522-4491-9C46-A166B907BB10}"/>
               </a:ext>
             </a:extLst>
           </p:cNvPr>
@@ -8181,7 +8181,7 @@
           <p:cNvPr id="4" name="">
             <a:extLst xmlns:a="http://schemas.openxmlformats.org/drawingml/2006/main">
               <a:ext uri="{FF2B5EF4-FFF2-40B4-BE49-F238E27FC236}">
-                <a16:creationId xmlns:a16="http://schemas.microsoft.com/office/drawing/2014/main" id="{0B5C09B8-DCFE-4814-9676-E4F51967BB4C}"/>
+                <a16:creationId xmlns:a16="http://schemas.microsoft.com/office/drawing/2014/main" id="{8487E082-6E85-4DB9-8A4D-F7B524ADEC26}"/>
               </a:ext>
             </a:extLst>
           </p:cNvPr>
@@ -8243,7 +8243,7 @@
           <p:cNvPr id="5" name="">
             <a:extLst xmlns:a="http://schemas.openxmlformats.org/drawingml/2006/main">
               <a:ext uri="{FF2B5EF4-FFF2-40B4-BE49-F238E27FC236}">
-                <a16:creationId xmlns:a16="http://schemas.microsoft.com/office/drawing/2014/main" id="{B81FCDA9-5E25-4E0A-B841-F5F642DBAAA4}"/>
+                <a16:creationId xmlns:a16="http://schemas.microsoft.com/office/drawing/2014/main" id="{D604C6A7-925B-4AD1-AED0-232A0CB224FA}"/>
               </a:ext>
             </a:extLst>
           </p:cNvPr>
@@ -8274,7 +8274,7 @@
           <p:cNvPr id="6" name="">
             <a:extLst xmlns:a="http://schemas.openxmlformats.org/drawingml/2006/main">
               <a:ext uri="{FF2B5EF4-FFF2-40B4-BE49-F238E27FC236}">
-                <a16:creationId xmlns:a16="http://schemas.microsoft.com/office/drawing/2014/main" id="{64F08840-CE05-4C20-9834-39FA0EA5A0E1}"/>
+                <a16:creationId xmlns:a16="http://schemas.microsoft.com/office/drawing/2014/main" id="{D1EE8591-84F9-4301-A5CF-2ECE2AE89F7B}"/>
               </a:ext>
             </a:extLst>
           </p:cNvPr>
@@ -8336,7 +8336,7 @@
           <p:cNvPr id="7" name="">
             <a:extLst xmlns:a="http://schemas.openxmlformats.org/drawingml/2006/main">
               <a:ext uri="{FF2B5EF4-FFF2-40B4-BE49-F238E27FC236}">
-                <a16:creationId xmlns:a16="http://schemas.microsoft.com/office/drawing/2014/main" id="{9E28E405-6C2E-4BA4-AB81-768389E77F2B}"/>
+                <a16:creationId xmlns:a16="http://schemas.microsoft.com/office/drawing/2014/main" id="{1AD8C326-61DE-4435-A254-F05A4600B169}"/>
               </a:ext>
             </a:extLst>
           </p:cNvPr>
@@ -8369,7 +8369,7 @@
           <p:cNvPr id="8" name="">
             <a:extLst xmlns:a="http://schemas.openxmlformats.org/drawingml/2006/main">
               <a:ext uri="{FF2B5EF4-FFF2-40B4-BE49-F238E27FC236}">
-                <a16:creationId xmlns:a16="http://schemas.microsoft.com/office/drawing/2014/main" id="{2C9F4B2D-B210-4126-83F3-229AF9414906}"/>
+                <a16:creationId xmlns:a16="http://schemas.microsoft.com/office/drawing/2014/main" id="{58AEE27A-01F7-4DD2-98B5-68FA85A68531}"/>
               </a:ext>
             </a:extLst>
           </p:cNvPr>
@@ -8404,7 +8404,7 @@
           <p:cNvPr id="9" name="">
             <a:extLst xmlns:a="http://schemas.openxmlformats.org/drawingml/2006/main">
               <a:ext uri="{FF2B5EF4-FFF2-40B4-BE49-F238E27FC236}">
-                <a16:creationId xmlns:a16="http://schemas.microsoft.com/office/drawing/2014/main" id="{9481B247-2C31-4F39-BA93-107E9E18FADE}"/>
+                <a16:creationId xmlns:a16="http://schemas.microsoft.com/office/drawing/2014/main" id="{7D5DD675-608C-4A56-ABB1-B173941C1CC8}"/>
               </a:ext>
             </a:extLst>
           </p:cNvPr>
@@ -8435,7 +8435,7 @@
           <p:cNvPr id="10" name="">
             <a:extLst xmlns:a="http://schemas.openxmlformats.org/drawingml/2006/main">
               <a:ext uri="{FF2B5EF4-FFF2-40B4-BE49-F238E27FC236}">
-                <a16:creationId xmlns:a16="http://schemas.microsoft.com/office/drawing/2014/main" id="{455FF3D4-EEB8-4ED5-8CAD-0CAC40F1EF5A}"/>
+                <a16:creationId xmlns:a16="http://schemas.microsoft.com/office/drawing/2014/main" id="{C58EFDFA-C04C-49D9-9E81-8310D0CB0F80}"/>
               </a:ext>
             </a:extLst>
           </p:cNvPr>
@@ -8497,7 +8497,7 @@
           <p:cNvPr id="11" name="">
             <a:extLst xmlns:a="http://schemas.openxmlformats.org/drawingml/2006/main">
               <a:ext uri="{FF2B5EF4-FFF2-40B4-BE49-F238E27FC236}">
-                <a16:creationId xmlns:a16="http://schemas.microsoft.com/office/drawing/2014/main" id="{E5DD292A-C8C6-437B-B990-5E2CD7B353A6}"/>
+                <a16:creationId xmlns:a16="http://schemas.microsoft.com/office/drawing/2014/main" id="{C21B066F-A7FA-4B8B-A2C5-B8D73D038F70}"/>
               </a:ext>
             </a:extLst>
           </p:cNvPr>
@@ -8559,7 +8559,7 @@
           <p:cNvPr id="12" name="">
             <a:extLst xmlns:a="http://schemas.openxmlformats.org/drawingml/2006/main">
               <a:ext uri="{FF2B5EF4-FFF2-40B4-BE49-F238E27FC236}">
-                <a16:creationId xmlns:a16="http://schemas.microsoft.com/office/drawing/2014/main" id="{21F33A6A-E8C2-41E8-A094-29077581BB85}"/>
+                <a16:creationId xmlns:a16="http://schemas.microsoft.com/office/drawing/2014/main" id="{89801DD8-A28E-4E47-9BC0-4F789D0F81A6}"/>
               </a:ext>
             </a:extLst>
           </p:cNvPr>
@@ -8592,7 +8592,7 @@
           <p:cNvPr id="13" name="">
             <a:extLst xmlns:a="http://schemas.openxmlformats.org/drawingml/2006/main">
               <a:ext uri="{FF2B5EF4-FFF2-40B4-BE49-F238E27FC236}">
-                <a16:creationId xmlns:a16="http://schemas.microsoft.com/office/drawing/2014/main" id="{1E3EF7DB-D288-4C32-97DF-3FEFE55A5ED3}"/>
+                <a16:creationId xmlns:a16="http://schemas.microsoft.com/office/drawing/2014/main" id="{04FD9BB5-8618-42AC-A874-8C00070D10E8}"/>
               </a:ext>
             </a:extLst>
           </p:cNvPr>
@@ -8627,7 +8627,7 @@
           <p:cNvPr id="14" name="">
             <a:extLst xmlns:a="http://schemas.openxmlformats.org/drawingml/2006/main">
               <a:ext uri="{FF2B5EF4-FFF2-40B4-BE49-F238E27FC236}">
-                <a16:creationId xmlns:a16="http://schemas.microsoft.com/office/drawing/2014/main" id="{88B9D75B-1C37-45CA-A34B-42CB7FEC40DD}"/>
+                <a16:creationId xmlns:a16="http://schemas.microsoft.com/office/drawing/2014/main" id="{503BEF81-F4D3-4101-BB3C-83E1EF5F40F4}"/>
               </a:ext>
             </a:extLst>
           </p:cNvPr>
@@ -8658,7 +8658,7 @@
           <p:cNvPr id="15" name="">
             <a:extLst xmlns:a="http://schemas.openxmlformats.org/drawingml/2006/main">
               <a:ext uri="{FF2B5EF4-FFF2-40B4-BE49-F238E27FC236}">
-                <a16:creationId xmlns:a16="http://schemas.microsoft.com/office/drawing/2014/main" id="{7ED0B913-833E-4416-A0C3-2EDB9A497D9C}"/>
+                <a16:creationId xmlns:a16="http://schemas.microsoft.com/office/drawing/2014/main" id="{6FC10CE8-AD67-465C-91CF-7DA65560B757}"/>
               </a:ext>
             </a:extLst>
           </p:cNvPr>
@@ -8720,7 +8720,7 @@
           <p:cNvPr id="16" name="">
             <a:extLst xmlns:a="http://schemas.openxmlformats.org/drawingml/2006/main">
               <a:ext uri="{FF2B5EF4-FFF2-40B4-BE49-F238E27FC236}">
-                <a16:creationId xmlns:a16="http://schemas.microsoft.com/office/drawing/2014/main" id="{E7B527ED-9EB0-45D1-A2DF-5011888D06EE}"/>
+                <a16:creationId xmlns:a16="http://schemas.microsoft.com/office/drawing/2014/main" id="{50C17D09-7FE1-4776-A5B4-ADBC84DABE80}"/>
               </a:ext>
             </a:extLst>
           </p:cNvPr>
@@ -8782,7 +8782,7 @@
           <p:cNvPr id="17" name="">
             <a:extLst xmlns:a="http://schemas.openxmlformats.org/drawingml/2006/main">
               <a:ext uri="{FF2B5EF4-FFF2-40B4-BE49-F238E27FC236}">
-                <a16:creationId xmlns:a16="http://schemas.microsoft.com/office/drawing/2014/main" id="{3984B7CD-FAF7-4417-AD04-9E247D8A82A5}"/>
+                <a16:creationId xmlns:a16="http://schemas.microsoft.com/office/drawing/2014/main" id="{479742C2-218E-49E8-B42F-D02A00ADE509}"/>
               </a:ext>
             </a:extLst>
           </p:cNvPr>
@@ -8844,7 +8844,7 @@
           <p:cNvPr id="18" name="">
             <a:extLst xmlns:a="http://schemas.openxmlformats.org/drawingml/2006/main">
               <a:ext uri="{FF2B5EF4-FFF2-40B4-BE49-F238E27FC236}">
-                <a16:creationId xmlns:a16="http://schemas.microsoft.com/office/drawing/2014/main" id="{4A3D082C-32B0-4BE0-AB62-F1FF1A61C47F}"/>
+                <a16:creationId xmlns:a16="http://schemas.microsoft.com/office/drawing/2014/main" id="{3636571B-9AD6-4615-8B67-A67C559555DF}"/>
               </a:ext>
             </a:extLst>
           </p:cNvPr>
@@ -8904,7 +8904,7 @@
     </p:spTree>
     <p:extLst>
       <p:ext uri="{BB962C8B-B14F-4D97-AF65-F5344CB8AC3E}">
-        <p14:creationId xmlns:p14="http://schemas.microsoft.com/office/powerpoint/2010/main" val="1021803728"/>
+        <p14:creationId xmlns:p14="http://schemas.microsoft.com/office/powerpoint/2010/main" val="892991394"/>
       </p:ext>
     </p:extLst>
   </p:cSld>
@@ -8932,7 +8932,7 @@
           <p:nvPr/>
         </p:nvPicPr>
         <p:blipFill>
-          <a:blip xmlns:r="http://schemas.openxmlformats.org/officeDocument/2006/relationships" xmlns:a="http://schemas.openxmlformats.org/drawingml/2006/main" r:embed="R14218f78c4e342e8"/>
+          <a:blip xmlns:r="http://schemas.openxmlformats.org/officeDocument/2006/relationships" xmlns:a="http://schemas.openxmlformats.org/drawingml/2006/main" r:embed="R9b2af8710a614b09"/>
           <a:srcRect xmlns:a="http://schemas.openxmlformats.org/drawingml/2006/main" l="0" t="0" r="0" b="0"/>
           <a:stretch xmlns:a="http://schemas.openxmlformats.org/drawingml/2006/main">
             <a:fillRect l="0" t="0" r="0" b="0"/>
@@ -8953,7 +8953,7 @@
           <p:cNvPr id="2" name="">
             <a:extLst xmlns:a="http://schemas.openxmlformats.org/drawingml/2006/main">
               <a:ext uri="{FF2B5EF4-FFF2-40B4-BE49-F238E27FC236}">
-                <a16:creationId xmlns:a16="http://schemas.microsoft.com/office/drawing/2014/main" id="{A128BE41-CC7B-4C60-9E83-FAA29B463A2C}"/>
+                <a16:creationId xmlns:a16="http://schemas.microsoft.com/office/drawing/2014/main" id="{0B95F720-C4FA-4600-9C12-AE54709B00C0}"/>
               </a:ext>
             </a:extLst>
           </p:cNvPr>
@@ -9015,7 +9015,7 @@
           <p:cNvPr id="3" name="">
             <a:extLst xmlns:a="http://schemas.openxmlformats.org/drawingml/2006/main">
               <a:ext uri="{FF2B5EF4-FFF2-40B4-BE49-F238E27FC236}">
-                <a16:creationId xmlns:a16="http://schemas.microsoft.com/office/drawing/2014/main" id="{28A18628-BA40-4223-AED1-273401A9AA93}"/>
+                <a16:creationId xmlns:a16="http://schemas.microsoft.com/office/drawing/2014/main" id="{79B3A002-A184-4F16-8F97-93BF02AC7927}"/>
               </a:ext>
             </a:extLst>
           </p:cNvPr>
@@ -9077,7 +9077,7 @@
           <p:cNvPr id="4" name="">
             <a:extLst xmlns:a="http://schemas.openxmlformats.org/drawingml/2006/main">
               <a:ext uri="{FF2B5EF4-FFF2-40B4-BE49-F238E27FC236}">
-                <a16:creationId xmlns:a16="http://schemas.microsoft.com/office/drawing/2014/main" id="{0AFC4C69-58BF-47DA-A9EA-9920BF5F4F0C}"/>
+                <a16:creationId xmlns:a16="http://schemas.microsoft.com/office/drawing/2014/main" id="{18097B22-460E-4613-9DC4-46506435A757}"/>
               </a:ext>
             </a:extLst>
           </p:cNvPr>
@@ -9139,7 +9139,7 @@
           <p:cNvPr id="5" name="">
             <a:extLst xmlns:a="http://schemas.openxmlformats.org/drawingml/2006/main">
               <a:ext uri="{FF2B5EF4-FFF2-40B4-BE49-F238E27FC236}">
-                <a16:creationId xmlns:a16="http://schemas.microsoft.com/office/drawing/2014/main" id="{4AEA7F5C-4CE0-4A5B-8DCD-86193B0C01A8}"/>
+                <a16:creationId xmlns:a16="http://schemas.microsoft.com/office/drawing/2014/main" id="{B1C90B3C-412F-4A15-A14D-79F6A6779D71}"/>
               </a:ext>
             </a:extLst>
           </p:cNvPr>
@@ -9170,7 +9170,7 @@
           <p:cNvPr id="6" name="">
             <a:extLst xmlns:a="http://schemas.openxmlformats.org/drawingml/2006/main">
               <a:ext uri="{FF2B5EF4-FFF2-40B4-BE49-F238E27FC236}">
-                <a16:creationId xmlns:a16="http://schemas.microsoft.com/office/drawing/2014/main" id="{48D6893A-912D-4740-9F3A-0E97043AC4EC}"/>
+                <a16:creationId xmlns:a16="http://schemas.microsoft.com/office/drawing/2014/main" id="{43E62B96-66AB-4D81-A2AF-70F0965FF271}"/>
               </a:ext>
             </a:extLst>
           </p:cNvPr>
@@ -9232,7 +9232,7 @@
           <p:cNvPr id="7" name="">
             <a:extLst xmlns:a="http://schemas.openxmlformats.org/drawingml/2006/main">
               <a:ext uri="{FF2B5EF4-FFF2-40B4-BE49-F238E27FC236}">
-                <a16:creationId xmlns:a16="http://schemas.microsoft.com/office/drawing/2014/main" id="{AB09EFE2-38B4-4537-92BA-310798952996}"/>
+                <a16:creationId xmlns:a16="http://schemas.microsoft.com/office/drawing/2014/main" id="{239A2CBC-72EF-4EFA-BA3F-6F39723163A3}"/>
               </a:ext>
             </a:extLst>
           </p:cNvPr>
@@ -9265,7 +9265,7 @@
           <p:cNvPr id="8" name="">
             <a:extLst xmlns:a="http://schemas.openxmlformats.org/drawingml/2006/main">
               <a:ext uri="{FF2B5EF4-FFF2-40B4-BE49-F238E27FC236}">
-                <a16:creationId xmlns:a16="http://schemas.microsoft.com/office/drawing/2014/main" id="{5E7E46A1-9E03-4083-A678-2AC9CB828F12}"/>
+                <a16:creationId xmlns:a16="http://schemas.microsoft.com/office/drawing/2014/main" id="{F770BFBE-D464-44A7-8A33-17876F68325A}"/>
               </a:ext>
             </a:extLst>
           </p:cNvPr>
@@ -9300,7 +9300,7 @@
           <p:cNvPr id="9" name="">
             <a:extLst xmlns:a="http://schemas.openxmlformats.org/drawingml/2006/main">
               <a:ext uri="{FF2B5EF4-FFF2-40B4-BE49-F238E27FC236}">
-                <a16:creationId xmlns:a16="http://schemas.microsoft.com/office/drawing/2014/main" id="{9BEC6E88-165A-464F-8AF2-7424A3A7F737}"/>
+                <a16:creationId xmlns:a16="http://schemas.microsoft.com/office/drawing/2014/main" id="{95B6542C-F577-4520-BE80-1E1F79B2A660}"/>
               </a:ext>
             </a:extLst>
           </p:cNvPr>
@@ -9331,7 +9331,7 @@
           <p:cNvPr id="10" name="">
             <a:extLst xmlns:a="http://schemas.openxmlformats.org/drawingml/2006/main">
               <a:ext uri="{FF2B5EF4-FFF2-40B4-BE49-F238E27FC236}">
-                <a16:creationId xmlns:a16="http://schemas.microsoft.com/office/drawing/2014/main" id="{31D66364-B288-449B-A779-E02B36BA2974}"/>
+                <a16:creationId xmlns:a16="http://schemas.microsoft.com/office/drawing/2014/main" id="{ED8CFA0A-0404-4AEB-9E78-08044AAD7C57}"/>
               </a:ext>
             </a:extLst>
           </p:cNvPr>
@@ -9393,7 +9393,7 @@
           <p:cNvPr id="11" name="">
             <a:extLst xmlns:a="http://schemas.openxmlformats.org/drawingml/2006/main">
               <a:ext uri="{FF2B5EF4-FFF2-40B4-BE49-F238E27FC236}">
-                <a16:creationId xmlns:a16="http://schemas.microsoft.com/office/drawing/2014/main" id="{B198CF0F-97A9-4198-BFBA-02D8CB25F417}"/>
+                <a16:creationId xmlns:a16="http://schemas.microsoft.com/office/drawing/2014/main" id="{2918353B-07C5-4938-AC0E-5A399ADF6735}"/>
               </a:ext>
             </a:extLst>
           </p:cNvPr>
@@ -9455,7 +9455,7 @@
           <p:cNvPr id="12" name="">
             <a:extLst xmlns:a="http://schemas.openxmlformats.org/drawingml/2006/main">
               <a:ext uri="{FF2B5EF4-FFF2-40B4-BE49-F238E27FC236}">
-                <a16:creationId xmlns:a16="http://schemas.microsoft.com/office/drawing/2014/main" id="{7DB98618-0122-4C9E-8A5D-B5DD49C570DB}"/>
+                <a16:creationId xmlns:a16="http://schemas.microsoft.com/office/drawing/2014/main" id="{F9F4F747-5145-4B97-896F-98174F57A6FD}"/>
               </a:ext>
             </a:extLst>
           </p:cNvPr>
@@ -9517,7 +9517,7 @@
           <p:cNvPr id="13" name="">
             <a:extLst xmlns:a="http://schemas.openxmlformats.org/drawingml/2006/main">
               <a:ext uri="{FF2B5EF4-FFF2-40B4-BE49-F238E27FC236}">
-                <a16:creationId xmlns:a16="http://schemas.microsoft.com/office/drawing/2014/main" id="{BE6B4528-85A5-48E9-95E1-DABF2FC31E4D}"/>
+                <a16:creationId xmlns:a16="http://schemas.microsoft.com/office/drawing/2014/main" id="{7FBBADF7-91CB-4A18-8EB0-22C1B182AAB5}"/>
               </a:ext>
             </a:extLst>
           </p:cNvPr>
@@ -9550,7 +9550,7 @@
           <p:cNvPr id="14" name="">
             <a:extLst xmlns:a="http://schemas.openxmlformats.org/drawingml/2006/main">
               <a:ext uri="{FF2B5EF4-FFF2-40B4-BE49-F238E27FC236}">
-                <a16:creationId xmlns:a16="http://schemas.microsoft.com/office/drawing/2014/main" id="{7D3AAEBF-605C-4020-8E63-B3BC3521B27A}"/>
+                <a16:creationId xmlns:a16="http://schemas.microsoft.com/office/drawing/2014/main" id="{1D2ABEB0-802B-4D52-AFE6-2BE854EF6469}"/>
               </a:ext>
             </a:extLst>
           </p:cNvPr>
@@ -9585,7 +9585,7 @@
           <p:cNvPr id="15" name="">
             <a:extLst xmlns:a="http://schemas.openxmlformats.org/drawingml/2006/main">
               <a:ext uri="{FF2B5EF4-FFF2-40B4-BE49-F238E27FC236}">
-                <a16:creationId xmlns:a16="http://schemas.microsoft.com/office/drawing/2014/main" id="{03416F4E-CA79-4382-BD6E-B93741D2FE50}"/>
+                <a16:creationId xmlns:a16="http://schemas.microsoft.com/office/drawing/2014/main" id="{4E001815-3F56-441C-87BC-880DD5BC1E89}"/>
               </a:ext>
             </a:extLst>
           </p:cNvPr>
@@ -9616,7 +9616,7 @@
           <p:cNvPr id="16" name="">
             <a:extLst xmlns:a="http://schemas.openxmlformats.org/drawingml/2006/main">
               <a:ext uri="{FF2B5EF4-FFF2-40B4-BE49-F238E27FC236}">
-                <a16:creationId xmlns:a16="http://schemas.microsoft.com/office/drawing/2014/main" id="{3198AE98-309F-40C5-92B9-76AA38E05BC8}"/>
+                <a16:creationId xmlns:a16="http://schemas.microsoft.com/office/drawing/2014/main" id="{AF0E7A42-75D8-475B-9522-941BD57069EF}"/>
               </a:ext>
             </a:extLst>
           </p:cNvPr>
@@ -9678,7 +9678,7 @@
           <p:cNvPr id="17" name="">
             <a:extLst xmlns:a="http://schemas.openxmlformats.org/drawingml/2006/main">
               <a:ext uri="{FF2B5EF4-FFF2-40B4-BE49-F238E27FC236}">
-                <a16:creationId xmlns:a16="http://schemas.microsoft.com/office/drawing/2014/main" id="{62411B00-8663-44EF-B78F-9E26E1EC900D}"/>
+                <a16:creationId xmlns:a16="http://schemas.microsoft.com/office/drawing/2014/main" id="{FDB8BBB8-DF35-4DD6-9EF5-3191638FD7C9}"/>
               </a:ext>
             </a:extLst>
           </p:cNvPr>
@@ -9740,7 +9740,7 @@
           <p:cNvPr id="18" name="">
             <a:extLst xmlns:a="http://schemas.openxmlformats.org/drawingml/2006/main">
               <a:ext uri="{FF2B5EF4-FFF2-40B4-BE49-F238E27FC236}">
-                <a16:creationId xmlns:a16="http://schemas.microsoft.com/office/drawing/2014/main" id="{38A3C657-129E-4904-85B3-EF8E1285295D}"/>
+                <a16:creationId xmlns:a16="http://schemas.microsoft.com/office/drawing/2014/main" id="{626CAB8D-C54A-49CE-B912-A21BEE79653A}"/>
               </a:ext>
             </a:extLst>
           </p:cNvPr>
@@ -9802,7 +9802,7 @@
           <p:cNvPr id="19" name="">
             <a:extLst xmlns:a="http://schemas.openxmlformats.org/drawingml/2006/main">
               <a:ext uri="{FF2B5EF4-FFF2-40B4-BE49-F238E27FC236}">
-                <a16:creationId xmlns:a16="http://schemas.microsoft.com/office/drawing/2014/main" id="{6079B4E3-8928-477C-ACE0-1AC7EFE489CA}"/>
+                <a16:creationId xmlns:a16="http://schemas.microsoft.com/office/drawing/2014/main" id="{C843EA2A-AB95-4746-B2E7-2BFC41D1FF79}"/>
               </a:ext>
             </a:extLst>
           </p:cNvPr>
@@ -9835,7 +9835,7 @@
           <p:cNvPr id="20" name="">
             <a:extLst xmlns:a="http://schemas.openxmlformats.org/drawingml/2006/main">
               <a:ext uri="{FF2B5EF4-FFF2-40B4-BE49-F238E27FC236}">
-                <a16:creationId xmlns:a16="http://schemas.microsoft.com/office/drawing/2014/main" id="{EA1B4200-E52D-4957-854A-1DF214F2728D}"/>
+                <a16:creationId xmlns:a16="http://schemas.microsoft.com/office/drawing/2014/main" id="{1A353325-1513-49DC-ADFD-D2CB9620BFB2}"/>
               </a:ext>
             </a:extLst>
           </p:cNvPr>
@@ -9870,7 +9870,7 @@
           <p:cNvPr id="21" name="">
             <a:extLst xmlns:a="http://schemas.openxmlformats.org/drawingml/2006/main">
               <a:ext uri="{FF2B5EF4-FFF2-40B4-BE49-F238E27FC236}">
-                <a16:creationId xmlns:a16="http://schemas.microsoft.com/office/drawing/2014/main" id="{665AC301-5B92-47F0-AD59-34E59D4E3BB5}"/>
+                <a16:creationId xmlns:a16="http://schemas.microsoft.com/office/drawing/2014/main" id="{65B8A79E-6B05-41AF-B299-4E43C34D2269}"/>
               </a:ext>
             </a:extLst>
           </p:cNvPr>
@@ -9901,7 +9901,7 @@
           <p:cNvPr id="22" name="">
             <a:extLst xmlns:a="http://schemas.openxmlformats.org/drawingml/2006/main">
               <a:ext uri="{FF2B5EF4-FFF2-40B4-BE49-F238E27FC236}">
-                <a16:creationId xmlns:a16="http://schemas.microsoft.com/office/drawing/2014/main" id="{F7599B2F-CD5B-4203-93EB-56EE47A6B578}"/>
+                <a16:creationId xmlns:a16="http://schemas.microsoft.com/office/drawing/2014/main" id="{EAC1AC48-A04B-41DD-B2E7-9210BD833A87}"/>
               </a:ext>
             </a:extLst>
           </p:cNvPr>
@@ -9963,7 +9963,7 @@
           <p:cNvPr id="23" name="">
             <a:extLst xmlns:a="http://schemas.openxmlformats.org/drawingml/2006/main">
               <a:ext uri="{FF2B5EF4-FFF2-40B4-BE49-F238E27FC236}">
-                <a16:creationId xmlns:a16="http://schemas.microsoft.com/office/drawing/2014/main" id="{147BEE53-CA99-403D-BC85-79E989079567}"/>
+                <a16:creationId xmlns:a16="http://schemas.microsoft.com/office/drawing/2014/main" id="{295DD4E3-6532-44CC-9196-4B16D0C32942}"/>
               </a:ext>
             </a:extLst>
           </p:cNvPr>
@@ -10025,7 +10025,7 @@
           <p:cNvPr id="24" name="">
             <a:extLst xmlns:a="http://schemas.openxmlformats.org/drawingml/2006/main">
               <a:ext uri="{FF2B5EF4-FFF2-40B4-BE49-F238E27FC236}">
-                <a16:creationId xmlns:a16="http://schemas.microsoft.com/office/drawing/2014/main" id="{C3AD4EC1-B637-4ABF-98AA-2CF4ED1A5C24}"/>
+                <a16:creationId xmlns:a16="http://schemas.microsoft.com/office/drawing/2014/main" id="{1508F80C-3E63-4A73-9C4C-8AABEF1A2C99}"/>
               </a:ext>
             </a:extLst>
           </p:cNvPr>
@@ -10087,7 +10087,7 @@
           <p:cNvPr id="25" name="">
             <a:extLst xmlns:a="http://schemas.openxmlformats.org/drawingml/2006/main">
               <a:ext uri="{FF2B5EF4-FFF2-40B4-BE49-F238E27FC236}">
-                <a16:creationId xmlns:a16="http://schemas.microsoft.com/office/drawing/2014/main" id="{FAC71C6C-AB9B-4934-B0C6-30AF2014432D}"/>
+                <a16:creationId xmlns:a16="http://schemas.microsoft.com/office/drawing/2014/main" id="{504E8C09-E7C4-44FD-9ADD-AFD19CE1D959}"/>
               </a:ext>
             </a:extLst>
           </p:cNvPr>
@@ -10120,7 +10120,7 @@
           <p:cNvPr id="26" name="">
             <a:extLst xmlns:a="http://schemas.openxmlformats.org/drawingml/2006/main">
               <a:ext uri="{FF2B5EF4-FFF2-40B4-BE49-F238E27FC236}">
-                <a16:creationId xmlns:a16="http://schemas.microsoft.com/office/drawing/2014/main" id="{3EC1AE8A-2F06-4644-864D-9D8C8721CE90}"/>
+                <a16:creationId xmlns:a16="http://schemas.microsoft.com/office/drawing/2014/main" id="{00946A7E-9476-4CE8-8280-AA4993C71869}"/>
               </a:ext>
             </a:extLst>
           </p:cNvPr>
@@ -10155,7 +10155,7 @@
           <p:cNvPr id="27" name="">
             <a:extLst xmlns:a="http://schemas.openxmlformats.org/drawingml/2006/main">
               <a:ext uri="{FF2B5EF4-FFF2-40B4-BE49-F238E27FC236}">
-                <a16:creationId xmlns:a16="http://schemas.microsoft.com/office/drawing/2014/main" id="{B12A67DA-1947-4448-B5FB-5609FD041E57}"/>
+                <a16:creationId xmlns:a16="http://schemas.microsoft.com/office/drawing/2014/main" id="{4C46E023-6155-4642-9A6F-E002ABF717F2}"/>
               </a:ext>
             </a:extLst>
           </p:cNvPr>
@@ -10186,7 +10186,7 @@
           <p:cNvPr id="28" name="">
             <a:extLst xmlns:a="http://schemas.openxmlformats.org/drawingml/2006/main">
               <a:ext uri="{FF2B5EF4-FFF2-40B4-BE49-F238E27FC236}">
-                <a16:creationId xmlns:a16="http://schemas.microsoft.com/office/drawing/2014/main" id="{32B29BAD-34CC-4F48-A9A9-844B6203B8D7}"/>
+                <a16:creationId xmlns:a16="http://schemas.microsoft.com/office/drawing/2014/main" id="{1A107B8A-04D6-49A4-A1F7-33420CBD067D}"/>
               </a:ext>
             </a:extLst>
           </p:cNvPr>
@@ -10248,7 +10248,7 @@
           <p:cNvPr id="29" name="">
             <a:extLst xmlns:a="http://schemas.openxmlformats.org/drawingml/2006/main">
               <a:ext uri="{FF2B5EF4-FFF2-40B4-BE49-F238E27FC236}">
-                <a16:creationId xmlns:a16="http://schemas.microsoft.com/office/drawing/2014/main" id="{7498CE12-28F9-4D28-BD63-C502E23B46D5}"/>
+                <a16:creationId xmlns:a16="http://schemas.microsoft.com/office/drawing/2014/main" id="{6D3033BD-7A66-4B8F-9888-B19CD4D80D3F}"/>
               </a:ext>
             </a:extLst>
           </p:cNvPr>
@@ -10310,7 +10310,7 @@
           <p:cNvPr id="30" name="">
             <a:extLst xmlns:a="http://schemas.openxmlformats.org/drawingml/2006/main">
               <a:ext uri="{FF2B5EF4-FFF2-40B4-BE49-F238E27FC236}">
-                <a16:creationId xmlns:a16="http://schemas.microsoft.com/office/drawing/2014/main" id="{28A8998B-FC7A-45F8-9609-F955F6E3D8B0}"/>
+                <a16:creationId xmlns:a16="http://schemas.microsoft.com/office/drawing/2014/main" id="{D5E5B876-4AF0-40AF-BEB1-AFFEAD7B40E8}"/>
               </a:ext>
             </a:extLst>
           </p:cNvPr>
@@ -10372,7 +10372,7 @@
           <p:cNvPr id="31" name="">
             <a:extLst xmlns:a="http://schemas.openxmlformats.org/drawingml/2006/main">
               <a:ext uri="{FF2B5EF4-FFF2-40B4-BE49-F238E27FC236}">
-                <a16:creationId xmlns:a16="http://schemas.microsoft.com/office/drawing/2014/main" id="{6B733BB6-FDEC-4F7D-A4DC-079228191C3E}"/>
+                <a16:creationId xmlns:a16="http://schemas.microsoft.com/office/drawing/2014/main" id="{EEABC489-C66C-438D-A0A4-B5D749B509DE}"/>
               </a:ext>
             </a:extLst>
           </p:cNvPr>
@@ -10434,7 +10434,7 @@
           <p:cNvPr id="32" name="">
             <a:extLst xmlns:a="http://schemas.openxmlformats.org/drawingml/2006/main">
               <a:ext uri="{FF2B5EF4-FFF2-40B4-BE49-F238E27FC236}">
-                <a16:creationId xmlns:a16="http://schemas.microsoft.com/office/drawing/2014/main" id="{898B761F-1393-437E-8C91-6A0217AB7684}"/>
+                <a16:creationId xmlns:a16="http://schemas.microsoft.com/office/drawing/2014/main" id="{C1C9E8C8-0B87-450E-BD8A-C39E36455B3E}"/>
               </a:ext>
             </a:extLst>
           </p:cNvPr>
@@ -10494,7 +10494,7 @@
     </p:spTree>
     <p:extLst>
       <p:ext uri="{BB962C8B-B14F-4D97-AF65-F5344CB8AC3E}">
-        <p14:creationId xmlns:p14="http://schemas.microsoft.com/office/powerpoint/2010/main" val="629340000"/>
+        <p14:creationId xmlns:p14="http://schemas.microsoft.com/office/powerpoint/2010/main" val="2114333571"/>
       </p:ext>
     </p:extLst>
   </p:cSld>
@@ -10522,7 +10522,7 @@
           <p:nvPr/>
         </p:nvPicPr>
         <p:blipFill>
-          <a:blip xmlns:r="http://schemas.openxmlformats.org/officeDocument/2006/relationships" xmlns:a="http://schemas.openxmlformats.org/drawingml/2006/main" r:embed="Rc0cd461b69b949b5"/>
+          <a:blip xmlns:r="http://schemas.openxmlformats.org/officeDocument/2006/relationships" xmlns:a="http://schemas.openxmlformats.org/drawingml/2006/main" r:embed="R6dcf454d76cb40c1"/>
           <a:srcRect xmlns:a="http://schemas.openxmlformats.org/drawingml/2006/main" l="0" t="0" r="0" b="0"/>
           <a:stretch xmlns:a="http://schemas.openxmlformats.org/drawingml/2006/main">
             <a:fillRect l="0" t="0" r="0" b="0"/>
@@ -10543,7 +10543,7 @@
           <p:cNvPr id="2" name="">
             <a:extLst xmlns:a="http://schemas.openxmlformats.org/drawingml/2006/main">
               <a:ext uri="{FF2B5EF4-FFF2-40B4-BE49-F238E27FC236}">
-                <a16:creationId xmlns:a16="http://schemas.microsoft.com/office/drawing/2014/main" id="{3DBCD9E8-4745-4BD8-9841-8FDCDF38C85A}"/>
+                <a16:creationId xmlns:a16="http://schemas.microsoft.com/office/drawing/2014/main" id="{41C437D3-1CD8-40AF-BD7D-E50B21D8212B}"/>
               </a:ext>
             </a:extLst>
           </p:cNvPr>
@@ -10605,7 +10605,7 @@
           <p:cNvPr id="3" name="">
             <a:extLst xmlns:a="http://schemas.openxmlformats.org/drawingml/2006/main">
               <a:ext uri="{FF2B5EF4-FFF2-40B4-BE49-F238E27FC236}">
-                <a16:creationId xmlns:a16="http://schemas.microsoft.com/office/drawing/2014/main" id="{88FEDDE3-0E0E-4166-999C-BF6F1BCEEBBF}"/>
+                <a16:creationId xmlns:a16="http://schemas.microsoft.com/office/drawing/2014/main" id="{52201E92-A741-4112-9ED4-27C2D847490C}"/>
               </a:ext>
             </a:extLst>
           </p:cNvPr>
@@ -10667,7 +10667,7 @@
           <p:cNvPr id="4" name="">
             <a:extLst xmlns:a="http://schemas.openxmlformats.org/drawingml/2006/main">
               <a:ext uri="{FF2B5EF4-FFF2-40B4-BE49-F238E27FC236}">
-                <a16:creationId xmlns:a16="http://schemas.microsoft.com/office/drawing/2014/main" id="{58F192DE-0967-4050-951D-339F77327ED9}"/>
+                <a16:creationId xmlns:a16="http://schemas.microsoft.com/office/drawing/2014/main" id="{D4A7727D-D1D6-4BD6-BF40-016BD8315D45}"/>
               </a:ext>
             </a:extLst>
           </p:cNvPr>
@@ -10729,7 +10729,7 @@
           <p:cNvPr id="5" name="">
             <a:extLst xmlns:a="http://schemas.openxmlformats.org/drawingml/2006/main">
               <a:ext uri="{FF2B5EF4-FFF2-40B4-BE49-F238E27FC236}">
-                <a16:creationId xmlns:a16="http://schemas.microsoft.com/office/drawing/2014/main" id="{D7981D4C-9D5C-4F72-82A2-F465C2C1A320}"/>
+                <a16:creationId xmlns:a16="http://schemas.microsoft.com/office/drawing/2014/main" id="{913CB2AC-AFDA-462F-B863-6D9321600253}"/>
               </a:ext>
             </a:extLst>
           </p:cNvPr>
@@ -10760,7 +10760,7 @@
           <p:cNvPr id="6" name="">
             <a:extLst xmlns:a="http://schemas.openxmlformats.org/drawingml/2006/main">
               <a:ext uri="{FF2B5EF4-FFF2-40B4-BE49-F238E27FC236}">
-                <a16:creationId xmlns:a16="http://schemas.microsoft.com/office/drawing/2014/main" id="{16D50412-53A4-4DF7-A760-818C73E2DF62}"/>
+                <a16:creationId xmlns:a16="http://schemas.microsoft.com/office/drawing/2014/main" id="{A21A10EC-ED6C-476F-9594-D67BC8BB88A7}"/>
               </a:ext>
             </a:extLst>
           </p:cNvPr>
@@ -10822,7 +10822,7 @@
           <p:cNvPr id="7" name="">
             <a:extLst xmlns:a="http://schemas.openxmlformats.org/drawingml/2006/main">
               <a:ext uri="{FF2B5EF4-FFF2-40B4-BE49-F238E27FC236}">
-                <a16:creationId xmlns:a16="http://schemas.microsoft.com/office/drawing/2014/main" id="{F276DB69-20A5-49C8-8626-6BD5EFF711AB}"/>
+                <a16:creationId xmlns:a16="http://schemas.microsoft.com/office/drawing/2014/main" id="{36669FDC-5E63-4424-BAD1-9C463168DB24}"/>
               </a:ext>
             </a:extLst>
           </p:cNvPr>
@@ -10855,7 +10855,7 @@
           <p:cNvPr id="8" name="">
             <a:extLst xmlns:a="http://schemas.openxmlformats.org/drawingml/2006/main">
               <a:ext uri="{FF2B5EF4-FFF2-40B4-BE49-F238E27FC236}">
-                <a16:creationId xmlns:a16="http://schemas.microsoft.com/office/drawing/2014/main" id="{EB416B44-96F4-4EE2-BBCF-5140CCDAD87D}"/>
+                <a16:creationId xmlns:a16="http://schemas.microsoft.com/office/drawing/2014/main" id="{038CF96E-1AB5-4D30-ACB2-E72BEA15834A}"/>
               </a:ext>
             </a:extLst>
           </p:cNvPr>
@@ -10890,7 +10890,7 @@
           <p:cNvPr id="9" name="">
             <a:extLst xmlns:a="http://schemas.openxmlformats.org/drawingml/2006/main">
               <a:ext uri="{FF2B5EF4-FFF2-40B4-BE49-F238E27FC236}">
-                <a16:creationId xmlns:a16="http://schemas.microsoft.com/office/drawing/2014/main" id="{6652CFD5-98B8-4459-99E5-7A38EE6BF4C1}"/>
+                <a16:creationId xmlns:a16="http://schemas.microsoft.com/office/drawing/2014/main" id="{A7559876-731A-479E-A71E-E401FF9663F4}"/>
               </a:ext>
             </a:extLst>
           </p:cNvPr>
@@ -10921,7 +10921,7 @@
           <p:cNvPr id="10" name="">
             <a:extLst xmlns:a="http://schemas.openxmlformats.org/drawingml/2006/main">
               <a:ext uri="{FF2B5EF4-FFF2-40B4-BE49-F238E27FC236}">
-                <a16:creationId xmlns:a16="http://schemas.microsoft.com/office/drawing/2014/main" id="{AE3C85E3-9232-4533-AE69-F4B9B85DF426}"/>
+                <a16:creationId xmlns:a16="http://schemas.microsoft.com/office/drawing/2014/main" id="{4FF5AB7F-E9DC-4757-BEA0-F213BE48DB8E}"/>
               </a:ext>
             </a:extLst>
           </p:cNvPr>
@@ -10983,7 +10983,7 @@
           <p:cNvPr id="11" name="">
             <a:extLst xmlns:a="http://schemas.openxmlformats.org/drawingml/2006/main">
               <a:ext uri="{FF2B5EF4-FFF2-40B4-BE49-F238E27FC236}">
-                <a16:creationId xmlns:a16="http://schemas.microsoft.com/office/drawing/2014/main" id="{7F690BE4-6FC3-423F-9CC2-5B731707E149}"/>
+                <a16:creationId xmlns:a16="http://schemas.microsoft.com/office/drawing/2014/main" id="{D108D0C9-0B7A-4EC2-B9DC-6C0D07FA7802}"/>
               </a:ext>
             </a:extLst>
           </p:cNvPr>
@@ -11045,7 +11045,7 @@
           <p:cNvPr id="12" name="">
             <a:extLst xmlns:a="http://schemas.openxmlformats.org/drawingml/2006/main">
               <a:ext uri="{FF2B5EF4-FFF2-40B4-BE49-F238E27FC236}">
-                <a16:creationId xmlns:a16="http://schemas.microsoft.com/office/drawing/2014/main" id="{3B25BA5C-4AAF-435B-A391-497BEBF9A2C2}"/>
+                <a16:creationId xmlns:a16="http://schemas.microsoft.com/office/drawing/2014/main" id="{F22099FB-AB0C-4D20-BDC1-2487DBA3B8F1}"/>
               </a:ext>
             </a:extLst>
           </p:cNvPr>
@@ -11107,7 +11107,7 @@
           <p:cNvPr id="13" name="">
             <a:extLst xmlns:a="http://schemas.openxmlformats.org/drawingml/2006/main">
               <a:ext uri="{FF2B5EF4-FFF2-40B4-BE49-F238E27FC236}">
-                <a16:creationId xmlns:a16="http://schemas.microsoft.com/office/drawing/2014/main" id="{9897D202-005A-493F-B423-22823920A414}"/>
+                <a16:creationId xmlns:a16="http://schemas.microsoft.com/office/drawing/2014/main" id="{005C102B-EC37-4BB5-B8E6-8A4F3B9A102A}"/>
               </a:ext>
             </a:extLst>
           </p:cNvPr>
@@ -11167,7 +11167,7 @@
     </p:spTree>
     <p:extLst>
       <p:ext uri="{BB962C8B-B14F-4D97-AF65-F5344CB8AC3E}">
-        <p14:creationId xmlns:p14="http://schemas.microsoft.com/office/powerpoint/2010/main" val="260367149"/>
+        <p14:creationId xmlns:p14="http://schemas.microsoft.com/office/powerpoint/2010/main" val="1077540373"/>
       </p:ext>
     </p:extLst>
   </p:cSld>
@@ -11195,7 +11195,7 @@
           <p:nvPr/>
         </p:nvPicPr>
         <p:blipFill>
-          <a:blip xmlns:r="http://schemas.openxmlformats.org/officeDocument/2006/relationships" xmlns:a="http://schemas.openxmlformats.org/drawingml/2006/main" r:embed="R4e4a35332e2e4602"/>
+          <a:blip xmlns:r="http://schemas.openxmlformats.org/officeDocument/2006/relationships" xmlns:a="http://schemas.openxmlformats.org/drawingml/2006/main" r:embed="Rcd0d54c24cdb43a2"/>
           <a:srcRect xmlns:a="http://schemas.openxmlformats.org/drawingml/2006/main" l="0" t="0" r="0" b="0"/>
           <a:stretch xmlns:a="http://schemas.openxmlformats.org/drawingml/2006/main">
             <a:fillRect l="0" t="0" r="0" b="0"/>
@@ -11216,7 +11216,7 @@
           <p:cNvPr id="2" name="">
             <a:extLst xmlns:a="http://schemas.openxmlformats.org/drawingml/2006/main">
               <a:ext uri="{FF2B5EF4-FFF2-40B4-BE49-F238E27FC236}">
-                <a16:creationId xmlns:a16="http://schemas.microsoft.com/office/drawing/2014/main" id="{DFF529FC-10C5-461E-9FF6-3D6662A201C6}"/>
+                <a16:creationId xmlns:a16="http://schemas.microsoft.com/office/drawing/2014/main" id="{745148E3-E4DF-4440-B867-CABAC595C57D}"/>
               </a:ext>
             </a:extLst>
           </p:cNvPr>
@@ -11278,7 +11278,7 @@
           <p:cNvPr id="3" name="">
             <a:extLst xmlns:a="http://schemas.openxmlformats.org/drawingml/2006/main">
               <a:ext uri="{FF2B5EF4-FFF2-40B4-BE49-F238E27FC236}">
-                <a16:creationId xmlns:a16="http://schemas.microsoft.com/office/drawing/2014/main" id="{6EB0FD55-E6D4-4C82-A10A-05BC82D3D076}"/>
+                <a16:creationId xmlns:a16="http://schemas.microsoft.com/office/drawing/2014/main" id="{719FC61E-AD43-489D-9D1A-50DE5BD75BDC}"/>
               </a:ext>
             </a:extLst>
           </p:cNvPr>
@@ -11340,7 +11340,7 @@
           <p:cNvPr id="4" name="">
             <a:extLst xmlns:a="http://schemas.openxmlformats.org/drawingml/2006/main">
               <a:ext uri="{FF2B5EF4-FFF2-40B4-BE49-F238E27FC236}">
-                <a16:creationId xmlns:a16="http://schemas.microsoft.com/office/drawing/2014/main" id="{07BAF57B-D6F8-4186-9379-43BE0FBEEA22}"/>
+                <a16:creationId xmlns:a16="http://schemas.microsoft.com/office/drawing/2014/main" id="{03135293-2A4B-4E86-9B57-6BAC01D925D8}"/>
               </a:ext>
             </a:extLst>
           </p:cNvPr>
@@ -11402,7 +11402,7 @@
           <p:cNvPr id="5" name="">
             <a:extLst xmlns:a="http://schemas.openxmlformats.org/drawingml/2006/main">
               <a:ext uri="{FF2B5EF4-FFF2-40B4-BE49-F238E27FC236}">
-                <a16:creationId xmlns:a16="http://schemas.microsoft.com/office/drawing/2014/main" id="{9C0F63A0-2264-4DD8-BE73-896B9C2925E7}"/>
+                <a16:creationId xmlns:a16="http://schemas.microsoft.com/office/drawing/2014/main" id="{77D214DA-7510-4FD1-B0F6-255FEA2D0E4B}"/>
               </a:ext>
             </a:extLst>
           </p:cNvPr>
@@ -11433,7 +11433,7 @@
           <p:cNvPr id="6" name="">
             <a:extLst xmlns:a="http://schemas.openxmlformats.org/drawingml/2006/main">
               <a:ext uri="{FF2B5EF4-FFF2-40B4-BE49-F238E27FC236}">
-                <a16:creationId xmlns:a16="http://schemas.microsoft.com/office/drawing/2014/main" id="{C0A64C83-7F2A-4D22-8557-4011E1C33AF0}"/>
+                <a16:creationId xmlns:a16="http://schemas.microsoft.com/office/drawing/2014/main" id="{D27161E3-AA26-4BB0-A76C-CE1A92DC3749}"/>
               </a:ext>
             </a:extLst>
           </p:cNvPr>
@@ -11495,7 +11495,7 @@
           <p:cNvPr id="7" name="">
             <a:extLst xmlns:a="http://schemas.openxmlformats.org/drawingml/2006/main">
               <a:ext uri="{FF2B5EF4-FFF2-40B4-BE49-F238E27FC236}">
-                <a16:creationId xmlns:a16="http://schemas.microsoft.com/office/drawing/2014/main" id="{8D940FAC-9FCE-4E0D-8FF1-C1BE2F747D8E}"/>
+                <a16:creationId xmlns:a16="http://schemas.microsoft.com/office/drawing/2014/main" id="{0CEDA736-83A7-4EB6-93B7-4D8F6A13C736}"/>
               </a:ext>
             </a:extLst>
           </p:cNvPr>
@@ -11528,7 +11528,7 @@
           <p:cNvPr id="8" name="">
             <a:extLst xmlns:a="http://schemas.openxmlformats.org/drawingml/2006/main">
               <a:ext uri="{FF2B5EF4-FFF2-40B4-BE49-F238E27FC236}">
-                <a16:creationId xmlns:a16="http://schemas.microsoft.com/office/drawing/2014/main" id="{8DBE7768-4E4E-4B8F-A741-55FB9C085CE4}"/>
+                <a16:creationId xmlns:a16="http://schemas.microsoft.com/office/drawing/2014/main" id="{14F25499-A68A-43D2-8790-336E143F345D}"/>
               </a:ext>
             </a:extLst>
           </p:cNvPr>
@@ -11563,7 +11563,7 @@
           <p:cNvPr id="9" name="">
             <a:extLst xmlns:a="http://schemas.openxmlformats.org/drawingml/2006/main">
               <a:ext uri="{FF2B5EF4-FFF2-40B4-BE49-F238E27FC236}">
-                <a16:creationId xmlns:a16="http://schemas.microsoft.com/office/drawing/2014/main" id="{D93D9D08-3BF2-4911-B14C-975BE19B569D}"/>
+                <a16:creationId xmlns:a16="http://schemas.microsoft.com/office/drawing/2014/main" id="{E5F18551-A784-4561-AA4E-A11C9B002B7B}"/>
               </a:ext>
             </a:extLst>
           </p:cNvPr>
@@ -11594,7 +11594,7 @@
           <p:cNvPr id="10" name="">
             <a:extLst xmlns:a="http://schemas.openxmlformats.org/drawingml/2006/main">
               <a:ext uri="{FF2B5EF4-FFF2-40B4-BE49-F238E27FC236}">
-                <a16:creationId xmlns:a16="http://schemas.microsoft.com/office/drawing/2014/main" id="{6619A0D7-09EB-44DF-91AD-1F8C6C3EAC67}"/>
+                <a16:creationId xmlns:a16="http://schemas.microsoft.com/office/drawing/2014/main" id="{08FA8F87-C655-453A-BBE2-043A2EDD5D5A}"/>
               </a:ext>
             </a:extLst>
           </p:cNvPr>
@@ -11656,7 +11656,7 @@
           <p:cNvPr id="11" name="">
             <a:extLst xmlns:a="http://schemas.openxmlformats.org/drawingml/2006/main">
               <a:ext uri="{FF2B5EF4-FFF2-40B4-BE49-F238E27FC236}">
-                <a16:creationId xmlns:a16="http://schemas.microsoft.com/office/drawing/2014/main" id="{CE115B3C-DF16-41DC-824A-ECD3D2674B43}"/>
+                <a16:creationId xmlns:a16="http://schemas.microsoft.com/office/drawing/2014/main" id="{8BC9EC65-40FC-45E1-BC55-B56F466A8D1A}"/>
               </a:ext>
             </a:extLst>
           </p:cNvPr>
@@ -11718,7 +11718,7 @@
           <p:cNvPr id="12" name="">
             <a:extLst xmlns:a="http://schemas.openxmlformats.org/drawingml/2006/main">
               <a:ext uri="{FF2B5EF4-FFF2-40B4-BE49-F238E27FC236}">
-                <a16:creationId xmlns:a16="http://schemas.microsoft.com/office/drawing/2014/main" id="{27E17776-F3D7-47F9-BA9E-04F9F3CC5EF8}"/>
+                <a16:creationId xmlns:a16="http://schemas.microsoft.com/office/drawing/2014/main" id="{E6744364-E9AF-4193-8EEF-21998993E7E6}"/>
               </a:ext>
             </a:extLst>
           </p:cNvPr>
@@ -11780,7 +11780,7 @@
           <p:cNvPr id="13" name="">
             <a:extLst xmlns:a="http://schemas.openxmlformats.org/drawingml/2006/main">
               <a:ext uri="{FF2B5EF4-FFF2-40B4-BE49-F238E27FC236}">
-                <a16:creationId xmlns:a16="http://schemas.microsoft.com/office/drawing/2014/main" id="{4758BD36-F385-4D31-BA05-FD5C4179DFE2}"/>
+                <a16:creationId xmlns:a16="http://schemas.microsoft.com/office/drawing/2014/main" id="{D06E0490-E590-4F24-8F2D-3197D7FAA540}"/>
               </a:ext>
             </a:extLst>
           </p:cNvPr>
@@ -11813,7 +11813,7 @@
           <p:cNvPr id="14" name="">
             <a:extLst xmlns:a="http://schemas.openxmlformats.org/drawingml/2006/main">
               <a:ext uri="{FF2B5EF4-FFF2-40B4-BE49-F238E27FC236}">
-                <a16:creationId xmlns:a16="http://schemas.microsoft.com/office/drawing/2014/main" id="{954A0555-33FB-4F2D-AAA0-D1A84A790DFE}"/>
+                <a16:creationId xmlns:a16="http://schemas.microsoft.com/office/drawing/2014/main" id="{A52EA64B-4018-4C3D-8752-159477E0AA79}"/>
               </a:ext>
             </a:extLst>
           </p:cNvPr>
@@ -11848,7 +11848,7 @@
           <p:cNvPr id="15" name="">
             <a:extLst xmlns:a="http://schemas.openxmlformats.org/drawingml/2006/main">
               <a:ext uri="{FF2B5EF4-FFF2-40B4-BE49-F238E27FC236}">
-                <a16:creationId xmlns:a16="http://schemas.microsoft.com/office/drawing/2014/main" id="{57E597B7-D632-40F1-B753-377B2E3DA349}"/>
+                <a16:creationId xmlns:a16="http://schemas.microsoft.com/office/drawing/2014/main" id="{F7A724A0-9657-43C4-AF7F-C05A2183AEFC}"/>
               </a:ext>
             </a:extLst>
           </p:cNvPr>
@@ -11879,7 +11879,7 @@
           <p:cNvPr id="16" name="">
             <a:extLst xmlns:a="http://schemas.openxmlformats.org/drawingml/2006/main">
               <a:ext uri="{FF2B5EF4-FFF2-40B4-BE49-F238E27FC236}">
-                <a16:creationId xmlns:a16="http://schemas.microsoft.com/office/drawing/2014/main" id="{D6CF95F1-7FF8-4F68-A0C8-6C4189A9EC13}"/>
+                <a16:creationId xmlns:a16="http://schemas.microsoft.com/office/drawing/2014/main" id="{943BEDCC-9615-49BE-BD73-605D76E4C857}"/>
               </a:ext>
             </a:extLst>
           </p:cNvPr>
@@ -11941,7 +11941,7 @@
           <p:cNvPr id="17" name="">
             <a:extLst xmlns:a="http://schemas.openxmlformats.org/drawingml/2006/main">
               <a:ext uri="{FF2B5EF4-FFF2-40B4-BE49-F238E27FC236}">
-                <a16:creationId xmlns:a16="http://schemas.microsoft.com/office/drawing/2014/main" id="{6D00780D-F4E3-4A01-87B7-7F419D2989A4}"/>
+                <a16:creationId xmlns:a16="http://schemas.microsoft.com/office/drawing/2014/main" id="{C58BDDC8-CE37-4583-B1EA-D0FB12628D5B}"/>
               </a:ext>
             </a:extLst>
           </p:cNvPr>
@@ -12003,7 +12003,7 @@
           <p:cNvPr id="18" name="">
             <a:extLst xmlns:a="http://schemas.openxmlformats.org/drawingml/2006/main">
               <a:ext uri="{FF2B5EF4-FFF2-40B4-BE49-F238E27FC236}">
-                <a16:creationId xmlns:a16="http://schemas.microsoft.com/office/drawing/2014/main" id="{56A0C67B-E316-40EB-BF7A-8D0BF9AB820F}"/>
+                <a16:creationId xmlns:a16="http://schemas.microsoft.com/office/drawing/2014/main" id="{BBD35423-F11A-4B59-A748-745F665CEFD4}"/>
               </a:ext>
             </a:extLst>
           </p:cNvPr>
@@ -12065,7 +12065,7 @@
           <p:cNvPr id="19" name="">
             <a:extLst xmlns:a="http://schemas.openxmlformats.org/drawingml/2006/main">
               <a:ext uri="{FF2B5EF4-FFF2-40B4-BE49-F238E27FC236}">
-                <a16:creationId xmlns:a16="http://schemas.microsoft.com/office/drawing/2014/main" id="{50C3502C-5763-402B-840D-67008202A23B}"/>
+                <a16:creationId xmlns:a16="http://schemas.microsoft.com/office/drawing/2014/main" id="{5FC48ABA-7F94-4D0D-BEEB-B9485B1476C7}"/>
               </a:ext>
             </a:extLst>
           </p:cNvPr>
@@ -12098,7 +12098,7 @@
           <p:cNvPr id="20" name="">
             <a:extLst xmlns:a="http://schemas.openxmlformats.org/drawingml/2006/main">
               <a:ext uri="{FF2B5EF4-FFF2-40B4-BE49-F238E27FC236}">
-                <a16:creationId xmlns:a16="http://schemas.microsoft.com/office/drawing/2014/main" id="{3E2BF210-24FF-4552-B5EF-FBACAAB18CC2}"/>
+                <a16:creationId xmlns:a16="http://schemas.microsoft.com/office/drawing/2014/main" id="{6FD8F826-7D5C-4116-8F0F-9DFFA643DB4E}"/>
               </a:ext>
             </a:extLst>
           </p:cNvPr>
@@ -12133,7 +12133,7 @@
           <p:cNvPr id="21" name="">
             <a:extLst xmlns:a="http://schemas.openxmlformats.org/drawingml/2006/main">
               <a:ext uri="{FF2B5EF4-FFF2-40B4-BE49-F238E27FC236}">
-                <a16:creationId xmlns:a16="http://schemas.microsoft.com/office/drawing/2014/main" id="{11742545-4221-4351-9AD2-613664BED671}"/>
+                <a16:creationId xmlns:a16="http://schemas.microsoft.com/office/drawing/2014/main" id="{FBE55CD1-A4D3-4BA9-858E-F77A2C554AF8}"/>
               </a:ext>
             </a:extLst>
           </p:cNvPr>
@@ -12164,7 +12164,7 @@
           <p:cNvPr id="22" name="">
             <a:extLst xmlns:a="http://schemas.openxmlformats.org/drawingml/2006/main">
               <a:ext uri="{FF2B5EF4-FFF2-40B4-BE49-F238E27FC236}">
-                <a16:creationId xmlns:a16="http://schemas.microsoft.com/office/drawing/2014/main" id="{5B63AA79-C593-4519-B402-AEA3482A5533}"/>
+                <a16:creationId xmlns:a16="http://schemas.microsoft.com/office/drawing/2014/main" id="{0890E713-F990-409D-B37C-F4409A697B7D}"/>
               </a:ext>
             </a:extLst>
           </p:cNvPr>
@@ -12226,7 +12226,7 @@
           <p:cNvPr id="23" name="">
             <a:extLst xmlns:a="http://schemas.openxmlformats.org/drawingml/2006/main">
               <a:ext uri="{FF2B5EF4-FFF2-40B4-BE49-F238E27FC236}">
-                <a16:creationId xmlns:a16="http://schemas.microsoft.com/office/drawing/2014/main" id="{C1E97F31-0CD4-47F4-9A77-A6F6E2C8282C}"/>
+                <a16:creationId xmlns:a16="http://schemas.microsoft.com/office/drawing/2014/main" id="{4FFB8F87-8175-492D-B5CC-C0088CF0B8FD}"/>
               </a:ext>
             </a:extLst>
           </p:cNvPr>
@@ -12288,7 +12288,7 @@
           <p:cNvPr id="24" name="">
             <a:extLst xmlns:a="http://schemas.openxmlformats.org/drawingml/2006/main">
               <a:ext uri="{FF2B5EF4-FFF2-40B4-BE49-F238E27FC236}">
-                <a16:creationId xmlns:a16="http://schemas.microsoft.com/office/drawing/2014/main" id="{A5A8314E-8B4E-40EA-91D1-BD4E266CBB6C}"/>
+                <a16:creationId xmlns:a16="http://schemas.microsoft.com/office/drawing/2014/main" id="{2A32403D-D2D8-435B-B78D-C2858B857974}"/>
               </a:ext>
             </a:extLst>
           </p:cNvPr>
@@ -12350,7 +12350,7 @@
           <p:cNvPr id="25" name="">
             <a:extLst xmlns:a="http://schemas.openxmlformats.org/drawingml/2006/main">
               <a:ext uri="{FF2B5EF4-FFF2-40B4-BE49-F238E27FC236}">
-                <a16:creationId xmlns:a16="http://schemas.microsoft.com/office/drawing/2014/main" id="{B13C0448-0283-4369-94BA-74272BA01308}"/>
+                <a16:creationId xmlns:a16="http://schemas.microsoft.com/office/drawing/2014/main" id="{D9B68EFD-CDC7-494B-968D-FAEAC52A4BDC}"/>
               </a:ext>
             </a:extLst>
           </p:cNvPr>
@@ -12383,7 +12383,7 @@
           <p:cNvPr id="26" name="">
             <a:extLst xmlns:a="http://schemas.openxmlformats.org/drawingml/2006/main">
               <a:ext uri="{FF2B5EF4-FFF2-40B4-BE49-F238E27FC236}">
-                <a16:creationId xmlns:a16="http://schemas.microsoft.com/office/drawing/2014/main" id="{6A3EBEB6-D425-43B7-A138-1933EBEE924E}"/>
+                <a16:creationId xmlns:a16="http://schemas.microsoft.com/office/drawing/2014/main" id="{AD1FBE51-9E14-47EC-998F-0B9455725C71}"/>
               </a:ext>
             </a:extLst>
           </p:cNvPr>
@@ -12418,7 +12418,7 @@
           <p:cNvPr id="27" name="">
             <a:extLst xmlns:a="http://schemas.openxmlformats.org/drawingml/2006/main">
               <a:ext uri="{FF2B5EF4-FFF2-40B4-BE49-F238E27FC236}">
-                <a16:creationId xmlns:a16="http://schemas.microsoft.com/office/drawing/2014/main" id="{A6977EE3-D34A-4383-A349-485B49CB1042}"/>
+                <a16:creationId xmlns:a16="http://schemas.microsoft.com/office/drawing/2014/main" id="{3BE036A7-71FE-4BEE-842B-01AFAA264E0D}"/>
               </a:ext>
             </a:extLst>
           </p:cNvPr>
@@ -12449,7 +12449,7 @@
           <p:cNvPr id="28" name="">
             <a:extLst xmlns:a="http://schemas.openxmlformats.org/drawingml/2006/main">
               <a:ext uri="{FF2B5EF4-FFF2-40B4-BE49-F238E27FC236}">
-                <a16:creationId xmlns:a16="http://schemas.microsoft.com/office/drawing/2014/main" id="{D593685B-AF9D-4321-AC4F-DAC11C60C785}"/>
+                <a16:creationId xmlns:a16="http://schemas.microsoft.com/office/drawing/2014/main" id="{8AE79C74-8A88-41CC-8000-C9687F99FCA7}"/>
               </a:ext>
             </a:extLst>
           </p:cNvPr>
@@ -12511,7 +12511,7 @@
           <p:cNvPr id="29" name="">
             <a:extLst xmlns:a="http://schemas.openxmlformats.org/drawingml/2006/main">
               <a:ext uri="{FF2B5EF4-FFF2-40B4-BE49-F238E27FC236}">
-                <a16:creationId xmlns:a16="http://schemas.microsoft.com/office/drawing/2014/main" id="{D69A41D0-69EE-4484-942F-DD421D84D483}"/>
+                <a16:creationId xmlns:a16="http://schemas.microsoft.com/office/drawing/2014/main" id="{7F51EC68-A82A-4DB8-AC08-957F8197BECB}"/>
               </a:ext>
             </a:extLst>
           </p:cNvPr>
@@ -12573,7 +12573,7 @@
           <p:cNvPr id="30" name="">
             <a:extLst xmlns:a="http://schemas.openxmlformats.org/drawingml/2006/main">
               <a:ext uri="{FF2B5EF4-FFF2-40B4-BE49-F238E27FC236}">
-                <a16:creationId xmlns:a16="http://schemas.microsoft.com/office/drawing/2014/main" id="{76F40B10-B711-4766-BCFA-F177710485E9}"/>
+                <a16:creationId xmlns:a16="http://schemas.microsoft.com/office/drawing/2014/main" id="{530D80D3-6437-42E2-A0FD-4165374F792D}"/>
               </a:ext>
             </a:extLst>
           </p:cNvPr>
@@ -12635,7 +12635,7 @@
           <p:cNvPr id="31" name="">
             <a:extLst xmlns:a="http://schemas.openxmlformats.org/drawingml/2006/main">
               <a:ext uri="{FF2B5EF4-FFF2-40B4-BE49-F238E27FC236}">
-                <a16:creationId xmlns:a16="http://schemas.microsoft.com/office/drawing/2014/main" id="{BCE4BB5C-F7D0-4BC9-A489-E2C661D8C921}"/>
+                <a16:creationId xmlns:a16="http://schemas.microsoft.com/office/drawing/2014/main" id="{91880E3C-E0AC-428E-8AA0-861C349C8079}"/>
               </a:ext>
             </a:extLst>
           </p:cNvPr>
@@ -12668,7 +12668,7 @@
           <p:cNvPr id="32" name="">
             <a:extLst xmlns:a="http://schemas.openxmlformats.org/drawingml/2006/main">
               <a:ext uri="{FF2B5EF4-FFF2-40B4-BE49-F238E27FC236}">
-                <a16:creationId xmlns:a16="http://schemas.microsoft.com/office/drawing/2014/main" id="{3EB417F0-AD90-47CF-AE23-9B7A31A93BE2}"/>
+                <a16:creationId xmlns:a16="http://schemas.microsoft.com/office/drawing/2014/main" id="{840EBFB7-A272-419F-B479-DD863EE32BB4}"/>
               </a:ext>
             </a:extLst>
           </p:cNvPr>
@@ -12703,7 +12703,7 @@
           <p:cNvPr id="33" name="">
             <a:extLst xmlns:a="http://schemas.openxmlformats.org/drawingml/2006/main">
               <a:ext uri="{FF2B5EF4-FFF2-40B4-BE49-F238E27FC236}">
-                <a16:creationId xmlns:a16="http://schemas.microsoft.com/office/drawing/2014/main" id="{B427DBD8-E229-4A66-A417-695CD352B723}"/>
+                <a16:creationId xmlns:a16="http://schemas.microsoft.com/office/drawing/2014/main" id="{A2C4F41E-BECA-4F5E-BA01-E198BFCEFF2F}"/>
               </a:ext>
             </a:extLst>
           </p:cNvPr>
@@ -12734,7 +12734,7 @@
           <p:cNvPr id="34" name="">
             <a:extLst xmlns:a="http://schemas.openxmlformats.org/drawingml/2006/main">
               <a:ext uri="{FF2B5EF4-FFF2-40B4-BE49-F238E27FC236}">
-                <a16:creationId xmlns:a16="http://schemas.microsoft.com/office/drawing/2014/main" id="{7E2BA040-5F1A-47B1-8A5E-F7521B9779D6}"/>
+                <a16:creationId xmlns:a16="http://schemas.microsoft.com/office/drawing/2014/main" id="{047659C2-FFF4-42F9-9118-6AA508011D13}"/>
               </a:ext>
             </a:extLst>
           </p:cNvPr>
@@ -12796,7 +12796,7 @@
           <p:cNvPr id="35" name="">
             <a:extLst xmlns:a="http://schemas.openxmlformats.org/drawingml/2006/main">
               <a:ext uri="{FF2B5EF4-FFF2-40B4-BE49-F238E27FC236}">
-                <a16:creationId xmlns:a16="http://schemas.microsoft.com/office/drawing/2014/main" id="{DB9D0A6C-8028-43D8-88B7-096EFFCC08A8}"/>
+                <a16:creationId xmlns:a16="http://schemas.microsoft.com/office/drawing/2014/main" id="{8E939C62-6A9E-41FB-8A38-2EA7CF725B11}"/>
               </a:ext>
             </a:extLst>
           </p:cNvPr>
@@ -12858,7 +12858,7 @@
           <p:cNvPr id="36" name="">
             <a:extLst xmlns:a="http://schemas.openxmlformats.org/drawingml/2006/main">
               <a:ext uri="{FF2B5EF4-FFF2-40B4-BE49-F238E27FC236}">
-                <a16:creationId xmlns:a16="http://schemas.microsoft.com/office/drawing/2014/main" id="{0C901953-D6CA-4120-B491-87DFEB7D1E5E}"/>
+                <a16:creationId xmlns:a16="http://schemas.microsoft.com/office/drawing/2014/main" id="{B92B5BE7-C8F2-4FA8-8379-B4B0D36A7DB9}"/>
               </a:ext>
             </a:extLst>
           </p:cNvPr>
@@ -12920,7 +12920,7 @@
           <p:cNvPr id="37" name="">
             <a:extLst xmlns:a="http://schemas.openxmlformats.org/drawingml/2006/main">
               <a:ext uri="{FF2B5EF4-FFF2-40B4-BE49-F238E27FC236}">
-                <a16:creationId xmlns:a16="http://schemas.microsoft.com/office/drawing/2014/main" id="{3FBC3469-F8A2-41D9-BF7A-C27885ED9B2C}"/>
+                <a16:creationId xmlns:a16="http://schemas.microsoft.com/office/drawing/2014/main" id="{6AC8F8CF-661C-4DD9-A537-927486FC2C3F}"/>
               </a:ext>
             </a:extLst>
           </p:cNvPr>
@@ -12982,7 +12982,7 @@
           <p:cNvPr id="38" name="">
             <a:extLst xmlns:a="http://schemas.openxmlformats.org/drawingml/2006/main">
               <a:ext uri="{FF2B5EF4-FFF2-40B4-BE49-F238E27FC236}">
-                <a16:creationId xmlns:a16="http://schemas.microsoft.com/office/drawing/2014/main" id="{BA79674F-7992-4955-9BF8-24C011108CF9}"/>
+                <a16:creationId xmlns:a16="http://schemas.microsoft.com/office/drawing/2014/main" id="{7C9152ED-D708-4A8A-9B88-B9D640D555E9}"/>
               </a:ext>
             </a:extLst>
           </p:cNvPr>
@@ -13042,7 +13042,7 @@
     </p:spTree>
     <p:extLst>
       <p:ext uri="{BB962C8B-B14F-4D97-AF65-F5344CB8AC3E}">
-        <p14:creationId xmlns:p14="http://schemas.microsoft.com/office/powerpoint/2010/main" val="39777667"/>
+        <p14:creationId xmlns:p14="http://schemas.microsoft.com/office/powerpoint/2010/main" val="1103993623"/>
       </p:ext>
     </p:extLst>
   </p:cSld>
@@ -13070,7 +13070,7 @@
           <p:nvPr/>
         </p:nvPicPr>
         <p:blipFill>
-          <a:blip xmlns:r="http://schemas.openxmlformats.org/officeDocument/2006/relationships" xmlns:a="http://schemas.openxmlformats.org/drawingml/2006/main" r:embed="R712af6f8f6ad4a2c"/>
+          <a:blip xmlns:r="http://schemas.openxmlformats.org/officeDocument/2006/relationships" xmlns:a="http://schemas.openxmlformats.org/drawingml/2006/main" r:embed="R59aaaffe270e40e4"/>
           <a:srcRect xmlns:a="http://schemas.openxmlformats.org/drawingml/2006/main" l="0" t="0" r="0" b="0"/>
           <a:stretch xmlns:a="http://schemas.openxmlformats.org/drawingml/2006/main">
             <a:fillRect l="0" t="0" r="0" b="0"/>
@@ -13091,7 +13091,7 @@
           <p:cNvPr id="2" name="">
             <a:extLst xmlns:a="http://schemas.openxmlformats.org/drawingml/2006/main">
               <a:ext uri="{FF2B5EF4-FFF2-40B4-BE49-F238E27FC236}">
-                <a16:creationId xmlns:a16="http://schemas.microsoft.com/office/drawing/2014/main" id="{A57D9D39-14C3-4A29-8AD4-2B3EA1CC861F}"/>
+                <a16:creationId xmlns:a16="http://schemas.microsoft.com/office/drawing/2014/main" id="{5C1C5378-BE74-4273-93F2-B21E643E3163}"/>
               </a:ext>
             </a:extLst>
           </p:cNvPr>
@@ -13153,7 +13153,7 @@
           <p:cNvPr id="3" name="">
             <a:extLst xmlns:a="http://schemas.openxmlformats.org/drawingml/2006/main">
               <a:ext uri="{FF2B5EF4-FFF2-40B4-BE49-F238E27FC236}">
-                <a16:creationId xmlns:a16="http://schemas.microsoft.com/office/drawing/2014/main" id="{27FE3836-CAC8-4BDD-8FA6-F515D386318E}"/>
+                <a16:creationId xmlns:a16="http://schemas.microsoft.com/office/drawing/2014/main" id="{625ECC6F-9BB0-4617-8E89-F99F7799FFF7}"/>
               </a:ext>
             </a:extLst>
           </p:cNvPr>
@@ -13215,7 +13215,7 @@
           <p:cNvPr id="4" name="">
             <a:extLst xmlns:a="http://schemas.openxmlformats.org/drawingml/2006/main">
               <a:ext uri="{FF2B5EF4-FFF2-40B4-BE49-F238E27FC236}">
-                <a16:creationId xmlns:a16="http://schemas.microsoft.com/office/drawing/2014/main" id="{B8FE52A7-2DF3-4A76-B8A1-A5BD222DCB40}"/>
+                <a16:creationId xmlns:a16="http://schemas.microsoft.com/office/drawing/2014/main" id="{ECD2E93D-4075-4F94-AF4C-1BC1B333A73B}"/>
               </a:ext>
             </a:extLst>
           </p:cNvPr>
@@ -13277,7 +13277,7 @@
           <p:cNvPr id="5" name="">
             <a:extLst xmlns:a="http://schemas.openxmlformats.org/drawingml/2006/main">
               <a:ext uri="{FF2B5EF4-FFF2-40B4-BE49-F238E27FC236}">
-                <a16:creationId xmlns:a16="http://schemas.microsoft.com/office/drawing/2014/main" id="{3288170F-1DD6-4379-97C0-86CA30BE0EC5}"/>
+                <a16:creationId xmlns:a16="http://schemas.microsoft.com/office/drawing/2014/main" id="{61902E78-9127-4AFB-ADAF-2639D3052DBF}"/>
               </a:ext>
             </a:extLst>
           </p:cNvPr>
@@ -13339,7 +13339,7 @@
           <p:cNvPr id="6" name="">
             <a:extLst xmlns:a="http://schemas.openxmlformats.org/drawingml/2006/main">
               <a:ext uri="{FF2B5EF4-FFF2-40B4-BE49-F238E27FC236}">
-                <a16:creationId xmlns:a16="http://schemas.microsoft.com/office/drawing/2014/main" id="{7E38FA3D-0F98-418F-95E7-D2CA443F118B}"/>
+                <a16:creationId xmlns:a16="http://schemas.microsoft.com/office/drawing/2014/main" id="{655A9446-1345-41A6-AB17-2E1086781C68}"/>
               </a:ext>
             </a:extLst>
           </p:cNvPr>
@@ -13399,7 +13399,7 @@
     </p:spTree>
     <p:extLst>
       <p:ext uri="{BB962C8B-B14F-4D97-AF65-F5344CB8AC3E}">
-        <p14:creationId xmlns:p14="http://schemas.microsoft.com/office/powerpoint/2010/main" val="1594121220"/>
+        <p14:creationId xmlns:p14="http://schemas.microsoft.com/office/powerpoint/2010/main" val="822392391"/>
       </p:ext>
     </p:extLst>
   </p:cSld>
@@ -13427,7 +13427,7 @@
           <p:nvPr/>
         </p:nvPicPr>
         <p:blipFill>
-          <a:blip xmlns:r="http://schemas.openxmlformats.org/officeDocument/2006/relationships" xmlns:a="http://schemas.openxmlformats.org/drawingml/2006/main" r:embed="R4a5b42d6aa61489d"/>
+          <a:blip xmlns:r="http://schemas.openxmlformats.org/officeDocument/2006/relationships" xmlns:a="http://schemas.openxmlformats.org/drawingml/2006/main" r:embed="Rdd660b04ecef4eaf"/>
           <a:srcRect xmlns:a="http://schemas.openxmlformats.org/drawingml/2006/main" l="0" t="0" r="0" b="0"/>
           <a:stretch xmlns:a="http://schemas.openxmlformats.org/drawingml/2006/main">
             <a:fillRect l="0" t="0" r="0" b="0"/>
@@ -13448,7 +13448,7 @@
           <p:cNvPr id="2" name="">
             <a:extLst xmlns:a="http://schemas.openxmlformats.org/drawingml/2006/main">
               <a:ext uri="{FF2B5EF4-FFF2-40B4-BE49-F238E27FC236}">
-                <a16:creationId xmlns:a16="http://schemas.microsoft.com/office/drawing/2014/main" id="{92AF8E26-9ECF-4975-B6D4-95E52AB99948}"/>
+                <a16:creationId xmlns:a16="http://schemas.microsoft.com/office/drawing/2014/main" id="{10B5C3D5-7556-4E52-A928-FF0A9A768E05}"/>
               </a:ext>
             </a:extLst>
           </p:cNvPr>
@@ -13510,7 +13510,7 @@
           <p:cNvPr id="3" name="">
             <a:extLst xmlns:a="http://schemas.openxmlformats.org/drawingml/2006/main">
               <a:ext uri="{FF2B5EF4-FFF2-40B4-BE49-F238E27FC236}">
-                <a16:creationId xmlns:a16="http://schemas.microsoft.com/office/drawing/2014/main" id="{94FEFEB6-4969-45CD-B679-86CDB0F8A9AF}"/>
+                <a16:creationId xmlns:a16="http://schemas.microsoft.com/office/drawing/2014/main" id="{31272242-79B3-4A4A-A6CD-A4188F9A1A66}"/>
               </a:ext>
             </a:extLst>
           </p:cNvPr>
@@ -13572,7 +13572,7 @@
           <p:cNvPr id="4" name="">
             <a:extLst xmlns:a="http://schemas.openxmlformats.org/drawingml/2006/main">
               <a:ext uri="{FF2B5EF4-FFF2-40B4-BE49-F238E27FC236}">
-                <a16:creationId xmlns:a16="http://schemas.microsoft.com/office/drawing/2014/main" id="{3EA43EFD-7AB3-41A4-8027-ACCDE59ADCF1}"/>
+                <a16:creationId xmlns:a16="http://schemas.microsoft.com/office/drawing/2014/main" id="{A62BB6AB-E0A9-42C0-AE95-0E2FC53A5F85}"/>
               </a:ext>
             </a:extLst>
           </p:cNvPr>
@@ -13634,7 +13634,7 @@
           <p:cNvPr id="5" name="">
             <a:extLst xmlns:a="http://schemas.openxmlformats.org/drawingml/2006/main">
               <a:ext uri="{FF2B5EF4-FFF2-40B4-BE49-F238E27FC236}">
-                <a16:creationId xmlns:a16="http://schemas.microsoft.com/office/drawing/2014/main" id="{235735B8-5B47-426C-A110-149816DFD2E7}"/>
+                <a16:creationId xmlns:a16="http://schemas.microsoft.com/office/drawing/2014/main" id="{EB3B80D8-098B-42A8-91C4-BE7CD2EE43A9}"/>
               </a:ext>
             </a:extLst>
           </p:cNvPr>
@@ -13665,7 +13665,7 @@
           <p:cNvPr id="6" name="">
             <a:extLst xmlns:a="http://schemas.openxmlformats.org/drawingml/2006/main">
               <a:ext uri="{FF2B5EF4-FFF2-40B4-BE49-F238E27FC236}">
-                <a16:creationId xmlns:a16="http://schemas.microsoft.com/office/drawing/2014/main" id="{B47D317C-8D49-48AF-A0E0-235ACC6068B9}"/>
+                <a16:creationId xmlns:a16="http://schemas.microsoft.com/office/drawing/2014/main" id="{0B54DA5D-7EC6-40D9-8AA5-607D1E39451C}"/>
               </a:ext>
             </a:extLst>
           </p:cNvPr>
@@ -13727,7 +13727,7 @@
           <p:cNvPr id="7" name="">
             <a:extLst xmlns:a="http://schemas.openxmlformats.org/drawingml/2006/main">
               <a:ext uri="{FF2B5EF4-FFF2-40B4-BE49-F238E27FC236}">
-                <a16:creationId xmlns:a16="http://schemas.microsoft.com/office/drawing/2014/main" id="{DD12A6E6-CCB5-4CDE-BA18-C7ABACB40B51}"/>
+                <a16:creationId xmlns:a16="http://schemas.microsoft.com/office/drawing/2014/main" id="{A5C45582-6DB8-473B-988B-02B0A96E2FF8}"/>
               </a:ext>
             </a:extLst>
           </p:cNvPr>
@@ -13760,7 +13760,7 @@
           <p:cNvPr id="8" name="">
             <a:extLst xmlns:a="http://schemas.openxmlformats.org/drawingml/2006/main">
               <a:ext uri="{FF2B5EF4-FFF2-40B4-BE49-F238E27FC236}">
-                <a16:creationId xmlns:a16="http://schemas.microsoft.com/office/drawing/2014/main" id="{8687566D-8ECA-4959-B416-98EB5772F872}"/>
+                <a16:creationId xmlns:a16="http://schemas.microsoft.com/office/drawing/2014/main" id="{D2E281AA-2DC3-47C7-B8EE-D05672321F5C}"/>
               </a:ext>
             </a:extLst>
           </p:cNvPr>
@@ -13795,7 +13795,7 @@
           <p:cNvPr id="9" name="">
             <a:extLst xmlns:a="http://schemas.openxmlformats.org/drawingml/2006/main">
               <a:ext uri="{FF2B5EF4-FFF2-40B4-BE49-F238E27FC236}">
-                <a16:creationId xmlns:a16="http://schemas.microsoft.com/office/drawing/2014/main" id="{C6F06A89-B1C8-4DD5-993F-C42F714FB5C9}"/>
+                <a16:creationId xmlns:a16="http://schemas.microsoft.com/office/drawing/2014/main" id="{52E2E3A8-C2D7-4507-8579-F4DCFC852D54}"/>
               </a:ext>
             </a:extLst>
           </p:cNvPr>
@@ -13826,7 +13826,7 @@
           <p:cNvPr id="10" name="">
             <a:extLst xmlns:a="http://schemas.openxmlformats.org/drawingml/2006/main">
               <a:ext uri="{FF2B5EF4-FFF2-40B4-BE49-F238E27FC236}">
-                <a16:creationId xmlns:a16="http://schemas.microsoft.com/office/drawing/2014/main" id="{943505FE-4472-40B1-9715-1434A2FB853C}"/>
+                <a16:creationId xmlns:a16="http://schemas.microsoft.com/office/drawing/2014/main" id="{A0E98C8F-0E12-47D5-9A36-8AB3DFD6409D}"/>
               </a:ext>
             </a:extLst>
           </p:cNvPr>
@@ -13888,7 +13888,7 @@
           <p:cNvPr id="11" name="">
             <a:extLst xmlns:a="http://schemas.openxmlformats.org/drawingml/2006/main">
               <a:ext uri="{FF2B5EF4-FFF2-40B4-BE49-F238E27FC236}">
-                <a16:creationId xmlns:a16="http://schemas.microsoft.com/office/drawing/2014/main" id="{5A39ABA7-3C02-4DB6-AC00-FAA4C36E6ECD}"/>
+                <a16:creationId xmlns:a16="http://schemas.microsoft.com/office/drawing/2014/main" id="{11C040B6-CB9B-4850-AE3E-C677E7D4F749}"/>
               </a:ext>
             </a:extLst>
           </p:cNvPr>
@@ -13950,7 +13950,7 @@
           <p:cNvPr id="12" name="">
             <a:extLst xmlns:a="http://schemas.openxmlformats.org/drawingml/2006/main">
               <a:ext uri="{FF2B5EF4-FFF2-40B4-BE49-F238E27FC236}">
-                <a16:creationId xmlns:a16="http://schemas.microsoft.com/office/drawing/2014/main" id="{857B31A3-62F3-424F-95D2-DF4098ABC892}"/>
+                <a16:creationId xmlns:a16="http://schemas.microsoft.com/office/drawing/2014/main" id="{330403D4-7390-4DCB-B924-FE72468A1A9D}"/>
               </a:ext>
             </a:extLst>
           </p:cNvPr>
@@ -14012,7 +14012,7 @@
           <p:cNvPr id="13" name="">
             <a:extLst xmlns:a="http://schemas.openxmlformats.org/drawingml/2006/main">
               <a:ext uri="{FF2B5EF4-FFF2-40B4-BE49-F238E27FC236}">
-                <a16:creationId xmlns:a16="http://schemas.microsoft.com/office/drawing/2014/main" id="{4794E4C8-644A-472E-8B63-81CE06386420}"/>
+                <a16:creationId xmlns:a16="http://schemas.microsoft.com/office/drawing/2014/main" id="{20039780-0983-4AF3-A88E-7BEF7279F377}"/>
               </a:ext>
             </a:extLst>
           </p:cNvPr>
@@ -14045,7 +14045,7 @@
           <p:cNvPr id="14" name="">
             <a:extLst xmlns:a="http://schemas.openxmlformats.org/drawingml/2006/main">
               <a:ext uri="{FF2B5EF4-FFF2-40B4-BE49-F238E27FC236}">
-                <a16:creationId xmlns:a16="http://schemas.microsoft.com/office/drawing/2014/main" id="{A3D8F353-FF82-4BC2-96DA-059BDA8CAEB5}"/>
+                <a16:creationId xmlns:a16="http://schemas.microsoft.com/office/drawing/2014/main" id="{6F94FB63-F000-4419-92ED-EBB75C6CAA51}"/>
               </a:ext>
             </a:extLst>
           </p:cNvPr>
@@ -14080,7 +14080,7 @@
           <p:cNvPr id="15" name="">
             <a:extLst xmlns:a="http://schemas.openxmlformats.org/drawingml/2006/main">
               <a:ext uri="{FF2B5EF4-FFF2-40B4-BE49-F238E27FC236}">
-                <a16:creationId xmlns:a16="http://schemas.microsoft.com/office/drawing/2014/main" id="{2A5C33DB-8246-46EB-90E2-D1A1E22DE2A6}"/>
+                <a16:creationId xmlns:a16="http://schemas.microsoft.com/office/drawing/2014/main" id="{2631FAAB-A7C3-45A4-9B80-5147D7894F50}"/>
               </a:ext>
             </a:extLst>
           </p:cNvPr>
@@ -14111,7 +14111,7 @@
           <p:cNvPr id="16" name="">
             <a:extLst xmlns:a="http://schemas.openxmlformats.org/drawingml/2006/main">
               <a:ext uri="{FF2B5EF4-FFF2-40B4-BE49-F238E27FC236}">
-                <a16:creationId xmlns:a16="http://schemas.microsoft.com/office/drawing/2014/main" id="{53114621-1175-4150-8132-4173986A2912}"/>
+                <a16:creationId xmlns:a16="http://schemas.microsoft.com/office/drawing/2014/main" id="{0CE83E4C-FB22-4710-BAD9-5AA177B90853}"/>
               </a:ext>
             </a:extLst>
           </p:cNvPr>
@@ -14173,7 +14173,7 @@
           <p:cNvPr id="17" name="">
             <a:extLst xmlns:a="http://schemas.openxmlformats.org/drawingml/2006/main">
               <a:ext uri="{FF2B5EF4-FFF2-40B4-BE49-F238E27FC236}">
-                <a16:creationId xmlns:a16="http://schemas.microsoft.com/office/drawing/2014/main" id="{21E268C3-77EB-4261-8E5B-136A0F02A3BB}"/>
+                <a16:creationId xmlns:a16="http://schemas.microsoft.com/office/drawing/2014/main" id="{70FF9A67-012E-4C31-BB49-8746E3D9B26F}"/>
               </a:ext>
             </a:extLst>
           </p:cNvPr>
@@ -14235,7 +14235,7 @@
           <p:cNvPr id="18" name="">
             <a:extLst xmlns:a="http://schemas.openxmlformats.org/drawingml/2006/main">
               <a:ext uri="{FF2B5EF4-FFF2-40B4-BE49-F238E27FC236}">
-                <a16:creationId xmlns:a16="http://schemas.microsoft.com/office/drawing/2014/main" id="{5F19C7AD-025E-4411-81E4-F96D164B5041}"/>
+                <a16:creationId xmlns:a16="http://schemas.microsoft.com/office/drawing/2014/main" id="{F386E8E1-0A97-45CF-AF86-753396A8E486}"/>
               </a:ext>
             </a:extLst>
           </p:cNvPr>
@@ -14297,7 +14297,7 @@
           <p:cNvPr id="19" name="">
             <a:extLst xmlns:a="http://schemas.openxmlformats.org/drawingml/2006/main">
               <a:ext uri="{FF2B5EF4-FFF2-40B4-BE49-F238E27FC236}">
-                <a16:creationId xmlns:a16="http://schemas.microsoft.com/office/drawing/2014/main" id="{31AB0595-7F16-4266-B796-D1405E89B32A}"/>
+                <a16:creationId xmlns:a16="http://schemas.microsoft.com/office/drawing/2014/main" id="{97E1EB92-33BF-4E66-95AC-0A11625C5302}"/>
               </a:ext>
             </a:extLst>
           </p:cNvPr>
@@ -14330,7 +14330,7 @@
           <p:cNvPr id="20" name="">
             <a:extLst xmlns:a="http://schemas.openxmlformats.org/drawingml/2006/main">
               <a:ext uri="{FF2B5EF4-FFF2-40B4-BE49-F238E27FC236}">
-                <a16:creationId xmlns:a16="http://schemas.microsoft.com/office/drawing/2014/main" id="{ADE4FDBC-B876-4703-8C8A-1E98FA65639A}"/>
+                <a16:creationId xmlns:a16="http://schemas.microsoft.com/office/drawing/2014/main" id="{E6BC3DAC-F461-4F6A-897D-7E95AD71B778}"/>
               </a:ext>
             </a:extLst>
           </p:cNvPr>
@@ -14365,7 +14365,7 @@
           <p:cNvPr id="21" name="">
             <a:extLst xmlns:a="http://schemas.openxmlformats.org/drawingml/2006/main">
               <a:ext uri="{FF2B5EF4-FFF2-40B4-BE49-F238E27FC236}">
-                <a16:creationId xmlns:a16="http://schemas.microsoft.com/office/drawing/2014/main" id="{68121864-D262-44B6-A7A8-F6E26A2FD37C}"/>
+                <a16:creationId xmlns:a16="http://schemas.microsoft.com/office/drawing/2014/main" id="{B4A814E4-3F59-4C49-8E6D-D0F28E20C962}"/>
               </a:ext>
             </a:extLst>
           </p:cNvPr>
@@ -14396,7 +14396,7 @@
           <p:cNvPr id="22" name="">
             <a:extLst xmlns:a="http://schemas.openxmlformats.org/drawingml/2006/main">
               <a:ext uri="{FF2B5EF4-FFF2-40B4-BE49-F238E27FC236}">
-                <a16:creationId xmlns:a16="http://schemas.microsoft.com/office/drawing/2014/main" id="{07A74FAD-7BAA-4949-8D58-93F6BD80C722}"/>
+                <a16:creationId xmlns:a16="http://schemas.microsoft.com/office/drawing/2014/main" id="{58A2619A-3245-4D0C-B6F5-7E05B56674F0}"/>
               </a:ext>
             </a:extLst>
           </p:cNvPr>
@@ -14458,7 +14458,7 @@
           <p:cNvPr id="23" name="">
             <a:extLst xmlns:a="http://schemas.openxmlformats.org/drawingml/2006/main">
               <a:ext uri="{FF2B5EF4-FFF2-40B4-BE49-F238E27FC236}">
-                <a16:creationId xmlns:a16="http://schemas.microsoft.com/office/drawing/2014/main" id="{2FF3390B-ACE8-4EA5-8BA7-F52E7E34D61A}"/>
+                <a16:creationId xmlns:a16="http://schemas.microsoft.com/office/drawing/2014/main" id="{328ACDD3-B88B-43D8-8C51-F8CBAE4C81AB}"/>
               </a:ext>
             </a:extLst>
           </p:cNvPr>
@@ -14520,7 +14520,7 @@
           <p:cNvPr id="24" name="">
             <a:extLst xmlns:a="http://schemas.openxmlformats.org/drawingml/2006/main">
               <a:ext uri="{FF2B5EF4-FFF2-40B4-BE49-F238E27FC236}">
-                <a16:creationId xmlns:a16="http://schemas.microsoft.com/office/drawing/2014/main" id="{49D1E887-9AC8-4BEC-BE1E-4D340BB9183B}"/>
+                <a16:creationId xmlns:a16="http://schemas.microsoft.com/office/drawing/2014/main" id="{03337D07-4587-465C-A2F4-6BDDEF31D864}"/>
               </a:ext>
             </a:extLst>
           </p:cNvPr>
@@ -14582,7 +14582,7 @@
           <p:cNvPr id="25" name="">
             <a:extLst xmlns:a="http://schemas.openxmlformats.org/drawingml/2006/main">
               <a:ext uri="{FF2B5EF4-FFF2-40B4-BE49-F238E27FC236}">
-                <a16:creationId xmlns:a16="http://schemas.microsoft.com/office/drawing/2014/main" id="{5FAA16CB-6714-4742-B6AD-E594F2CCDEC4}"/>
+                <a16:creationId xmlns:a16="http://schemas.microsoft.com/office/drawing/2014/main" id="{0DC66735-EF53-4EBE-B273-7C6528CDEF8D}"/>
               </a:ext>
             </a:extLst>
           </p:cNvPr>
@@ -14644,7 +14644,7 @@
           <p:cNvPr id="26" name="">
             <a:extLst xmlns:a="http://schemas.openxmlformats.org/drawingml/2006/main">
               <a:ext uri="{FF2B5EF4-FFF2-40B4-BE49-F238E27FC236}">
-                <a16:creationId xmlns:a16="http://schemas.microsoft.com/office/drawing/2014/main" id="{465D405C-878D-417E-8B0E-B1361498AB74}"/>
+                <a16:creationId xmlns:a16="http://schemas.microsoft.com/office/drawing/2014/main" id="{7D2CD88E-96D9-4D43-B328-954E621AD3E2}"/>
               </a:ext>
             </a:extLst>
           </p:cNvPr>
@@ -14704,7 +14704,7 @@
     </p:spTree>
     <p:extLst>
       <p:ext uri="{BB962C8B-B14F-4D97-AF65-F5344CB8AC3E}">
-        <p14:creationId xmlns:p14="http://schemas.microsoft.com/office/powerpoint/2010/main" val="644062198"/>
+        <p14:creationId xmlns:p14="http://schemas.microsoft.com/office/powerpoint/2010/main" val="2092219160"/>
       </p:ext>
     </p:extLst>
   </p:cSld>
@@ -14732,7 +14732,7 @@
           <p:nvPr/>
         </p:nvPicPr>
         <p:blipFill>
-          <a:blip xmlns:r="http://schemas.openxmlformats.org/officeDocument/2006/relationships" xmlns:a="http://schemas.openxmlformats.org/drawingml/2006/main" r:embed="R2f9da4995b8b4f84"/>
+          <a:blip xmlns:r="http://schemas.openxmlformats.org/officeDocument/2006/relationships" xmlns:a="http://schemas.openxmlformats.org/drawingml/2006/main" r:embed="Rc3d4472c26e74ae4"/>
           <a:srcRect xmlns:a="http://schemas.openxmlformats.org/drawingml/2006/main" l="0" t="0" r="0" b="0"/>
           <a:stretch xmlns:a="http://schemas.openxmlformats.org/drawingml/2006/main">
             <a:fillRect l="0" t="0" r="0" b="0"/>
@@ -14753,7 +14753,7 @@
           <p:cNvPr id="2" name="">
             <a:extLst xmlns:a="http://schemas.openxmlformats.org/drawingml/2006/main">
               <a:ext uri="{FF2B5EF4-FFF2-40B4-BE49-F238E27FC236}">
-                <a16:creationId xmlns:a16="http://schemas.microsoft.com/office/drawing/2014/main" id="{F0BE249C-E7D2-4547-8788-272935AC9E3C}"/>
+                <a16:creationId xmlns:a16="http://schemas.microsoft.com/office/drawing/2014/main" id="{0D80C4F8-ECFB-4122-8FAD-CBBAEC635E16}"/>
               </a:ext>
             </a:extLst>
           </p:cNvPr>
@@ -14815,7 +14815,7 @@
           <p:cNvPr id="3" name="">
             <a:extLst xmlns:a="http://schemas.openxmlformats.org/drawingml/2006/main">
               <a:ext uri="{FF2B5EF4-FFF2-40B4-BE49-F238E27FC236}">
-                <a16:creationId xmlns:a16="http://schemas.microsoft.com/office/drawing/2014/main" id="{D6351BEC-8105-47DB-9F0D-157FF9D24CA8}"/>
+                <a16:creationId xmlns:a16="http://schemas.microsoft.com/office/drawing/2014/main" id="{F403F116-C344-4617-B306-AC7FAE57DB76}"/>
               </a:ext>
             </a:extLst>
           </p:cNvPr>
@@ -14877,7 +14877,7 @@
           <p:cNvPr id="4" name="">
             <a:extLst xmlns:a="http://schemas.openxmlformats.org/drawingml/2006/main">
               <a:ext uri="{FF2B5EF4-FFF2-40B4-BE49-F238E27FC236}">
-                <a16:creationId xmlns:a16="http://schemas.microsoft.com/office/drawing/2014/main" id="{A8092BF4-339E-45E9-83CA-9DEA9B664CF1}"/>
+                <a16:creationId xmlns:a16="http://schemas.microsoft.com/office/drawing/2014/main" id="{55B70DEE-4489-4BB0-BDE5-A4327C524553}"/>
               </a:ext>
             </a:extLst>
           </p:cNvPr>
@@ -14939,7 +14939,7 @@
           <p:cNvPr id="5" name="">
             <a:extLst xmlns:a="http://schemas.openxmlformats.org/drawingml/2006/main">
               <a:ext uri="{FF2B5EF4-FFF2-40B4-BE49-F238E27FC236}">
-                <a16:creationId xmlns:a16="http://schemas.microsoft.com/office/drawing/2014/main" id="{2E6DC7B1-C4AE-47A0-B889-BB3CBC1ECD61}"/>
+                <a16:creationId xmlns:a16="http://schemas.microsoft.com/office/drawing/2014/main" id="{499895E5-B203-4FA6-A01C-11BD4C3D356D}"/>
               </a:ext>
             </a:extLst>
           </p:cNvPr>
@@ -14970,7 +14970,7 @@
           <p:cNvPr id="6" name="">
             <a:extLst xmlns:a="http://schemas.openxmlformats.org/drawingml/2006/main">
               <a:ext uri="{FF2B5EF4-FFF2-40B4-BE49-F238E27FC236}">
-                <a16:creationId xmlns:a16="http://schemas.microsoft.com/office/drawing/2014/main" id="{B4DCAE1E-7F13-4E55-8531-A538CAF1A269}"/>
+                <a16:creationId xmlns:a16="http://schemas.microsoft.com/office/drawing/2014/main" id="{AAC8A8AA-9B49-4CB1-843C-8C566BFCFFFA}"/>
               </a:ext>
             </a:extLst>
           </p:cNvPr>
@@ -15032,7 +15032,7 @@
           <p:cNvPr id="7" name="">
             <a:extLst xmlns:a="http://schemas.openxmlformats.org/drawingml/2006/main">
               <a:ext uri="{FF2B5EF4-FFF2-40B4-BE49-F238E27FC236}">
-                <a16:creationId xmlns:a16="http://schemas.microsoft.com/office/drawing/2014/main" id="{537DACFE-CA14-4F4E-A1FE-BE804C3E8B3B}"/>
+                <a16:creationId xmlns:a16="http://schemas.microsoft.com/office/drawing/2014/main" id="{5D459274-3E74-42E9-A176-86051E6454C1}"/>
               </a:ext>
             </a:extLst>
           </p:cNvPr>
@@ -15065,7 +15065,7 @@
           <p:cNvPr id="8" name="">
             <a:extLst xmlns:a="http://schemas.openxmlformats.org/drawingml/2006/main">
               <a:ext uri="{FF2B5EF4-FFF2-40B4-BE49-F238E27FC236}">
-                <a16:creationId xmlns:a16="http://schemas.microsoft.com/office/drawing/2014/main" id="{3B7E92E5-55D3-4EC3-80CB-CBA644027F07}"/>
+                <a16:creationId xmlns:a16="http://schemas.microsoft.com/office/drawing/2014/main" id="{F0048A6E-D094-4586-9FF5-B983382115A1}"/>
               </a:ext>
             </a:extLst>
           </p:cNvPr>
@@ -15100,7 +15100,7 @@
           <p:cNvPr id="9" name="">
             <a:extLst xmlns:a="http://schemas.openxmlformats.org/drawingml/2006/main">
               <a:ext uri="{FF2B5EF4-FFF2-40B4-BE49-F238E27FC236}">
-                <a16:creationId xmlns:a16="http://schemas.microsoft.com/office/drawing/2014/main" id="{3D6B5230-C6A1-4A43-9438-D4193B3FBA37}"/>
+                <a16:creationId xmlns:a16="http://schemas.microsoft.com/office/drawing/2014/main" id="{632E06C8-A63D-4814-8FB0-C7D9A2ABC167}"/>
               </a:ext>
             </a:extLst>
           </p:cNvPr>
@@ -15131,7 +15131,7 @@
           <p:cNvPr id="10" name="">
             <a:extLst xmlns:a="http://schemas.openxmlformats.org/drawingml/2006/main">
               <a:ext uri="{FF2B5EF4-FFF2-40B4-BE49-F238E27FC236}">
-                <a16:creationId xmlns:a16="http://schemas.microsoft.com/office/drawing/2014/main" id="{8E1C371A-3017-4E91-AC73-F59A3E376DFB}"/>
+                <a16:creationId xmlns:a16="http://schemas.microsoft.com/office/drawing/2014/main" id="{28963129-4CCA-474C-B882-3ADFE9AB3440}"/>
               </a:ext>
             </a:extLst>
           </p:cNvPr>
@@ -15193,7 +15193,7 @@
           <p:cNvPr id="11" name="">
             <a:extLst xmlns:a="http://schemas.openxmlformats.org/drawingml/2006/main">
               <a:ext uri="{FF2B5EF4-FFF2-40B4-BE49-F238E27FC236}">
-                <a16:creationId xmlns:a16="http://schemas.microsoft.com/office/drawing/2014/main" id="{3D4BDAAC-A96E-4FF8-8CF6-9EA38104854C}"/>
+                <a16:creationId xmlns:a16="http://schemas.microsoft.com/office/drawing/2014/main" id="{69B3845D-9A12-4990-9CFE-AFBC565ADF60}"/>
               </a:ext>
             </a:extLst>
           </p:cNvPr>
@@ -15255,7 +15255,7 @@
           <p:cNvPr id="12" name="">
             <a:extLst xmlns:a="http://schemas.openxmlformats.org/drawingml/2006/main">
               <a:ext uri="{FF2B5EF4-FFF2-40B4-BE49-F238E27FC236}">
-                <a16:creationId xmlns:a16="http://schemas.microsoft.com/office/drawing/2014/main" id="{20EDF479-4E6F-4FF6-A3BD-602172B42A18}"/>
+                <a16:creationId xmlns:a16="http://schemas.microsoft.com/office/drawing/2014/main" id="{F28AFC50-2B09-4F15-B7E7-EB751114B8F3}"/>
               </a:ext>
             </a:extLst>
           </p:cNvPr>
@@ -15317,7 +15317,7 @@
           <p:cNvPr id="13" name="">
             <a:extLst xmlns:a="http://schemas.openxmlformats.org/drawingml/2006/main">
               <a:ext uri="{FF2B5EF4-FFF2-40B4-BE49-F238E27FC236}">
-                <a16:creationId xmlns:a16="http://schemas.microsoft.com/office/drawing/2014/main" id="{798036B1-6198-4C50-B606-1DF285770C26}"/>
+                <a16:creationId xmlns:a16="http://schemas.microsoft.com/office/drawing/2014/main" id="{80840C18-0E3D-44B2-B6ED-4E575437B260}"/>
               </a:ext>
             </a:extLst>
           </p:cNvPr>
@@ -15350,7 +15350,7 @@
           <p:cNvPr id="14" name="">
             <a:extLst xmlns:a="http://schemas.openxmlformats.org/drawingml/2006/main">
               <a:ext uri="{FF2B5EF4-FFF2-40B4-BE49-F238E27FC236}">
-                <a16:creationId xmlns:a16="http://schemas.microsoft.com/office/drawing/2014/main" id="{CF1FFC34-F688-42D4-9CF8-60DFC1FB7559}"/>
+                <a16:creationId xmlns:a16="http://schemas.microsoft.com/office/drawing/2014/main" id="{E165D970-528B-4D52-A4A4-CB73FE3D731B}"/>
               </a:ext>
             </a:extLst>
           </p:cNvPr>
@@ -15385,7 +15385,7 @@
           <p:cNvPr id="15" name="">
             <a:extLst xmlns:a="http://schemas.openxmlformats.org/drawingml/2006/main">
               <a:ext uri="{FF2B5EF4-FFF2-40B4-BE49-F238E27FC236}">
-                <a16:creationId xmlns:a16="http://schemas.microsoft.com/office/drawing/2014/main" id="{3531789C-3F89-4532-8C4D-55ADBBF88935}"/>
+                <a16:creationId xmlns:a16="http://schemas.microsoft.com/office/drawing/2014/main" id="{F2779023-21BA-4253-86EA-B563F46D7DBD}"/>
               </a:ext>
             </a:extLst>
           </p:cNvPr>
@@ -15416,7 +15416,7 @@
           <p:cNvPr id="16" name="">
             <a:extLst xmlns:a="http://schemas.openxmlformats.org/drawingml/2006/main">
               <a:ext uri="{FF2B5EF4-FFF2-40B4-BE49-F238E27FC236}">
-                <a16:creationId xmlns:a16="http://schemas.microsoft.com/office/drawing/2014/main" id="{2E2EA2EA-6F3C-49FA-A89E-3245ACE62619}"/>
+                <a16:creationId xmlns:a16="http://schemas.microsoft.com/office/drawing/2014/main" id="{3BF48B40-EEFD-4991-B98D-89AAD1B1AE9D}"/>
               </a:ext>
             </a:extLst>
           </p:cNvPr>
@@ -15478,7 +15478,7 @@
           <p:cNvPr id="17" name="">
             <a:extLst xmlns:a="http://schemas.openxmlformats.org/drawingml/2006/main">
               <a:ext uri="{FF2B5EF4-FFF2-40B4-BE49-F238E27FC236}">
-                <a16:creationId xmlns:a16="http://schemas.microsoft.com/office/drawing/2014/main" id="{54FF8028-C833-46A8-B007-10D6F5C0B394}"/>
+                <a16:creationId xmlns:a16="http://schemas.microsoft.com/office/drawing/2014/main" id="{C719D9A6-E2DE-463A-8F04-9D8FB575AEF6}"/>
               </a:ext>
             </a:extLst>
           </p:cNvPr>
@@ -15540,7 +15540,7 @@
           <p:cNvPr id="18" name="">
             <a:extLst xmlns:a="http://schemas.openxmlformats.org/drawingml/2006/main">
               <a:ext uri="{FF2B5EF4-FFF2-40B4-BE49-F238E27FC236}">
-                <a16:creationId xmlns:a16="http://schemas.microsoft.com/office/drawing/2014/main" id="{D84D143B-50CD-4C58-AF4D-315176FB1307}"/>
+                <a16:creationId xmlns:a16="http://schemas.microsoft.com/office/drawing/2014/main" id="{E1CE7CD3-E9D8-4C27-A73D-AA94E85A4A64}"/>
               </a:ext>
             </a:extLst>
           </p:cNvPr>
@@ -15602,7 +15602,7 @@
           <p:cNvPr id="19" name="">
             <a:extLst xmlns:a="http://schemas.openxmlformats.org/drawingml/2006/main">
               <a:ext uri="{FF2B5EF4-FFF2-40B4-BE49-F238E27FC236}">
-                <a16:creationId xmlns:a16="http://schemas.microsoft.com/office/drawing/2014/main" id="{CC7CAAA2-3305-4450-A80C-876F9E096377}"/>
+                <a16:creationId xmlns:a16="http://schemas.microsoft.com/office/drawing/2014/main" id="{A95462B7-0128-45BC-B886-3E709BC78607}"/>
               </a:ext>
             </a:extLst>
           </p:cNvPr>
@@ -15635,7 +15635,7 @@
           <p:cNvPr id="20" name="">
             <a:extLst xmlns:a="http://schemas.openxmlformats.org/drawingml/2006/main">
               <a:ext uri="{FF2B5EF4-FFF2-40B4-BE49-F238E27FC236}">
-                <a16:creationId xmlns:a16="http://schemas.microsoft.com/office/drawing/2014/main" id="{39F3871E-C82F-4217-82C1-8005254D00EF}"/>
+                <a16:creationId xmlns:a16="http://schemas.microsoft.com/office/drawing/2014/main" id="{29C7EAAF-F91C-4690-9680-52B796D81FAF}"/>
               </a:ext>
             </a:extLst>
           </p:cNvPr>
@@ -15670,7 +15670,7 @@
           <p:cNvPr id="21" name="">
             <a:extLst xmlns:a="http://schemas.openxmlformats.org/drawingml/2006/main">
               <a:ext uri="{FF2B5EF4-FFF2-40B4-BE49-F238E27FC236}">
-                <a16:creationId xmlns:a16="http://schemas.microsoft.com/office/drawing/2014/main" id="{99CEFA3D-5E95-41EC-A156-C0466A0860DE}"/>
+                <a16:creationId xmlns:a16="http://schemas.microsoft.com/office/drawing/2014/main" id="{DFFE72C8-FD0A-4402-BB48-6A5DF4A5FDCA}"/>
               </a:ext>
             </a:extLst>
           </p:cNvPr>
@@ -15701,7 +15701,7 @@
           <p:cNvPr id="22" name="">
             <a:extLst xmlns:a="http://schemas.openxmlformats.org/drawingml/2006/main">
               <a:ext uri="{FF2B5EF4-FFF2-40B4-BE49-F238E27FC236}">
-                <a16:creationId xmlns:a16="http://schemas.microsoft.com/office/drawing/2014/main" id="{46527DB6-B0F3-4407-9020-15BCAE9DBFCC}"/>
+                <a16:creationId xmlns:a16="http://schemas.microsoft.com/office/drawing/2014/main" id="{E024D308-274F-40D4-AB5F-C587546DBB33}"/>
               </a:ext>
             </a:extLst>
           </p:cNvPr>
@@ -15763,7 +15763,7 @@
           <p:cNvPr id="23" name="">
             <a:extLst xmlns:a="http://schemas.openxmlformats.org/drawingml/2006/main">
               <a:ext uri="{FF2B5EF4-FFF2-40B4-BE49-F238E27FC236}">
-                <a16:creationId xmlns:a16="http://schemas.microsoft.com/office/drawing/2014/main" id="{01D0665B-A323-4F3A-A156-AB27E10D1FD8}"/>
+                <a16:creationId xmlns:a16="http://schemas.microsoft.com/office/drawing/2014/main" id="{F467344C-8814-470B-BABF-041DA9BC6DC0}"/>
               </a:ext>
             </a:extLst>
           </p:cNvPr>
@@ -15825,7 +15825,7 @@
           <p:cNvPr id="24" name="">
             <a:extLst xmlns:a="http://schemas.openxmlformats.org/drawingml/2006/main">
               <a:ext uri="{FF2B5EF4-FFF2-40B4-BE49-F238E27FC236}">
-                <a16:creationId xmlns:a16="http://schemas.microsoft.com/office/drawing/2014/main" id="{ECFBF425-E68D-4E6D-AD44-AC00CB23BAAE}"/>
+                <a16:creationId xmlns:a16="http://schemas.microsoft.com/office/drawing/2014/main" id="{FAB86E93-E080-4BAF-8412-70804A7548A7}"/>
               </a:ext>
             </a:extLst>
           </p:cNvPr>
@@ -15887,7 +15887,7 @@
           <p:cNvPr id="25" name="">
             <a:extLst xmlns:a="http://schemas.openxmlformats.org/drawingml/2006/main">
               <a:ext uri="{FF2B5EF4-FFF2-40B4-BE49-F238E27FC236}">
-                <a16:creationId xmlns:a16="http://schemas.microsoft.com/office/drawing/2014/main" id="{052F7BDD-6DDA-4359-9B1A-83CB1758A6B8}"/>
+                <a16:creationId xmlns:a16="http://schemas.microsoft.com/office/drawing/2014/main" id="{1891089D-9BBC-4756-91A1-8BAC96F17407}"/>
               </a:ext>
             </a:extLst>
           </p:cNvPr>
@@ -15949,7 +15949,7 @@
           <p:cNvPr id="26" name="">
             <a:extLst xmlns:a="http://schemas.openxmlformats.org/drawingml/2006/main">
               <a:ext uri="{FF2B5EF4-FFF2-40B4-BE49-F238E27FC236}">
-                <a16:creationId xmlns:a16="http://schemas.microsoft.com/office/drawing/2014/main" id="{D7F782AC-316C-4CB3-8886-763A4821C969}"/>
+                <a16:creationId xmlns:a16="http://schemas.microsoft.com/office/drawing/2014/main" id="{8F144144-DA4A-4760-B2EF-A9E2C9F584C7}"/>
               </a:ext>
             </a:extLst>
           </p:cNvPr>
@@ -16009,7 +16009,7 @@
     </p:spTree>
     <p:extLst>
       <p:ext uri="{BB962C8B-B14F-4D97-AF65-F5344CB8AC3E}">
-        <p14:creationId xmlns:p14="http://schemas.microsoft.com/office/powerpoint/2010/main" val="1704643897"/>
+        <p14:creationId xmlns:p14="http://schemas.microsoft.com/office/powerpoint/2010/main" val="1664217436"/>
       </p:ext>
     </p:extLst>
   </p:cSld>
@@ -16037,7 +16037,7 @@
           <p:nvPr/>
         </p:nvPicPr>
         <p:blipFill>
-          <a:blip xmlns:r="http://schemas.openxmlformats.org/officeDocument/2006/relationships" xmlns:a="http://schemas.openxmlformats.org/drawingml/2006/main" r:embed="R845247cb000447fd"/>
+          <a:blip xmlns:r="http://schemas.openxmlformats.org/officeDocument/2006/relationships" xmlns:a="http://schemas.openxmlformats.org/drawingml/2006/main" r:embed="Re4338d9f48664ec8"/>
           <a:srcRect xmlns:a="http://schemas.openxmlformats.org/drawingml/2006/main" l="0" t="0" r="0" b="0"/>
           <a:stretch xmlns:a="http://schemas.openxmlformats.org/drawingml/2006/main">
             <a:fillRect l="0" t="0" r="0" b="0"/>
@@ -16058,7 +16058,7 @@
           <p:cNvPr id="2" name="">
             <a:extLst xmlns:a="http://schemas.openxmlformats.org/drawingml/2006/main">
               <a:ext uri="{FF2B5EF4-FFF2-40B4-BE49-F238E27FC236}">
-                <a16:creationId xmlns:a16="http://schemas.microsoft.com/office/drawing/2014/main" id="{D76F005D-F83F-45E6-A344-AA5B1A6BC108}"/>
+                <a16:creationId xmlns:a16="http://schemas.microsoft.com/office/drawing/2014/main" id="{64867FD2-FD09-4C1A-8DCC-8733CB3B616F}"/>
               </a:ext>
             </a:extLst>
           </p:cNvPr>
@@ -16120,7 +16120,7 @@
           <p:cNvPr id="3" name="">
             <a:extLst xmlns:a="http://schemas.openxmlformats.org/drawingml/2006/main">
               <a:ext uri="{FF2B5EF4-FFF2-40B4-BE49-F238E27FC236}">
-                <a16:creationId xmlns:a16="http://schemas.microsoft.com/office/drawing/2014/main" id="{F0C88157-2261-4DB8-8976-9392DF7D5E03}"/>
+                <a16:creationId xmlns:a16="http://schemas.microsoft.com/office/drawing/2014/main" id="{59CA42DF-4478-4D36-8A7A-084FB4AD1F0B}"/>
               </a:ext>
             </a:extLst>
           </p:cNvPr>
@@ -16182,7 +16182,7 @@
           <p:cNvPr id="4" name="">
             <a:extLst xmlns:a="http://schemas.openxmlformats.org/drawingml/2006/main">
               <a:ext uri="{FF2B5EF4-FFF2-40B4-BE49-F238E27FC236}">
-                <a16:creationId xmlns:a16="http://schemas.microsoft.com/office/drawing/2014/main" id="{D0811EB9-CDAF-47DB-B76C-26E44DE4B575}"/>
+                <a16:creationId xmlns:a16="http://schemas.microsoft.com/office/drawing/2014/main" id="{C3A9EE54-28DF-4FBE-A585-DD5EC65B8B64}"/>
               </a:ext>
             </a:extLst>
           </p:cNvPr>
@@ -16244,7 +16244,7 @@
           <p:cNvPr id="5" name="">
             <a:extLst xmlns:a="http://schemas.openxmlformats.org/drawingml/2006/main">
               <a:ext uri="{FF2B5EF4-FFF2-40B4-BE49-F238E27FC236}">
-                <a16:creationId xmlns:a16="http://schemas.microsoft.com/office/drawing/2014/main" id="{BD8CE256-EE8D-419B-9527-EAD7208B557E}"/>
+                <a16:creationId xmlns:a16="http://schemas.microsoft.com/office/drawing/2014/main" id="{FE9728B2-DA0E-4A40-B0F4-C9F35A45E411}"/>
               </a:ext>
             </a:extLst>
           </p:cNvPr>
@@ -16275,7 +16275,7 @@
           <p:cNvPr id="6" name="">
             <a:extLst xmlns:a="http://schemas.openxmlformats.org/drawingml/2006/main">
               <a:ext uri="{FF2B5EF4-FFF2-40B4-BE49-F238E27FC236}">
-                <a16:creationId xmlns:a16="http://schemas.microsoft.com/office/drawing/2014/main" id="{BEBC3885-6508-4FE6-ABF2-5D7B4927C45D}"/>
+                <a16:creationId xmlns:a16="http://schemas.microsoft.com/office/drawing/2014/main" id="{ECAB37E5-AAD9-4A7F-8A77-F2D1E6DE5286}"/>
               </a:ext>
             </a:extLst>
           </p:cNvPr>
@@ -16337,7 +16337,7 @@
           <p:cNvPr id="7" name="">
             <a:extLst xmlns:a="http://schemas.openxmlformats.org/drawingml/2006/main">
               <a:ext uri="{FF2B5EF4-FFF2-40B4-BE49-F238E27FC236}">
-                <a16:creationId xmlns:a16="http://schemas.microsoft.com/office/drawing/2014/main" id="{17E395B4-A039-4EA4-8E98-EAEE94E603BD}"/>
+                <a16:creationId xmlns:a16="http://schemas.microsoft.com/office/drawing/2014/main" id="{3B1BA330-B826-4857-9622-452C06340D09}"/>
               </a:ext>
             </a:extLst>
           </p:cNvPr>
@@ -16370,7 +16370,7 @@
           <p:cNvPr id="8" name="">
             <a:extLst xmlns:a="http://schemas.openxmlformats.org/drawingml/2006/main">
               <a:ext uri="{FF2B5EF4-FFF2-40B4-BE49-F238E27FC236}">
-                <a16:creationId xmlns:a16="http://schemas.microsoft.com/office/drawing/2014/main" id="{79BD7828-D711-49B9-A941-9F31CE2BA773}"/>
+                <a16:creationId xmlns:a16="http://schemas.microsoft.com/office/drawing/2014/main" id="{B0561E9F-EADA-4DDB-8F0C-4652CCB25E0A}"/>
               </a:ext>
             </a:extLst>
           </p:cNvPr>
@@ -16405,7 +16405,7 @@
           <p:cNvPr id="9" name="">
             <a:extLst xmlns:a="http://schemas.openxmlformats.org/drawingml/2006/main">
               <a:ext uri="{FF2B5EF4-FFF2-40B4-BE49-F238E27FC236}">
-                <a16:creationId xmlns:a16="http://schemas.microsoft.com/office/drawing/2014/main" id="{C9C54C0A-6A26-4932-BF0D-A1944AAD80D6}"/>
+                <a16:creationId xmlns:a16="http://schemas.microsoft.com/office/drawing/2014/main" id="{DA993E83-8791-4090-A4AB-0BE64D8097C8}"/>
               </a:ext>
             </a:extLst>
           </p:cNvPr>
@@ -16436,7 +16436,7 @@
           <p:cNvPr id="10" name="">
             <a:extLst xmlns:a="http://schemas.openxmlformats.org/drawingml/2006/main">
               <a:ext uri="{FF2B5EF4-FFF2-40B4-BE49-F238E27FC236}">
-                <a16:creationId xmlns:a16="http://schemas.microsoft.com/office/drawing/2014/main" id="{C92679BA-D70B-4C94-9987-1DD643D46E21}"/>
+                <a16:creationId xmlns:a16="http://schemas.microsoft.com/office/drawing/2014/main" id="{FA8B3731-377E-48E8-8DCA-4EC6499E8E5D}"/>
               </a:ext>
             </a:extLst>
           </p:cNvPr>
@@ -16498,7 +16498,7 @@
           <p:cNvPr id="11" name="">
             <a:extLst xmlns:a="http://schemas.openxmlformats.org/drawingml/2006/main">
               <a:ext uri="{FF2B5EF4-FFF2-40B4-BE49-F238E27FC236}">
-                <a16:creationId xmlns:a16="http://schemas.microsoft.com/office/drawing/2014/main" id="{F1C80237-F479-495F-B488-947829950535}"/>
+                <a16:creationId xmlns:a16="http://schemas.microsoft.com/office/drawing/2014/main" id="{54BB6032-39EE-464D-98D8-7DDF11A46349}"/>
               </a:ext>
             </a:extLst>
           </p:cNvPr>
@@ -16560,7 +16560,7 @@
           <p:cNvPr id="12" name="">
             <a:extLst xmlns:a="http://schemas.openxmlformats.org/drawingml/2006/main">
               <a:ext uri="{FF2B5EF4-FFF2-40B4-BE49-F238E27FC236}">
-                <a16:creationId xmlns:a16="http://schemas.microsoft.com/office/drawing/2014/main" id="{232503BE-C6BF-42B0-8DB8-4C85D4ED5DF3}"/>
+                <a16:creationId xmlns:a16="http://schemas.microsoft.com/office/drawing/2014/main" id="{D14277FB-4C4D-459F-9C0F-0EC07C1009B3}"/>
               </a:ext>
             </a:extLst>
           </p:cNvPr>
@@ -16593,7 +16593,7 @@
           <p:cNvPr id="13" name="">
             <a:extLst xmlns:a="http://schemas.openxmlformats.org/drawingml/2006/main">
               <a:ext uri="{FF2B5EF4-FFF2-40B4-BE49-F238E27FC236}">
-                <a16:creationId xmlns:a16="http://schemas.microsoft.com/office/drawing/2014/main" id="{98506450-B159-44A6-9F8A-880A608AF985}"/>
+                <a16:creationId xmlns:a16="http://schemas.microsoft.com/office/drawing/2014/main" id="{A8202150-7086-488F-91C8-14F4D09B786F}"/>
               </a:ext>
             </a:extLst>
           </p:cNvPr>
@@ -16628,7 +16628,7 @@
           <p:cNvPr id="14" name="">
             <a:extLst xmlns:a="http://schemas.openxmlformats.org/drawingml/2006/main">
               <a:ext uri="{FF2B5EF4-FFF2-40B4-BE49-F238E27FC236}">
-                <a16:creationId xmlns:a16="http://schemas.microsoft.com/office/drawing/2014/main" id="{F1E6D838-368F-4205-AAAD-D7D0986C6905}"/>
+                <a16:creationId xmlns:a16="http://schemas.microsoft.com/office/drawing/2014/main" id="{66EDD8CF-B93B-47A9-A458-5FDE982479C5}"/>
               </a:ext>
             </a:extLst>
           </p:cNvPr>
@@ -16659,7 +16659,7 @@
           <p:cNvPr id="15" name="">
             <a:extLst xmlns:a="http://schemas.openxmlformats.org/drawingml/2006/main">
               <a:ext uri="{FF2B5EF4-FFF2-40B4-BE49-F238E27FC236}">
-                <a16:creationId xmlns:a16="http://schemas.microsoft.com/office/drawing/2014/main" id="{ACD4EAEB-E635-4B46-A0CD-3A8C24638202}"/>
+                <a16:creationId xmlns:a16="http://schemas.microsoft.com/office/drawing/2014/main" id="{31EC317E-D694-46EE-B7AC-1A9C936DF13F}"/>
               </a:ext>
             </a:extLst>
           </p:cNvPr>
@@ -16721,7 +16721,7 @@
           <p:cNvPr id="16" name="">
             <a:extLst xmlns:a="http://schemas.openxmlformats.org/drawingml/2006/main">
               <a:ext uri="{FF2B5EF4-FFF2-40B4-BE49-F238E27FC236}">
-                <a16:creationId xmlns:a16="http://schemas.microsoft.com/office/drawing/2014/main" id="{4F04433E-6AA9-4676-A41A-D4762C94CF22}"/>
+                <a16:creationId xmlns:a16="http://schemas.microsoft.com/office/drawing/2014/main" id="{018F0BBD-F06F-4121-B633-D3051A83BF88}"/>
               </a:ext>
             </a:extLst>
           </p:cNvPr>
@@ -16783,7 +16783,7 @@
           <p:cNvPr id="17" name="">
             <a:extLst xmlns:a="http://schemas.openxmlformats.org/drawingml/2006/main">
               <a:ext uri="{FF2B5EF4-FFF2-40B4-BE49-F238E27FC236}">
-                <a16:creationId xmlns:a16="http://schemas.microsoft.com/office/drawing/2014/main" id="{D8F1EFA9-C5EA-41C9-93FA-AB8108E5C81B}"/>
+                <a16:creationId xmlns:a16="http://schemas.microsoft.com/office/drawing/2014/main" id="{412FA95C-1FD4-4DDE-B75B-A8F371124624}"/>
               </a:ext>
             </a:extLst>
           </p:cNvPr>
@@ -16816,7 +16816,7 @@
           <p:cNvPr id="18" name="">
             <a:extLst xmlns:a="http://schemas.openxmlformats.org/drawingml/2006/main">
               <a:ext uri="{FF2B5EF4-FFF2-40B4-BE49-F238E27FC236}">
-                <a16:creationId xmlns:a16="http://schemas.microsoft.com/office/drawing/2014/main" id="{11198F18-D7EB-4124-9990-01E53B7EB01F}"/>
+                <a16:creationId xmlns:a16="http://schemas.microsoft.com/office/drawing/2014/main" id="{FAACC584-4109-4CDB-B27B-3694907EB444}"/>
               </a:ext>
             </a:extLst>
           </p:cNvPr>
@@ -16851,7 +16851,7 @@
           <p:cNvPr id="19" name="">
             <a:extLst xmlns:a="http://schemas.openxmlformats.org/drawingml/2006/main">
               <a:ext uri="{FF2B5EF4-FFF2-40B4-BE49-F238E27FC236}">
-                <a16:creationId xmlns:a16="http://schemas.microsoft.com/office/drawing/2014/main" id="{FACC7825-1DD5-4F48-95A1-064BBFCA89AC}"/>
+                <a16:creationId xmlns:a16="http://schemas.microsoft.com/office/drawing/2014/main" id="{8CB66E75-6D6B-4D6F-B735-71FBACE43E6A}"/>
               </a:ext>
             </a:extLst>
           </p:cNvPr>
@@ -16882,7 +16882,7 @@
           <p:cNvPr id="20" name="">
             <a:extLst xmlns:a="http://schemas.openxmlformats.org/drawingml/2006/main">
               <a:ext uri="{FF2B5EF4-FFF2-40B4-BE49-F238E27FC236}">
-                <a16:creationId xmlns:a16="http://schemas.microsoft.com/office/drawing/2014/main" id="{7D6AA085-9D05-4766-8988-1E9703256A22}"/>
+                <a16:creationId xmlns:a16="http://schemas.microsoft.com/office/drawing/2014/main" id="{F9B7E03B-435D-422A-8AB7-C96817E6A51A}"/>
               </a:ext>
             </a:extLst>
           </p:cNvPr>
@@ -16944,7 +16944,7 @@
           <p:cNvPr id="21" name="">
             <a:extLst xmlns:a="http://schemas.openxmlformats.org/drawingml/2006/main">
               <a:ext uri="{FF2B5EF4-FFF2-40B4-BE49-F238E27FC236}">
-                <a16:creationId xmlns:a16="http://schemas.microsoft.com/office/drawing/2014/main" id="{735241CD-09B1-4CEE-9AFD-53845857B93F}"/>
+                <a16:creationId xmlns:a16="http://schemas.microsoft.com/office/drawing/2014/main" id="{A433F287-50B6-4122-BA98-D6A47F0218D1}"/>
               </a:ext>
             </a:extLst>
           </p:cNvPr>
@@ -17006,7 +17006,7 @@
           <p:cNvPr id="22" name="">
             <a:extLst xmlns:a="http://schemas.openxmlformats.org/drawingml/2006/main">
               <a:ext uri="{FF2B5EF4-FFF2-40B4-BE49-F238E27FC236}">
-                <a16:creationId xmlns:a16="http://schemas.microsoft.com/office/drawing/2014/main" id="{F39056DF-6ECC-41E9-8922-C81A2BDB4172}"/>
+                <a16:creationId xmlns:a16="http://schemas.microsoft.com/office/drawing/2014/main" id="{95EAD758-629C-4FE1-B902-AC9DE64BA59C}"/>
               </a:ext>
             </a:extLst>
           </p:cNvPr>
@@ -17068,7 +17068,7 @@
           <p:cNvPr id="23" name="">
             <a:extLst xmlns:a="http://schemas.openxmlformats.org/drawingml/2006/main">
               <a:ext uri="{FF2B5EF4-FFF2-40B4-BE49-F238E27FC236}">
-                <a16:creationId xmlns:a16="http://schemas.microsoft.com/office/drawing/2014/main" id="{72A5ADAF-6F4A-4CE3-9283-6A85B3D80532}"/>
+                <a16:creationId xmlns:a16="http://schemas.microsoft.com/office/drawing/2014/main" id="{A6A6E532-7908-4A11-9CAB-E1E4B4E556B5}"/>
               </a:ext>
             </a:extLst>
           </p:cNvPr>
@@ -17128,7 +17128,7 @@
     </p:spTree>
     <p:extLst>
       <p:ext uri="{BB962C8B-B14F-4D97-AF65-F5344CB8AC3E}">
-        <p14:creationId xmlns:p14="http://schemas.microsoft.com/office/powerpoint/2010/main" val="312168098"/>
+        <p14:creationId xmlns:p14="http://schemas.microsoft.com/office/powerpoint/2010/main" val="1174366388"/>
       </p:ext>
     </p:extLst>
   </p:cSld>
@@ -17156,7 +17156,7 @@
           <p:nvPr/>
         </p:nvPicPr>
         <p:blipFill>
-          <a:blip xmlns:r="http://schemas.openxmlformats.org/officeDocument/2006/relationships" xmlns:a="http://schemas.openxmlformats.org/drawingml/2006/main" r:embed="R1dd494e30f4f4aaa"/>
+          <a:blip xmlns:r="http://schemas.openxmlformats.org/officeDocument/2006/relationships" xmlns:a="http://schemas.openxmlformats.org/drawingml/2006/main" r:embed="Raf365acf4c9b40fa"/>
           <a:srcRect xmlns:a="http://schemas.openxmlformats.org/drawingml/2006/main" l="0" t="0" r="0" b="0"/>
           <a:stretch xmlns:a="http://schemas.openxmlformats.org/drawingml/2006/main">
             <a:fillRect l="0" t="0" r="0" b="0"/>
@@ -17177,7 +17177,7 @@
           <p:cNvPr id="2" name="">
             <a:extLst xmlns:a="http://schemas.openxmlformats.org/drawingml/2006/main">
               <a:ext uri="{FF2B5EF4-FFF2-40B4-BE49-F238E27FC236}">
-                <a16:creationId xmlns:a16="http://schemas.microsoft.com/office/drawing/2014/main" id="{84DF8B22-7F03-4A6A-9E65-AC52AC1554B7}"/>
+                <a16:creationId xmlns:a16="http://schemas.microsoft.com/office/drawing/2014/main" id="{557D2D68-74F5-49BA-ADED-869BBC8480A2}"/>
               </a:ext>
             </a:extLst>
           </p:cNvPr>
@@ -17239,7 +17239,7 @@
           <p:cNvPr id="3" name="">
             <a:extLst xmlns:a="http://schemas.openxmlformats.org/drawingml/2006/main">
               <a:ext uri="{FF2B5EF4-FFF2-40B4-BE49-F238E27FC236}">
-                <a16:creationId xmlns:a16="http://schemas.microsoft.com/office/drawing/2014/main" id="{40C2D3B1-6891-44A4-B3BC-20AF121DC516}"/>
+                <a16:creationId xmlns:a16="http://schemas.microsoft.com/office/drawing/2014/main" id="{77A659F3-D12D-4CCF-A27B-56E835EF4299}"/>
               </a:ext>
             </a:extLst>
           </p:cNvPr>
@@ -17301,7 +17301,7 @@
           <p:cNvPr id="4" name="">
             <a:extLst xmlns:a="http://schemas.openxmlformats.org/drawingml/2006/main">
               <a:ext uri="{FF2B5EF4-FFF2-40B4-BE49-F238E27FC236}">
-                <a16:creationId xmlns:a16="http://schemas.microsoft.com/office/drawing/2014/main" id="{C1C95C51-CFA7-4752-B6F2-63E50EF3A7D3}"/>
+                <a16:creationId xmlns:a16="http://schemas.microsoft.com/office/drawing/2014/main" id="{55D69C59-4632-4264-9EE8-885E47F494FD}"/>
               </a:ext>
             </a:extLst>
           </p:cNvPr>
@@ -17363,7 +17363,7 @@
           <p:cNvPr id="5" name="">
             <a:extLst xmlns:a="http://schemas.openxmlformats.org/drawingml/2006/main">
               <a:ext uri="{FF2B5EF4-FFF2-40B4-BE49-F238E27FC236}">
-                <a16:creationId xmlns:a16="http://schemas.microsoft.com/office/drawing/2014/main" id="{084163AB-D0E9-4758-8CB7-FC7286FD98A6}"/>
+                <a16:creationId xmlns:a16="http://schemas.microsoft.com/office/drawing/2014/main" id="{B62FBB3F-6A36-450C-9D37-065E67D7ABDD}"/>
               </a:ext>
             </a:extLst>
           </p:cNvPr>
@@ -17394,7 +17394,7 @@
           <p:cNvPr id="6" name="">
             <a:extLst xmlns:a="http://schemas.openxmlformats.org/drawingml/2006/main">
               <a:ext uri="{FF2B5EF4-FFF2-40B4-BE49-F238E27FC236}">
-                <a16:creationId xmlns:a16="http://schemas.microsoft.com/office/drawing/2014/main" id="{3FB24D77-2CB0-461A-9EE8-B155F7EBE064}"/>
+                <a16:creationId xmlns:a16="http://schemas.microsoft.com/office/drawing/2014/main" id="{159453E7-50A3-444D-8862-C66297192C8A}"/>
               </a:ext>
             </a:extLst>
           </p:cNvPr>
@@ -17456,7 +17456,7 @@
           <p:cNvPr id="7" name="">
             <a:extLst xmlns:a="http://schemas.openxmlformats.org/drawingml/2006/main">
               <a:ext uri="{FF2B5EF4-FFF2-40B4-BE49-F238E27FC236}">
-                <a16:creationId xmlns:a16="http://schemas.microsoft.com/office/drawing/2014/main" id="{D461FD85-8AB0-4FCE-B8D4-EFA72AA59540}"/>
+                <a16:creationId xmlns:a16="http://schemas.microsoft.com/office/drawing/2014/main" id="{7FBA83BC-D0E8-43D3-B396-CE1381E40075}"/>
               </a:ext>
             </a:extLst>
           </p:cNvPr>
@@ -17489,7 +17489,7 @@
           <p:cNvPr id="8" name="">
             <a:extLst xmlns:a="http://schemas.openxmlformats.org/drawingml/2006/main">
               <a:ext uri="{FF2B5EF4-FFF2-40B4-BE49-F238E27FC236}">
-                <a16:creationId xmlns:a16="http://schemas.microsoft.com/office/drawing/2014/main" id="{34021932-A5F9-4DD0-A8F4-B90EFB379715}"/>
+                <a16:creationId xmlns:a16="http://schemas.microsoft.com/office/drawing/2014/main" id="{14DEF76D-E3AC-4DDD-A062-B2076FF93D90}"/>
               </a:ext>
             </a:extLst>
           </p:cNvPr>
@@ -17524,7 +17524,7 @@
           <p:cNvPr id="9" name="">
             <a:extLst xmlns:a="http://schemas.openxmlformats.org/drawingml/2006/main">
               <a:ext uri="{FF2B5EF4-FFF2-40B4-BE49-F238E27FC236}">
-                <a16:creationId xmlns:a16="http://schemas.microsoft.com/office/drawing/2014/main" id="{2AF61B17-BBCC-4C80-A0C8-8018A3BAF83C}"/>
+                <a16:creationId xmlns:a16="http://schemas.microsoft.com/office/drawing/2014/main" id="{4737D474-F29F-412D-966C-CB5D1D536403}"/>
               </a:ext>
             </a:extLst>
           </p:cNvPr>
@@ -17555,7 +17555,7 @@
           <p:cNvPr id="10" name="">
             <a:extLst xmlns:a="http://schemas.openxmlformats.org/drawingml/2006/main">
               <a:ext uri="{FF2B5EF4-FFF2-40B4-BE49-F238E27FC236}">
-                <a16:creationId xmlns:a16="http://schemas.microsoft.com/office/drawing/2014/main" id="{438E4F6D-14A9-42EA-9659-F46EC26CAF1D}"/>
+                <a16:creationId xmlns:a16="http://schemas.microsoft.com/office/drawing/2014/main" id="{A231E8AA-1854-405A-B848-523D5F24D15F}"/>
               </a:ext>
             </a:extLst>
           </p:cNvPr>
@@ -17617,7 +17617,7 @@
           <p:cNvPr id="11" name="">
             <a:extLst xmlns:a="http://schemas.openxmlformats.org/drawingml/2006/main">
               <a:ext uri="{FF2B5EF4-FFF2-40B4-BE49-F238E27FC236}">
-                <a16:creationId xmlns:a16="http://schemas.microsoft.com/office/drawing/2014/main" id="{C35BFA8A-057C-4493-AD31-EA5E3BEEF00D}"/>
+                <a16:creationId xmlns:a16="http://schemas.microsoft.com/office/drawing/2014/main" id="{93519EE3-8135-4EB6-8946-FE31BF8C30F9}"/>
               </a:ext>
             </a:extLst>
           </p:cNvPr>
@@ -17679,7 +17679,7 @@
           <p:cNvPr id="12" name="">
             <a:extLst xmlns:a="http://schemas.openxmlformats.org/drawingml/2006/main">
               <a:ext uri="{FF2B5EF4-FFF2-40B4-BE49-F238E27FC236}">
-                <a16:creationId xmlns:a16="http://schemas.microsoft.com/office/drawing/2014/main" id="{0E52466F-1405-4E17-89DE-A305ADD497FB}"/>
+                <a16:creationId xmlns:a16="http://schemas.microsoft.com/office/drawing/2014/main" id="{6D72AD31-FD38-42E2-9546-C429B32DFD37}"/>
               </a:ext>
             </a:extLst>
           </p:cNvPr>
@@ -17712,7 +17712,7 @@
           <p:cNvPr id="13" name="">
             <a:extLst xmlns:a="http://schemas.openxmlformats.org/drawingml/2006/main">
               <a:ext uri="{FF2B5EF4-FFF2-40B4-BE49-F238E27FC236}">
-                <a16:creationId xmlns:a16="http://schemas.microsoft.com/office/drawing/2014/main" id="{D2BCF986-301E-49F5-9FC6-702EB3EECA4C}"/>
+                <a16:creationId xmlns:a16="http://schemas.microsoft.com/office/drawing/2014/main" id="{2996568D-F1AD-43EA-9E55-61D5D930769D}"/>
               </a:ext>
             </a:extLst>
           </p:cNvPr>
@@ -17747,7 +17747,7 @@
           <p:cNvPr id="14" name="">
             <a:extLst xmlns:a="http://schemas.openxmlformats.org/drawingml/2006/main">
               <a:ext uri="{FF2B5EF4-FFF2-40B4-BE49-F238E27FC236}">
-                <a16:creationId xmlns:a16="http://schemas.microsoft.com/office/drawing/2014/main" id="{60141ED4-9AE1-4475-BA9B-5B63BA70586F}"/>
+                <a16:creationId xmlns:a16="http://schemas.microsoft.com/office/drawing/2014/main" id="{69560A3A-54F2-486E-A65E-869841681A72}"/>
               </a:ext>
             </a:extLst>
           </p:cNvPr>
@@ -17778,7 +17778,7 @@
           <p:cNvPr id="15" name="">
             <a:extLst xmlns:a="http://schemas.openxmlformats.org/drawingml/2006/main">
               <a:ext uri="{FF2B5EF4-FFF2-40B4-BE49-F238E27FC236}">
-                <a16:creationId xmlns:a16="http://schemas.microsoft.com/office/drawing/2014/main" id="{A1D1B07A-C9F2-400D-A08A-3ED26A9DBF05}"/>
+                <a16:creationId xmlns:a16="http://schemas.microsoft.com/office/drawing/2014/main" id="{302D717F-7BF5-45FC-8B36-F138820F02B6}"/>
               </a:ext>
             </a:extLst>
           </p:cNvPr>
@@ -17840,7 +17840,7 @@
           <p:cNvPr id="16" name="">
             <a:extLst xmlns:a="http://schemas.openxmlformats.org/drawingml/2006/main">
               <a:ext uri="{FF2B5EF4-FFF2-40B4-BE49-F238E27FC236}">
-                <a16:creationId xmlns:a16="http://schemas.microsoft.com/office/drawing/2014/main" id="{311A3822-C2B9-4048-A4CB-E1715B2156F5}"/>
+                <a16:creationId xmlns:a16="http://schemas.microsoft.com/office/drawing/2014/main" id="{5B9334B2-6B24-4D54-A376-024D6A51E7F9}"/>
               </a:ext>
             </a:extLst>
           </p:cNvPr>
@@ -17902,7 +17902,7 @@
           <p:cNvPr id="17" name="">
             <a:extLst xmlns:a="http://schemas.openxmlformats.org/drawingml/2006/main">
               <a:ext uri="{FF2B5EF4-FFF2-40B4-BE49-F238E27FC236}">
-                <a16:creationId xmlns:a16="http://schemas.microsoft.com/office/drawing/2014/main" id="{D1D2FFF0-7252-485D-9F52-749403BEFFAB}"/>
+                <a16:creationId xmlns:a16="http://schemas.microsoft.com/office/drawing/2014/main" id="{74125113-266F-489A-88BD-2CDC5AD9A275}"/>
               </a:ext>
             </a:extLst>
           </p:cNvPr>
@@ -17964,7 +17964,7 @@
           <p:cNvPr id="18" name="">
             <a:extLst xmlns:a="http://schemas.openxmlformats.org/drawingml/2006/main">
               <a:ext uri="{FF2B5EF4-FFF2-40B4-BE49-F238E27FC236}">
-                <a16:creationId xmlns:a16="http://schemas.microsoft.com/office/drawing/2014/main" id="{DB0C66C1-B04A-4315-8DDB-DF0CF3E1E373}"/>
+                <a16:creationId xmlns:a16="http://schemas.microsoft.com/office/drawing/2014/main" id="{D99A677C-F966-46DD-AF93-D6E19D1C1BC6}"/>
               </a:ext>
             </a:extLst>
           </p:cNvPr>
@@ -18024,7 +18024,7 @@
     </p:spTree>
     <p:extLst>
       <p:ext uri="{BB962C8B-B14F-4D97-AF65-F5344CB8AC3E}">
-        <p14:creationId xmlns:p14="http://schemas.microsoft.com/office/powerpoint/2010/main" val="116824547"/>
+        <p14:creationId xmlns:p14="http://schemas.microsoft.com/office/powerpoint/2010/main" val="1825216403"/>
       </p:ext>
     </p:extLst>
   </p:cSld>
@@ -18052,7 +18052,7 @@
           <p:nvPr/>
         </p:nvPicPr>
         <p:blipFill>
-          <a:blip xmlns:r="http://schemas.openxmlformats.org/officeDocument/2006/relationships" xmlns:a="http://schemas.openxmlformats.org/drawingml/2006/main" r:embed="Ra15267470c6b4d80"/>
+          <a:blip xmlns:r="http://schemas.openxmlformats.org/officeDocument/2006/relationships" xmlns:a="http://schemas.openxmlformats.org/drawingml/2006/main" r:embed="R21ac54934a414128"/>
           <a:srcRect xmlns:a="http://schemas.openxmlformats.org/drawingml/2006/main" l="0" t="0" r="0" b="0"/>
           <a:stretch xmlns:a="http://schemas.openxmlformats.org/drawingml/2006/main">
             <a:fillRect l="0" t="0" r="0" b="0"/>
@@ -18073,7 +18073,7 @@
           <p:cNvPr id="2" name="">
             <a:extLst xmlns:a="http://schemas.openxmlformats.org/drawingml/2006/main">
               <a:ext uri="{FF2B5EF4-FFF2-40B4-BE49-F238E27FC236}">
-                <a16:creationId xmlns:a16="http://schemas.microsoft.com/office/drawing/2014/main" id="{CFE6E0E0-B76B-4BF5-BEC6-78C94B61660D}"/>
+                <a16:creationId xmlns:a16="http://schemas.microsoft.com/office/drawing/2014/main" id="{4185FF24-1C92-4598-9035-4A56BC83FE87}"/>
               </a:ext>
             </a:extLst>
           </p:cNvPr>
@@ -18135,7 +18135,7 @@
           <p:cNvPr id="3" name="">
             <a:extLst xmlns:a="http://schemas.openxmlformats.org/drawingml/2006/main">
               <a:ext uri="{FF2B5EF4-FFF2-40B4-BE49-F238E27FC236}">
-                <a16:creationId xmlns:a16="http://schemas.microsoft.com/office/drawing/2014/main" id="{218688AC-C473-4C69-9D4A-D86F7B512DBB}"/>
+                <a16:creationId xmlns:a16="http://schemas.microsoft.com/office/drawing/2014/main" id="{377B01FA-78DE-4BCE-AC63-F85DAEF83620}"/>
               </a:ext>
             </a:extLst>
           </p:cNvPr>
@@ -18197,7 +18197,7 @@
           <p:cNvPr id="4" name="">
             <a:extLst xmlns:a="http://schemas.openxmlformats.org/drawingml/2006/main">
               <a:ext uri="{FF2B5EF4-FFF2-40B4-BE49-F238E27FC236}">
-                <a16:creationId xmlns:a16="http://schemas.microsoft.com/office/drawing/2014/main" id="{E6A1793A-2A1A-4B9F-95D2-421FBEABE31A}"/>
+                <a16:creationId xmlns:a16="http://schemas.microsoft.com/office/drawing/2014/main" id="{FC66D3AF-3880-47AA-8D0D-54755AA49CFB}"/>
               </a:ext>
             </a:extLst>
           </p:cNvPr>
@@ -18259,7 +18259,7 @@
           <p:cNvPr id="5" name="">
             <a:extLst xmlns:a="http://schemas.openxmlformats.org/drawingml/2006/main">
               <a:ext uri="{FF2B5EF4-FFF2-40B4-BE49-F238E27FC236}">
-                <a16:creationId xmlns:a16="http://schemas.microsoft.com/office/drawing/2014/main" id="{4AB7A44F-5F55-45B7-AB6D-CBF2EBB4B6C4}"/>
+                <a16:creationId xmlns:a16="http://schemas.microsoft.com/office/drawing/2014/main" id="{87A02DEF-2401-4F54-9AF1-82B805E29C11}"/>
               </a:ext>
             </a:extLst>
           </p:cNvPr>
@@ -18290,7 +18290,7 @@
           <p:cNvPr id="6" name="">
             <a:extLst xmlns:a="http://schemas.openxmlformats.org/drawingml/2006/main">
               <a:ext uri="{FF2B5EF4-FFF2-40B4-BE49-F238E27FC236}">
-                <a16:creationId xmlns:a16="http://schemas.microsoft.com/office/drawing/2014/main" id="{76634A8D-BCFA-45F2-9D96-66F27DA6A2FB}"/>
+                <a16:creationId xmlns:a16="http://schemas.microsoft.com/office/drawing/2014/main" id="{95CAE6DB-DBFD-4E8E-A39C-3B2601B317E1}"/>
               </a:ext>
             </a:extLst>
           </p:cNvPr>
@@ -18352,7 +18352,7 @@
           <p:cNvPr id="7" name="">
             <a:extLst xmlns:a="http://schemas.openxmlformats.org/drawingml/2006/main">
               <a:ext uri="{FF2B5EF4-FFF2-40B4-BE49-F238E27FC236}">
-                <a16:creationId xmlns:a16="http://schemas.microsoft.com/office/drawing/2014/main" id="{564F0385-9F74-4196-B687-156ACAC5BC46}"/>
+                <a16:creationId xmlns:a16="http://schemas.microsoft.com/office/drawing/2014/main" id="{89B98506-4930-45D3-83E9-3DDF621589F3}"/>
               </a:ext>
             </a:extLst>
           </p:cNvPr>
@@ -18385,7 +18385,7 @@
           <p:cNvPr id="8" name="">
             <a:extLst xmlns:a="http://schemas.openxmlformats.org/drawingml/2006/main">
               <a:ext uri="{FF2B5EF4-FFF2-40B4-BE49-F238E27FC236}">
-                <a16:creationId xmlns:a16="http://schemas.microsoft.com/office/drawing/2014/main" id="{1BBA0AB6-B19D-4DE5-AEEA-469ED390E53D}"/>
+                <a16:creationId xmlns:a16="http://schemas.microsoft.com/office/drawing/2014/main" id="{DF58DA1B-9735-46A2-A8D1-F6DE641DACC1}"/>
               </a:ext>
             </a:extLst>
           </p:cNvPr>
@@ -18420,7 +18420,7 @@
           <p:cNvPr id="9" name="">
             <a:extLst xmlns:a="http://schemas.openxmlformats.org/drawingml/2006/main">
               <a:ext uri="{FF2B5EF4-FFF2-40B4-BE49-F238E27FC236}">
-                <a16:creationId xmlns:a16="http://schemas.microsoft.com/office/drawing/2014/main" id="{DC80E3A1-F49F-4A73-8ECE-42BCFA1109E1}"/>
+                <a16:creationId xmlns:a16="http://schemas.microsoft.com/office/drawing/2014/main" id="{83C23E88-1752-4C4F-A0A3-46FC80C4EE72}"/>
               </a:ext>
             </a:extLst>
           </p:cNvPr>
@@ -18451,7 +18451,7 @@
           <p:cNvPr id="10" name="">
             <a:extLst xmlns:a="http://schemas.openxmlformats.org/drawingml/2006/main">
               <a:ext uri="{FF2B5EF4-FFF2-40B4-BE49-F238E27FC236}">
-                <a16:creationId xmlns:a16="http://schemas.microsoft.com/office/drawing/2014/main" id="{877D5575-89DA-47FF-9524-339EF4409491}"/>
+                <a16:creationId xmlns:a16="http://schemas.microsoft.com/office/drawing/2014/main" id="{8C91B2E6-2B41-4A81-8005-2A4BE9105F27}"/>
               </a:ext>
             </a:extLst>
           </p:cNvPr>
@@ -18513,7 +18513,7 @@
           <p:cNvPr id="11" name="">
             <a:extLst xmlns:a="http://schemas.openxmlformats.org/drawingml/2006/main">
               <a:ext uri="{FF2B5EF4-FFF2-40B4-BE49-F238E27FC236}">
-                <a16:creationId xmlns:a16="http://schemas.microsoft.com/office/drawing/2014/main" id="{7DEB89A3-FA52-436A-8050-656C328E5648}"/>
+                <a16:creationId xmlns:a16="http://schemas.microsoft.com/office/drawing/2014/main" id="{3634BC79-0C5E-4139-8501-3A6D18AF42C9}"/>
               </a:ext>
             </a:extLst>
           </p:cNvPr>
@@ -18575,7 +18575,7 @@
           <p:cNvPr id="12" name="">
             <a:extLst xmlns:a="http://schemas.openxmlformats.org/drawingml/2006/main">
               <a:ext uri="{FF2B5EF4-FFF2-40B4-BE49-F238E27FC236}">
-                <a16:creationId xmlns:a16="http://schemas.microsoft.com/office/drawing/2014/main" id="{CF9C3037-B9F4-458A-82D1-F7BED1C230CA}"/>
+                <a16:creationId xmlns:a16="http://schemas.microsoft.com/office/drawing/2014/main" id="{99854DCE-1108-43A2-8D2E-52A33240DFAF}"/>
               </a:ext>
             </a:extLst>
           </p:cNvPr>
@@ -18637,7 +18637,7 @@
           <p:cNvPr id="13" name="">
             <a:extLst xmlns:a="http://schemas.openxmlformats.org/drawingml/2006/main">
               <a:ext uri="{FF2B5EF4-FFF2-40B4-BE49-F238E27FC236}">
-                <a16:creationId xmlns:a16="http://schemas.microsoft.com/office/drawing/2014/main" id="{49B2CEC7-BB99-44DA-9279-01522830180D}"/>
+                <a16:creationId xmlns:a16="http://schemas.microsoft.com/office/drawing/2014/main" id="{3B7E9804-C264-4A82-8277-BC1D5620CEAC}"/>
               </a:ext>
             </a:extLst>
           </p:cNvPr>
@@ -18670,7 +18670,7 @@
           <p:cNvPr id="14" name="">
             <a:extLst xmlns:a="http://schemas.openxmlformats.org/drawingml/2006/main">
               <a:ext uri="{FF2B5EF4-FFF2-40B4-BE49-F238E27FC236}">
-                <a16:creationId xmlns:a16="http://schemas.microsoft.com/office/drawing/2014/main" id="{F3D8018F-1A50-4E8C-BBAD-E12ED249F5FB}"/>
+                <a16:creationId xmlns:a16="http://schemas.microsoft.com/office/drawing/2014/main" id="{80967D2B-4493-4131-B6B6-20F4DDC32B59}"/>
               </a:ext>
             </a:extLst>
           </p:cNvPr>
@@ -18705,7 +18705,7 @@
           <p:cNvPr id="15" name="">
             <a:extLst xmlns:a="http://schemas.openxmlformats.org/drawingml/2006/main">
               <a:ext uri="{FF2B5EF4-FFF2-40B4-BE49-F238E27FC236}">
-                <a16:creationId xmlns:a16="http://schemas.microsoft.com/office/drawing/2014/main" id="{48BD9E16-930B-49FD-A247-8C7999678045}"/>
+                <a16:creationId xmlns:a16="http://schemas.microsoft.com/office/drawing/2014/main" id="{9420F123-4274-4E34-A313-52042AF44850}"/>
               </a:ext>
             </a:extLst>
           </p:cNvPr>
@@ -18736,7 +18736,7 @@
           <p:cNvPr id="16" name="">
             <a:extLst xmlns:a="http://schemas.openxmlformats.org/drawingml/2006/main">
               <a:ext uri="{FF2B5EF4-FFF2-40B4-BE49-F238E27FC236}">
-                <a16:creationId xmlns:a16="http://schemas.microsoft.com/office/drawing/2014/main" id="{51FF8B39-472F-4B05-85B4-FE072586C0CF}"/>
+                <a16:creationId xmlns:a16="http://schemas.microsoft.com/office/drawing/2014/main" id="{AD671B43-E438-4F66-A32E-49AAAA75A8ED}"/>
               </a:ext>
             </a:extLst>
           </p:cNvPr>
@@ -18798,7 +18798,7 @@
           <p:cNvPr id="17" name="">
             <a:extLst xmlns:a="http://schemas.openxmlformats.org/drawingml/2006/main">
               <a:ext uri="{FF2B5EF4-FFF2-40B4-BE49-F238E27FC236}">
-                <a16:creationId xmlns:a16="http://schemas.microsoft.com/office/drawing/2014/main" id="{D9DCE0A6-7A4C-40DE-A229-8EE55B27DC9E}"/>
+                <a16:creationId xmlns:a16="http://schemas.microsoft.com/office/drawing/2014/main" id="{F96AC072-95E8-4410-8C15-5FFC5ABB760D}"/>
               </a:ext>
             </a:extLst>
           </p:cNvPr>
@@ -18860,7 +18860,7 @@
           <p:cNvPr id="18" name="">
             <a:extLst xmlns:a="http://schemas.openxmlformats.org/drawingml/2006/main">
               <a:ext uri="{FF2B5EF4-FFF2-40B4-BE49-F238E27FC236}">
-                <a16:creationId xmlns:a16="http://schemas.microsoft.com/office/drawing/2014/main" id="{5C12155C-2EB3-496C-B3E3-FF8580437303}"/>
+                <a16:creationId xmlns:a16="http://schemas.microsoft.com/office/drawing/2014/main" id="{9C5F54C9-9C12-4DE1-912D-28ACFECCD71C}"/>
               </a:ext>
             </a:extLst>
           </p:cNvPr>
@@ -18922,7 +18922,7 @@
           <p:cNvPr id="19" name="">
             <a:extLst xmlns:a="http://schemas.openxmlformats.org/drawingml/2006/main">
               <a:ext uri="{FF2B5EF4-FFF2-40B4-BE49-F238E27FC236}">
-                <a16:creationId xmlns:a16="http://schemas.microsoft.com/office/drawing/2014/main" id="{57498194-A2B4-4AC7-804D-5BC214005A96}"/>
+                <a16:creationId xmlns:a16="http://schemas.microsoft.com/office/drawing/2014/main" id="{70DE0CE6-FE7A-4FBB-B986-C4BDCE2A8A39}"/>
               </a:ext>
             </a:extLst>
           </p:cNvPr>
@@ -18955,7 +18955,7 @@
           <p:cNvPr id="20" name="">
             <a:extLst xmlns:a="http://schemas.openxmlformats.org/drawingml/2006/main">
               <a:ext uri="{FF2B5EF4-FFF2-40B4-BE49-F238E27FC236}">
-                <a16:creationId xmlns:a16="http://schemas.microsoft.com/office/drawing/2014/main" id="{159947C2-B113-4BCF-8567-AFD2524AFB74}"/>
+                <a16:creationId xmlns:a16="http://schemas.microsoft.com/office/drawing/2014/main" id="{208462F9-55A4-459E-853D-AE8C4517413E}"/>
               </a:ext>
             </a:extLst>
           </p:cNvPr>
@@ -18990,7 +18990,7 @@
           <p:cNvPr id="21" name="">
             <a:extLst xmlns:a="http://schemas.openxmlformats.org/drawingml/2006/main">
               <a:ext uri="{FF2B5EF4-FFF2-40B4-BE49-F238E27FC236}">
-                <a16:creationId xmlns:a16="http://schemas.microsoft.com/office/drawing/2014/main" id="{BAB1D31D-6004-4486-8579-F39698B12B07}"/>
+                <a16:creationId xmlns:a16="http://schemas.microsoft.com/office/drawing/2014/main" id="{FDDDDE55-B038-4655-ABC1-71D29EC737A7}"/>
               </a:ext>
             </a:extLst>
           </p:cNvPr>
@@ -19021,7 +19021,7 @@
           <p:cNvPr id="22" name="">
             <a:extLst xmlns:a="http://schemas.openxmlformats.org/drawingml/2006/main">
               <a:ext uri="{FF2B5EF4-FFF2-40B4-BE49-F238E27FC236}">
-                <a16:creationId xmlns:a16="http://schemas.microsoft.com/office/drawing/2014/main" id="{DFA9D065-BE91-4E0E-B2C8-5E0247CF300B}"/>
+                <a16:creationId xmlns:a16="http://schemas.microsoft.com/office/drawing/2014/main" id="{2A4383A3-9E14-405A-9ABB-609E072B12D3}"/>
               </a:ext>
             </a:extLst>
           </p:cNvPr>
@@ -19083,7 +19083,7 @@
           <p:cNvPr id="23" name="">
             <a:extLst xmlns:a="http://schemas.openxmlformats.org/drawingml/2006/main">
               <a:ext uri="{FF2B5EF4-FFF2-40B4-BE49-F238E27FC236}">
-                <a16:creationId xmlns:a16="http://schemas.microsoft.com/office/drawing/2014/main" id="{ADB03C6C-086E-44AE-AC0B-47B5D4D9B733}"/>
+                <a16:creationId xmlns:a16="http://schemas.microsoft.com/office/drawing/2014/main" id="{2660DAC8-65BA-4E14-8EAF-BECE08C9AB9C}"/>
               </a:ext>
             </a:extLst>
           </p:cNvPr>
@@ -19145,7 +19145,7 @@
           <p:cNvPr id="24" name="">
             <a:extLst xmlns:a="http://schemas.openxmlformats.org/drawingml/2006/main">
               <a:ext uri="{FF2B5EF4-FFF2-40B4-BE49-F238E27FC236}">
-                <a16:creationId xmlns:a16="http://schemas.microsoft.com/office/drawing/2014/main" id="{5F089276-C5CA-4F79-9DE9-D8D31FB9EE40}"/>
+                <a16:creationId xmlns:a16="http://schemas.microsoft.com/office/drawing/2014/main" id="{C7C0C0EA-FC5E-4202-BCD3-05CD43342886}"/>
               </a:ext>
             </a:extLst>
           </p:cNvPr>
@@ -19207,7 +19207,7 @@
           <p:cNvPr id="25" name="">
             <a:extLst xmlns:a="http://schemas.openxmlformats.org/drawingml/2006/main">
               <a:ext uri="{FF2B5EF4-FFF2-40B4-BE49-F238E27FC236}">
-                <a16:creationId xmlns:a16="http://schemas.microsoft.com/office/drawing/2014/main" id="{F8424458-DC9F-4501-97A5-7E463DD2B21B}"/>
+                <a16:creationId xmlns:a16="http://schemas.microsoft.com/office/drawing/2014/main" id="{A64F7CE3-1E29-4DE1-98EB-43922362EBA6}"/>
               </a:ext>
             </a:extLst>
           </p:cNvPr>
@@ -19240,7 +19240,7 @@
           <p:cNvPr id="26" name="">
             <a:extLst xmlns:a="http://schemas.openxmlformats.org/drawingml/2006/main">
               <a:ext uri="{FF2B5EF4-FFF2-40B4-BE49-F238E27FC236}">
-                <a16:creationId xmlns:a16="http://schemas.microsoft.com/office/drawing/2014/main" id="{07A42A93-0E98-474F-AAC0-759A3EC2A323}"/>
+                <a16:creationId xmlns:a16="http://schemas.microsoft.com/office/drawing/2014/main" id="{37605E10-DC55-4E07-8E0D-720845C0E1A3}"/>
               </a:ext>
             </a:extLst>
           </p:cNvPr>
@@ -19275,7 +19275,7 @@
           <p:cNvPr id="27" name="">
             <a:extLst xmlns:a="http://schemas.openxmlformats.org/drawingml/2006/main">
               <a:ext uri="{FF2B5EF4-FFF2-40B4-BE49-F238E27FC236}">
-                <a16:creationId xmlns:a16="http://schemas.microsoft.com/office/drawing/2014/main" id="{F4335BA3-ECF4-4F68-9D8C-6DD2F5003C8B}"/>
+                <a16:creationId xmlns:a16="http://schemas.microsoft.com/office/drawing/2014/main" id="{39386ACB-3FF4-4ABA-A1BD-607A06AACC07}"/>
               </a:ext>
             </a:extLst>
           </p:cNvPr>
@@ -19306,7 +19306,7 @@
           <p:cNvPr id="28" name="">
             <a:extLst xmlns:a="http://schemas.openxmlformats.org/drawingml/2006/main">
               <a:ext uri="{FF2B5EF4-FFF2-40B4-BE49-F238E27FC236}">
-                <a16:creationId xmlns:a16="http://schemas.microsoft.com/office/drawing/2014/main" id="{30C80AFF-B311-4BD6-9B1C-263543E212A0}"/>
+                <a16:creationId xmlns:a16="http://schemas.microsoft.com/office/drawing/2014/main" id="{96D88201-1816-404F-A967-BEB0CB8CB586}"/>
               </a:ext>
             </a:extLst>
           </p:cNvPr>
@@ -19368,7 +19368,7 @@
           <p:cNvPr id="29" name="">
             <a:extLst xmlns:a="http://schemas.openxmlformats.org/drawingml/2006/main">
               <a:ext uri="{FF2B5EF4-FFF2-40B4-BE49-F238E27FC236}">
-                <a16:creationId xmlns:a16="http://schemas.microsoft.com/office/drawing/2014/main" id="{16109220-9C46-4DB0-B16D-2B67DC930355}"/>
+                <a16:creationId xmlns:a16="http://schemas.microsoft.com/office/drawing/2014/main" id="{533482C7-90E1-4F98-9F9F-9E511B321462}"/>
               </a:ext>
             </a:extLst>
           </p:cNvPr>
@@ -19430,7 +19430,7 @@
           <p:cNvPr id="30" name="">
             <a:extLst xmlns:a="http://schemas.openxmlformats.org/drawingml/2006/main">
               <a:ext uri="{FF2B5EF4-FFF2-40B4-BE49-F238E27FC236}">
-                <a16:creationId xmlns:a16="http://schemas.microsoft.com/office/drawing/2014/main" id="{82BED1EF-304B-4795-8A0F-3CCB6451190E}"/>
+                <a16:creationId xmlns:a16="http://schemas.microsoft.com/office/drawing/2014/main" id="{1C42A66C-6F65-44B7-AF4F-A40336BF5636}"/>
               </a:ext>
             </a:extLst>
           </p:cNvPr>
@@ -19492,7 +19492,7 @@
           <p:cNvPr id="31" name="">
             <a:extLst xmlns:a="http://schemas.openxmlformats.org/drawingml/2006/main">
               <a:ext uri="{FF2B5EF4-FFF2-40B4-BE49-F238E27FC236}">
-                <a16:creationId xmlns:a16="http://schemas.microsoft.com/office/drawing/2014/main" id="{8C09E687-497E-4D47-8DE2-CD987C785BFC}"/>
+                <a16:creationId xmlns:a16="http://schemas.microsoft.com/office/drawing/2014/main" id="{AE6AE88B-53F0-4517-8867-DDE6FDCAC7F3}"/>
               </a:ext>
             </a:extLst>
           </p:cNvPr>
@@ -19554,7 +19554,7 @@
           <p:cNvPr id="32" name="">
             <a:extLst xmlns:a="http://schemas.openxmlformats.org/drawingml/2006/main">
               <a:ext uri="{FF2B5EF4-FFF2-40B4-BE49-F238E27FC236}">
-                <a16:creationId xmlns:a16="http://schemas.microsoft.com/office/drawing/2014/main" id="{E1C89BAE-316D-4C26-837F-58A5EA6D4645}"/>
+                <a16:creationId xmlns:a16="http://schemas.microsoft.com/office/drawing/2014/main" id="{187657BB-23AA-491A-866A-DD02F2083434}"/>
               </a:ext>
             </a:extLst>
           </p:cNvPr>
@@ -19614,7 +19614,7 @@
     </p:spTree>
     <p:extLst>
       <p:ext uri="{BB962C8B-B14F-4D97-AF65-F5344CB8AC3E}">
-        <p14:creationId xmlns:p14="http://schemas.microsoft.com/office/powerpoint/2010/main" val="1146604447"/>
+        <p14:creationId xmlns:p14="http://schemas.microsoft.com/office/powerpoint/2010/main" val="937025853"/>
       </p:ext>
     </p:extLst>
   </p:cSld>
@@ -19642,7 +19642,7 @@
           <p:nvPr/>
         </p:nvPicPr>
         <p:blipFill>
-          <a:blip xmlns:r="http://schemas.openxmlformats.org/officeDocument/2006/relationships" xmlns:a="http://schemas.openxmlformats.org/drawingml/2006/main" r:embed="R9a52154aa13b402f"/>
+          <a:blip xmlns:r="http://schemas.openxmlformats.org/officeDocument/2006/relationships" xmlns:a="http://schemas.openxmlformats.org/drawingml/2006/main" r:embed="Rbe1dcbb76d3f4303"/>
           <a:srcRect xmlns:a="http://schemas.openxmlformats.org/drawingml/2006/main" l="0" t="0" r="0" b="0"/>
           <a:stretch xmlns:a="http://schemas.openxmlformats.org/drawingml/2006/main">
             <a:fillRect l="0" t="0" r="0" b="0"/>
@@ -19663,7 +19663,7 @@
           <p:cNvPr id="2" name="">
             <a:extLst xmlns:a="http://schemas.openxmlformats.org/drawingml/2006/main">
               <a:ext uri="{FF2B5EF4-FFF2-40B4-BE49-F238E27FC236}">
-                <a16:creationId xmlns:a16="http://schemas.microsoft.com/office/drawing/2014/main" id="{32E59D35-093C-4D05-9C3B-A4FA3CB368B7}"/>
+                <a16:creationId xmlns:a16="http://schemas.microsoft.com/office/drawing/2014/main" id="{BD20C45B-65B7-46BD-8B18-DA7A1AAC065B}"/>
               </a:ext>
             </a:extLst>
           </p:cNvPr>
@@ -19725,7 +19725,7 @@
           <p:cNvPr id="3" name="">
             <a:extLst xmlns:a="http://schemas.openxmlformats.org/drawingml/2006/main">
               <a:ext uri="{FF2B5EF4-FFF2-40B4-BE49-F238E27FC236}">
-                <a16:creationId xmlns:a16="http://schemas.microsoft.com/office/drawing/2014/main" id="{786AEEF3-37EA-4CCE-BD21-90BB9D96D095}"/>
+                <a16:creationId xmlns:a16="http://schemas.microsoft.com/office/drawing/2014/main" id="{1F5BB883-6171-409A-905E-76B115707A82}"/>
               </a:ext>
             </a:extLst>
           </p:cNvPr>
@@ -19787,7 +19787,7 @@
           <p:cNvPr id="4" name="">
             <a:extLst xmlns:a="http://schemas.openxmlformats.org/drawingml/2006/main">
               <a:ext uri="{FF2B5EF4-FFF2-40B4-BE49-F238E27FC236}">
-                <a16:creationId xmlns:a16="http://schemas.microsoft.com/office/drawing/2014/main" id="{03B614CE-AFE1-41A2-9B26-3169703CD6BA}"/>
+                <a16:creationId xmlns:a16="http://schemas.microsoft.com/office/drawing/2014/main" id="{2968E203-CDF8-4B76-B05F-75059261A847}"/>
               </a:ext>
             </a:extLst>
           </p:cNvPr>
@@ -19849,7 +19849,7 @@
           <p:cNvPr id="5" name="">
             <a:extLst xmlns:a="http://schemas.openxmlformats.org/drawingml/2006/main">
               <a:ext uri="{FF2B5EF4-FFF2-40B4-BE49-F238E27FC236}">
-                <a16:creationId xmlns:a16="http://schemas.microsoft.com/office/drawing/2014/main" id="{0A80F75F-D0D1-4DA7-A12C-47BF5C2AE32B}"/>
+                <a16:creationId xmlns:a16="http://schemas.microsoft.com/office/drawing/2014/main" id="{ED56373C-5ABA-4AF1-80A3-250509D2556E}"/>
               </a:ext>
             </a:extLst>
           </p:cNvPr>
@@ -19880,7 +19880,7 @@
           <p:cNvPr id="6" name="">
             <a:extLst xmlns:a="http://schemas.openxmlformats.org/drawingml/2006/main">
               <a:ext uri="{FF2B5EF4-FFF2-40B4-BE49-F238E27FC236}">
-                <a16:creationId xmlns:a16="http://schemas.microsoft.com/office/drawing/2014/main" id="{AEAD2404-A53D-4E48-87AE-E5E9C894FFDF}"/>
+                <a16:creationId xmlns:a16="http://schemas.microsoft.com/office/drawing/2014/main" id="{590C0BF3-CBB8-447C-B642-C6AB66186959}"/>
               </a:ext>
             </a:extLst>
           </p:cNvPr>
@@ -19942,7 +19942,7 @@
           <p:cNvPr id="7" name="">
             <a:extLst xmlns:a="http://schemas.openxmlformats.org/drawingml/2006/main">
               <a:ext uri="{FF2B5EF4-FFF2-40B4-BE49-F238E27FC236}">
-                <a16:creationId xmlns:a16="http://schemas.microsoft.com/office/drawing/2014/main" id="{4536F664-7EDA-40D7-9A92-C17C7EBC907B}"/>
+                <a16:creationId xmlns:a16="http://schemas.microsoft.com/office/drawing/2014/main" id="{F0BAEC65-A78D-46F1-B002-65B62455A9A5}"/>
               </a:ext>
             </a:extLst>
           </p:cNvPr>
@@ -19975,7 +19975,7 @@
           <p:cNvPr id="8" name="">
             <a:extLst xmlns:a="http://schemas.openxmlformats.org/drawingml/2006/main">
               <a:ext uri="{FF2B5EF4-FFF2-40B4-BE49-F238E27FC236}">
-                <a16:creationId xmlns:a16="http://schemas.microsoft.com/office/drawing/2014/main" id="{E080ACA1-2C5C-4009-897A-0C187E2EB742}"/>
+                <a16:creationId xmlns:a16="http://schemas.microsoft.com/office/drawing/2014/main" id="{DF678313-5588-49D4-A04B-8E27C0BBF3C7}"/>
               </a:ext>
             </a:extLst>
           </p:cNvPr>
@@ -20010,7 +20010,7 @@
           <p:cNvPr id="9" name="">
             <a:extLst xmlns:a="http://schemas.openxmlformats.org/drawingml/2006/main">
               <a:ext uri="{FF2B5EF4-FFF2-40B4-BE49-F238E27FC236}">
-                <a16:creationId xmlns:a16="http://schemas.microsoft.com/office/drawing/2014/main" id="{C86ADC70-9140-47CA-BF86-4464E42CC260}"/>
+                <a16:creationId xmlns:a16="http://schemas.microsoft.com/office/drawing/2014/main" id="{DA12AF87-EDF2-47F1-89FA-2A199F17ECA2}"/>
               </a:ext>
             </a:extLst>
           </p:cNvPr>
@@ -20041,7 +20041,7 @@
           <p:cNvPr id="10" name="">
             <a:extLst xmlns:a="http://schemas.openxmlformats.org/drawingml/2006/main">
               <a:ext uri="{FF2B5EF4-FFF2-40B4-BE49-F238E27FC236}">
-                <a16:creationId xmlns:a16="http://schemas.microsoft.com/office/drawing/2014/main" id="{018FC942-2873-4F21-8441-05964C9B9505}"/>
+                <a16:creationId xmlns:a16="http://schemas.microsoft.com/office/drawing/2014/main" id="{E58C7053-2E88-4A28-8061-91F1326AE202}"/>
               </a:ext>
             </a:extLst>
           </p:cNvPr>
@@ -20103,7 +20103,7 @@
           <p:cNvPr id="11" name="">
             <a:extLst xmlns:a="http://schemas.openxmlformats.org/drawingml/2006/main">
               <a:ext uri="{FF2B5EF4-FFF2-40B4-BE49-F238E27FC236}">
-                <a16:creationId xmlns:a16="http://schemas.microsoft.com/office/drawing/2014/main" id="{360D72FD-05DE-4B8E-8FC2-76D3238B68FB}"/>
+                <a16:creationId xmlns:a16="http://schemas.microsoft.com/office/drawing/2014/main" id="{EFA72132-0E48-49B1-BAB7-223A9043CF3F}"/>
               </a:ext>
             </a:extLst>
           </p:cNvPr>
@@ -20165,7 +20165,7 @@
           <p:cNvPr id="12" name="">
             <a:extLst xmlns:a="http://schemas.openxmlformats.org/drawingml/2006/main">
               <a:ext uri="{FF2B5EF4-FFF2-40B4-BE49-F238E27FC236}">
-                <a16:creationId xmlns:a16="http://schemas.microsoft.com/office/drawing/2014/main" id="{D3E6FD75-FCF2-4CBA-BA0F-D8E45AAAA505}"/>
+                <a16:creationId xmlns:a16="http://schemas.microsoft.com/office/drawing/2014/main" id="{8F329CBF-D1C5-41BF-93C8-F53645251C14}"/>
               </a:ext>
             </a:extLst>
           </p:cNvPr>
@@ -20198,7 +20198,7 @@
           <p:cNvPr id="13" name="">
             <a:extLst xmlns:a="http://schemas.openxmlformats.org/drawingml/2006/main">
               <a:ext uri="{FF2B5EF4-FFF2-40B4-BE49-F238E27FC236}">
-                <a16:creationId xmlns:a16="http://schemas.microsoft.com/office/drawing/2014/main" id="{D8060EF0-5FD3-42E9-9D06-E56D4C38DC99}"/>
+                <a16:creationId xmlns:a16="http://schemas.microsoft.com/office/drawing/2014/main" id="{CC82D972-5040-421E-A72D-E34D84BF1C8E}"/>
               </a:ext>
             </a:extLst>
           </p:cNvPr>
@@ -20233,7 +20233,7 @@
           <p:cNvPr id="14" name="">
             <a:extLst xmlns:a="http://schemas.openxmlformats.org/drawingml/2006/main">
               <a:ext uri="{FF2B5EF4-FFF2-40B4-BE49-F238E27FC236}">
-                <a16:creationId xmlns:a16="http://schemas.microsoft.com/office/drawing/2014/main" id="{07D7386F-07C9-49D1-B720-E125720F58AB}"/>
+                <a16:creationId xmlns:a16="http://schemas.microsoft.com/office/drawing/2014/main" id="{2F0E1346-B035-47AE-A2DF-A47F99D3284C}"/>
               </a:ext>
             </a:extLst>
           </p:cNvPr>
@@ -20264,7 +20264,7 @@
           <p:cNvPr id="15" name="">
             <a:extLst xmlns:a="http://schemas.openxmlformats.org/drawingml/2006/main">
               <a:ext uri="{FF2B5EF4-FFF2-40B4-BE49-F238E27FC236}">
-                <a16:creationId xmlns:a16="http://schemas.microsoft.com/office/drawing/2014/main" id="{DAC1A7F3-ECF5-4C62-B498-D8EBC8929C81}"/>
+                <a16:creationId xmlns:a16="http://schemas.microsoft.com/office/drawing/2014/main" id="{2837FB28-2CF8-42A9-931C-A066814F82A3}"/>
               </a:ext>
             </a:extLst>
           </p:cNvPr>
@@ -20326,7 +20326,7 @@
           <p:cNvPr id="16" name="">
             <a:extLst xmlns:a="http://schemas.openxmlformats.org/drawingml/2006/main">
               <a:ext uri="{FF2B5EF4-FFF2-40B4-BE49-F238E27FC236}">
-                <a16:creationId xmlns:a16="http://schemas.microsoft.com/office/drawing/2014/main" id="{A8F53777-2973-47D8-9831-DE9888C44882}"/>
+                <a16:creationId xmlns:a16="http://schemas.microsoft.com/office/drawing/2014/main" id="{3F610974-DBAA-4A26-9D3B-E227916303EB}"/>
               </a:ext>
             </a:extLst>
           </p:cNvPr>
@@ -20388,7 +20388,7 @@
           <p:cNvPr id="17" name="">
             <a:extLst xmlns:a="http://schemas.openxmlformats.org/drawingml/2006/main">
               <a:ext uri="{FF2B5EF4-FFF2-40B4-BE49-F238E27FC236}">
-                <a16:creationId xmlns:a16="http://schemas.microsoft.com/office/drawing/2014/main" id="{9D89AF05-A39B-4CE9-A472-47F6A849E8AE}"/>
+                <a16:creationId xmlns:a16="http://schemas.microsoft.com/office/drawing/2014/main" id="{1A78FB23-D1F1-4EC6-B52A-6D0D292A4F1E}"/>
               </a:ext>
             </a:extLst>
           </p:cNvPr>
@@ -20421,7 +20421,7 @@
           <p:cNvPr id="18" name="">
             <a:extLst xmlns:a="http://schemas.openxmlformats.org/drawingml/2006/main">
               <a:ext uri="{FF2B5EF4-FFF2-40B4-BE49-F238E27FC236}">
-                <a16:creationId xmlns:a16="http://schemas.microsoft.com/office/drawing/2014/main" id="{7C7EE03B-C088-467A-BB68-74B3C0E3FCBD}"/>
+                <a16:creationId xmlns:a16="http://schemas.microsoft.com/office/drawing/2014/main" id="{AA000BD0-4C57-4DCF-8B3D-1619F21B1453}"/>
               </a:ext>
             </a:extLst>
           </p:cNvPr>
@@ -20456,7 +20456,7 @@
           <p:cNvPr id="19" name="">
             <a:extLst xmlns:a="http://schemas.openxmlformats.org/drawingml/2006/main">
               <a:ext uri="{FF2B5EF4-FFF2-40B4-BE49-F238E27FC236}">
-                <a16:creationId xmlns:a16="http://schemas.microsoft.com/office/drawing/2014/main" id="{B00822AA-03E0-4564-B44F-3147A4D0DD40}"/>
+                <a16:creationId xmlns:a16="http://schemas.microsoft.com/office/drawing/2014/main" id="{B77CB2D3-33D6-4D4C-9A77-21F2629930BC}"/>
               </a:ext>
             </a:extLst>
           </p:cNvPr>
@@ -20487,7 +20487,7 @@
           <p:cNvPr id="20" name="">
             <a:extLst xmlns:a="http://schemas.openxmlformats.org/drawingml/2006/main">
               <a:ext uri="{FF2B5EF4-FFF2-40B4-BE49-F238E27FC236}">
-                <a16:creationId xmlns:a16="http://schemas.microsoft.com/office/drawing/2014/main" id="{A085E147-DA66-4EB0-B64D-1E0F3A00B8F1}"/>
+                <a16:creationId xmlns:a16="http://schemas.microsoft.com/office/drawing/2014/main" id="{5F51D3E9-7839-401C-A912-386A84CE7B06}"/>
               </a:ext>
             </a:extLst>
           </p:cNvPr>
@@ -20549,7 +20549,7 @@
           <p:cNvPr id="21" name="">
             <a:extLst xmlns:a="http://schemas.openxmlformats.org/drawingml/2006/main">
               <a:ext uri="{FF2B5EF4-FFF2-40B4-BE49-F238E27FC236}">
-                <a16:creationId xmlns:a16="http://schemas.microsoft.com/office/drawing/2014/main" id="{F31F851A-A80D-4701-99C3-A6E8602544C2}"/>
+                <a16:creationId xmlns:a16="http://schemas.microsoft.com/office/drawing/2014/main" id="{A8F7F909-2620-4FA6-86B8-ED9A2C3262D1}"/>
               </a:ext>
             </a:extLst>
           </p:cNvPr>
@@ -20611,7 +20611,7 @@
           <p:cNvPr id="22" name="">
             <a:extLst xmlns:a="http://schemas.openxmlformats.org/drawingml/2006/main">
               <a:ext uri="{FF2B5EF4-FFF2-40B4-BE49-F238E27FC236}">
-                <a16:creationId xmlns:a16="http://schemas.microsoft.com/office/drawing/2014/main" id="{8B716151-3C4E-4577-A611-16A520BBAC5C}"/>
+                <a16:creationId xmlns:a16="http://schemas.microsoft.com/office/drawing/2014/main" id="{E79E5C04-439C-4757-A125-6414A7BDDC59}"/>
               </a:ext>
             </a:extLst>
           </p:cNvPr>
@@ -20673,7 +20673,7 @@
           <p:cNvPr id="23" name="">
             <a:extLst xmlns:a="http://schemas.openxmlformats.org/drawingml/2006/main">
               <a:ext uri="{FF2B5EF4-FFF2-40B4-BE49-F238E27FC236}">
-                <a16:creationId xmlns:a16="http://schemas.microsoft.com/office/drawing/2014/main" id="{65AF88FB-E10D-4EB8-8E92-FA85F48BF967}"/>
+                <a16:creationId xmlns:a16="http://schemas.microsoft.com/office/drawing/2014/main" id="{45753636-5A3B-4B21-B53A-11FD0FB006B0}"/>
               </a:ext>
             </a:extLst>
           </p:cNvPr>
@@ -20733,7 +20733,7 @@
     </p:spTree>
     <p:extLst>
       <p:ext uri="{BB962C8B-B14F-4D97-AF65-F5344CB8AC3E}">
-        <p14:creationId xmlns:p14="http://schemas.microsoft.com/office/powerpoint/2010/main" val="707616208"/>
+        <p14:creationId xmlns:p14="http://schemas.microsoft.com/office/powerpoint/2010/main" val="618675199"/>
       </p:ext>
     </p:extLst>
   </p:cSld>
